--- a/submission/GCB/figures_SI/FigS1.pptx
+++ b/submission/GCB/figures_SI/FigS1.pptx
@@ -584,7 +584,7 @@
         </p:nvSpPr>
         <p:spPr>
           <a:xfrm>
-            <a:off x="551160" y="2070720"/>
+            <a:off x="551160" y="2060280"/>
             <a:ext cx="1851840" cy="0"/>
           </a:xfrm>
           <a:prstGeom prst="line">
@@ -627,7 +627,7 @@
         </p:nvSpPr>
         <p:spPr>
           <a:xfrm>
-            <a:off x="551160" y="1438920"/>
+            <a:off x="551160" y="1418760"/>
             <a:ext cx="1851840" cy="0"/>
           </a:xfrm>
           <a:prstGeom prst="line">
@@ -670,7 +670,7 @@
         </p:nvSpPr>
         <p:spPr>
           <a:xfrm>
-            <a:off x="551160" y="807480"/>
+            <a:off x="551160" y="777240"/>
             <a:ext cx="1851840" cy="0"/>
           </a:xfrm>
           <a:prstGeom prst="line">
@@ -773,8 +773,8 @@
         </p:nvSpPr>
         <p:spPr>
           <a:xfrm>
-            <a:off x="932040" y="1455480"/>
-            <a:ext cx="194400" cy="1247040"/>
+            <a:off x="932040" y="1477080"/>
+            <a:ext cx="194400" cy="1225440"/>
           </a:xfrm>
           <a:custGeom>
             <a:avLst/>
@@ -782,7 +782,7 @@
             <a:ahLst/>
             <a:rect l="0" t="0" r="r" b="b"/>
             <a:pathLst>
-              <a:path w="540" h="3464">
+              <a:path w="540" h="3404">
                 <a:moveTo>
                   <a:pt x="0" y="0"/>
                 </a:moveTo>
@@ -790,10 +790,10 @@
                   <a:pt x="540" y="0"/>
                 </a:lnTo>
                 <a:lnTo>
-                  <a:pt x="540" y="3464"/>
-                </a:lnTo>
-                <a:lnTo>
-                  <a:pt x="0" y="3464"/>
+                  <a:pt x="540" y="3404"/>
+                </a:lnTo>
+                <a:lnTo>
+                  <a:pt x="0" y="3404"/>
                 </a:lnTo>
                 <a:lnTo>
                   <a:pt x="0" y="0"/>
@@ -833,8 +833,8 @@
         </p:nvSpPr>
         <p:spPr>
           <a:xfrm>
-            <a:off x="1230840" y="1757160"/>
-            <a:ext cx="194400" cy="945360"/>
+            <a:off x="1230840" y="1764360"/>
+            <a:ext cx="194400" cy="938160"/>
           </a:xfrm>
           <a:custGeom>
             <a:avLst/>
@@ -842,7 +842,7 @@
             <a:ahLst/>
             <a:rect l="0" t="0" r="r" b="b"/>
             <a:pathLst>
-              <a:path w="540" h="2626">
+              <a:path w="540" h="2606">
                 <a:moveTo>
                   <a:pt x="0" y="0"/>
                 </a:moveTo>
@@ -850,10 +850,10 @@
                   <a:pt x="540" y="0"/>
                 </a:lnTo>
                 <a:lnTo>
-                  <a:pt x="540" y="2626"/>
-                </a:lnTo>
-                <a:lnTo>
-                  <a:pt x="0" y="2626"/>
+                  <a:pt x="540" y="2606"/>
+                </a:lnTo>
+                <a:lnTo>
+                  <a:pt x="0" y="2606"/>
                 </a:lnTo>
                 <a:lnTo>
                   <a:pt x="0" y="0"/>
@@ -893,8 +893,8 @@
         </p:nvSpPr>
         <p:spPr>
           <a:xfrm>
-            <a:off x="1529280" y="2635560"/>
-            <a:ext cx="194760" cy="66960"/>
+            <a:off x="1529280" y="2659320"/>
+            <a:ext cx="194760" cy="43200"/>
           </a:xfrm>
           <a:custGeom>
             <a:avLst/>
@@ -902,7 +902,7 @@
             <a:ahLst/>
             <a:rect l="0" t="0" r="r" b="b"/>
             <a:pathLst>
-              <a:path w="541" h="186">
+              <a:path w="541" h="120">
                 <a:moveTo>
                   <a:pt x="0" y="0"/>
                 </a:moveTo>
@@ -910,10 +910,10 @@
                   <a:pt x="541" y="0"/>
                 </a:lnTo>
                 <a:lnTo>
-                  <a:pt x="541" y="186"/>
-                </a:lnTo>
-                <a:lnTo>
-                  <a:pt x="0" y="186"/>
+                  <a:pt x="541" y="120"/>
+                </a:lnTo>
+                <a:lnTo>
+                  <a:pt x="0" y="120"/>
                 </a:lnTo>
                 <a:lnTo>
                   <a:pt x="0" y="0"/>
@@ -953,8 +953,8 @@
         </p:nvSpPr>
         <p:spPr>
           <a:xfrm>
-            <a:off x="1828080" y="2645280"/>
-            <a:ext cx="194400" cy="57240"/>
+            <a:off x="1828080" y="2668680"/>
+            <a:ext cx="194400" cy="33840"/>
           </a:xfrm>
           <a:custGeom>
             <a:avLst/>
@@ -962,7 +962,7 @@
             <a:ahLst/>
             <a:rect l="0" t="0" r="r" b="b"/>
             <a:pathLst>
-              <a:path w="540" h="159">
+              <a:path w="540" h="94">
                 <a:moveTo>
                   <a:pt x="0" y="0"/>
                 </a:moveTo>
@@ -970,10 +970,10 @@
                   <a:pt x="540" y="0"/>
                 </a:lnTo>
                 <a:lnTo>
-                  <a:pt x="540" y="159"/>
-                </a:lnTo>
-                <a:lnTo>
-                  <a:pt x="0" y="159"/>
+                  <a:pt x="540" y="94"/>
+                </a:lnTo>
+                <a:lnTo>
+                  <a:pt x="0" y="94"/>
                 </a:lnTo>
                 <a:lnTo>
                   <a:pt x="0" y="0"/>
@@ -1040,7 +1040,7 @@
                 <a:latin typeface="Arial"/>
                 <a:ea typeface="Arial"/>
               </a:rPr>
-              <a:t>163.1</a:t>
+              <a:t>160.6</a:t>
             </a:r>
             <a:endParaRPr lang="en-US" sz="810" b="0" u="none" strike="noStrike">
               <a:solidFill>
@@ -1061,7 +1061,7 @@
         </p:nvSpPr>
         <p:spPr>
           <a:xfrm>
-            <a:off x="921240" y="1328760"/>
+            <a:off x="921240" y="1350000"/>
             <a:ext cx="202320" cy="104040"/>
           </a:xfrm>
           <a:prstGeom prst="rect">
@@ -1088,7 +1088,7 @@
                 <a:latin typeface="Arial"/>
                 <a:ea typeface="Arial"/>
               </a:rPr>
-              <a:t>98.7</a:t>
+              <a:t>95.5</a:t>
             </a:r>
             <a:endParaRPr lang="en-US" sz="810" b="0" u="none" strike="noStrike">
               <a:solidFill>
@@ -1109,7 +1109,7 @@
         </p:nvSpPr>
         <p:spPr>
           <a:xfrm>
-            <a:off x="1220040" y="1630080"/>
+            <a:off x="1220040" y="1637640"/>
             <a:ext cx="202320" cy="104040"/>
           </a:xfrm>
           <a:prstGeom prst="rect">
@@ -1136,7 +1136,7 @@
                 <a:latin typeface="Arial"/>
                 <a:ea typeface="Arial"/>
               </a:rPr>
-              <a:t>74.8</a:t>
+              <a:t>73.1</a:t>
             </a:r>
             <a:endParaRPr lang="en-US" sz="810" b="0" u="none" strike="noStrike">
               <a:solidFill>
@@ -1157,7 +1157,7 @@
         </p:nvSpPr>
         <p:spPr>
           <a:xfrm>
-            <a:off x="1550520" y="2508840"/>
+            <a:off x="1550520" y="2532600"/>
             <a:ext cx="144720" cy="104040"/>
           </a:xfrm>
           <a:prstGeom prst="rect">
@@ -1184,7 +1184,7 @@
                 <a:latin typeface="Arial"/>
                 <a:ea typeface="Arial"/>
               </a:rPr>
-              <a:t>5.2</a:t>
+              <a:t>3.3</a:t>
             </a:r>
             <a:endParaRPr lang="en-US" sz="810" b="0" u="none" strike="noStrike">
               <a:solidFill>
@@ -1205,7 +1205,7 @@
         </p:nvSpPr>
         <p:spPr>
           <a:xfrm>
-            <a:off x="1849320" y="2518560"/>
+            <a:off x="1849320" y="2541960"/>
             <a:ext cx="144720" cy="104040"/>
           </a:xfrm>
           <a:prstGeom prst="rect">
@@ -1232,7 +1232,7 @@
                 <a:latin typeface="Arial"/>
                 <a:ea typeface="Arial"/>
               </a:rPr>
-              <a:t>4.5</a:t>
+              <a:t>2.6</a:t>
             </a:r>
             <a:endParaRPr lang="en-US" sz="810" b="0" u="none" strike="noStrike">
               <a:solidFill>
@@ -1392,7 +1392,7 @@
         </p:nvSpPr>
         <p:spPr>
           <a:xfrm>
-            <a:off x="393120" y="2019960"/>
+            <a:off x="393120" y="2009880"/>
             <a:ext cx="114120" cy="102600"/>
           </a:xfrm>
           <a:prstGeom prst="rect">
@@ -1440,7 +1440,7 @@
         </p:nvSpPr>
         <p:spPr>
           <a:xfrm>
-            <a:off x="342000" y="1388520"/>
+            <a:off x="342000" y="1368000"/>
             <a:ext cx="171000" cy="102600"/>
           </a:xfrm>
           <a:prstGeom prst="rect">
@@ -1531,7 +1531,7 @@
         </p:nvSpPr>
         <p:spPr>
           <a:xfrm>
-            <a:off x="519840" y="2070720"/>
+            <a:off x="519840" y="2060280"/>
             <a:ext cx="31320" cy="0"/>
           </a:xfrm>
           <a:prstGeom prst="line">
@@ -1574,7 +1574,7 @@
         </p:nvSpPr>
         <p:spPr>
           <a:xfrm>
-            <a:off x="519840" y="1438920"/>
+            <a:off x="519840" y="1418760"/>
             <a:ext cx="31320" cy="0"/>
           </a:xfrm>
           <a:prstGeom prst="line">
@@ -1617,7 +1617,7 @@
         </p:nvSpPr>
         <p:spPr>
           <a:xfrm>
-            <a:off x="519840" y="807480"/>
+            <a:off x="519840" y="777240"/>
             <a:ext cx="31320" cy="0"/>
           </a:xfrm>
           <a:prstGeom prst="line">
@@ -1961,7 +1961,7 @@
         </p:nvSpPr>
         <p:spPr>
           <a:xfrm>
-            <a:off x="342000" y="756720"/>
+            <a:off x="342000" y="726480"/>
             <a:ext cx="171000" cy="102600"/>
           </a:xfrm>
           <a:prstGeom prst="rect">
@@ -2597,7 +2597,7 @@
         </p:nvSpPr>
         <p:spPr>
           <a:xfrm>
-            <a:off x="2960640" y="2349000"/>
+            <a:off x="2960640" y="2358720"/>
             <a:ext cx="1851840" cy="0"/>
           </a:xfrm>
           <a:prstGeom prst="line">
@@ -2640,7 +2640,7 @@
         </p:nvSpPr>
         <p:spPr>
           <a:xfrm>
-            <a:off x="2960640" y="1744560"/>
+            <a:off x="2960640" y="1749600"/>
             <a:ext cx="1851840" cy="0"/>
           </a:xfrm>
           <a:prstGeom prst="line">
@@ -2683,7 +2683,7 @@
         </p:nvSpPr>
         <p:spPr>
           <a:xfrm>
-            <a:off x="2960640" y="1140480"/>
+            <a:off x="2960640" y="1140840"/>
             <a:ext cx="1851840" cy="0"/>
           </a:xfrm>
           <a:prstGeom prst="line">
@@ -2726,8 +2726,8 @@
         </p:nvSpPr>
         <p:spPr>
           <a:xfrm>
-            <a:off x="3139920" y="2014200"/>
-            <a:ext cx="1493640" cy="688320"/>
+            <a:off x="3139920" y="2014920"/>
+            <a:ext cx="1493640" cy="687600"/>
           </a:xfrm>
           <a:custGeom>
             <a:avLst/>
@@ -2735,15 +2735,15 @@
             <a:ahLst/>
             <a:rect l="0" t="0" r="r" b="b"/>
             <a:pathLst>
-              <a:path fill="none" w="4149" h="1912">
+              <a:path fill="none" w="4149" h="1910">
                 <a:moveTo>
-                  <a:pt x="0" y="1912"/>
+                  <a:pt x="0" y="1910"/>
                 </a:moveTo>
                 <a:lnTo>
-                  <a:pt x="830" y="1148"/>
-                </a:lnTo>
-                <a:lnTo>
-                  <a:pt x="1661" y="1124"/>
+                  <a:pt x="830" y="1134"/>
+                </a:lnTo>
+                <a:lnTo>
+                  <a:pt x="1661" y="1106"/>
                 </a:lnTo>
                 <a:lnTo>
                   <a:pt x="2490" y="0"/>
@@ -2752,7 +2752,7 @@
                   <a:pt x="3320" y="68"/>
                 </a:lnTo>
                 <a:lnTo>
-                  <a:pt x="4149" y="133"/>
+                  <a:pt x="4149" y="105"/>
                 </a:lnTo>
               </a:path>
             </a:pathLst>
@@ -2789,7 +2789,7 @@
         <p:spPr>
           <a:xfrm>
             <a:off x="3139920" y="641520"/>
-            <a:ext cx="1493640" cy="537840"/>
+            <a:ext cx="1493640" cy="534960"/>
           </a:xfrm>
           <a:custGeom>
             <a:avLst/>
@@ -2797,15 +2797,15 @@
             <a:ahLst/>
             <a:rect l="0" t="0" r="r" b="b"/>
             <a:pathLst>
-              <a:path fill="none" w="4149" h="1494">
+              <a:path fill="none" w="4149" h="1486">
                 <a:moveTo>
-                  <a:pt x="0" y="1494"/>
+                  <a:pt x="0" y="1486"/>
                 </a:moveTo>
                 <a:lnTo>
-                  <a:pt x="830" y="1212"/>
-                </a:lnTo>
-                <a:lnTo>
-                  <a:pt x="1661" y="1074"/>
+                  <a:pt x="830" y="1206"/>
+                </a:lnTo>
+                <a:lnTo>
+                  <a:pt x="1661" y="1076"/>
                 </a:lnTo>
                 <a:lnTo>
                   <a:pt x="2490" y="91"/>
@@ -2814,7 +2814,7 @@
                   <a:pt x="3320" y="0"/>
                 </a:lnTo>
                 <a:lnTo>
-                  <a:pt x="4149" y="111"/>
+                  <a:pt x="4149" y="106"/>
                 </a:lnTo>
               </a:path>
             </a:pathLst>
@@ -2851,7 +2851,7 @@
         <p:spPr>
           <a:xfrm>
             <a:off x="3139920" y="1402200"/>
-            <a:ext cx="1493640" cy="20520"/>
+            <a:ext cx="1493640" cy="8640"/>
           </a:xfrm>
           <a:custGeom>
             <a:avLst/>
@@ -2859,24 +2859,24 @@
             <a:ahLst/>
             <a:rect l="0" t="0" r="r" b="b"/>
             <a:pathLst>
-              <a:path fill="none" w="4149" h="57">
+              <a:path fill="none" w="4149" h="24">
                 <a:moveTo>
                   <a:pt x="0" y="0"/>
                 </a:moveTo>
                 <a:lnTo>
-                  <a:pt x="830" y="12"/>
-                </a:lnTo>
-                <a:lnTo>
-                  <a:pt x="1661" y="57"/>
-                </a:lnTo>
-                <a:lnTo>
-                  <a:pt x="2490" y="14"/>
-                </a:lnTo>
-                <a:lnTo>
-                  <a:pt x="3320" y="14"/>
-                </a:lnTo>
-                <a:lnTo>
-                  <a:pt x="4149" y="19"/>
+                  <a:pt x="830" y="15"/>
+                </a:lnTo>
+                <a:lnTo>
+                  <a:pt x="1661" y="13"/>
+                </a:lnTo>
+                <a:lnTo>
+                  <a:pt x="2490" y="21"/>
+                </a:lnTo>
+                <a:lnTo>
+                  <a:pt x="3320" y="21"/>
+                </a:lnTo>
+                <a:lnTo>
+                  <a:pt x="4149" y="24"/>
                 </a:lnTo>
               </a:path>
             </a:pathLst>
@@ -2889,7 +2889,7 @@
           </a:ln>
         </p:spPr>
         <p:txBody>
-          <a:bodyPr lIns="7920" tIns="7920" rIns="7920" bIns="7920" anchor="t">
+          <a:bodyPr lIns="7920" tIns="720" rIns="7920" bIns="720" anchor="t">
             <a:noAutofit/>
           </a:bodyPr>
           <a:p>
@@ -3027,7 +3027,7 @@
         </p:nvSpPr>
         <p:spPr>
           <a:xfrm>
-            <a:off x="3407400" y="2395800"/>
+            <a:off x="3407400" y="2391480"/>
             <a:ext cx="62640" cy="63000"/>
           </a:xfrm>
           <a:custGeom>
@@ -3085,7 +3085,7 @@
         </p:nvSpPr>
         <p:spPr>
           <a:xfrm>
-            <a:off x="3407400" y="2395800"/>
+            <a:off x="3407400" y="2391480"/>
             <a:ext cx="62640" cy="63000"/>
           </a:xfrm>
           <a:custGeom>
@@ -3142,7 +3142,352 @@
         </p:nvSpPr>
         <p:spPr>
           <a:xfrm>
-            <a:off x="3706200" y="2387520"/>
+            <a:off x="3706200" y="2381400"/>
+            <a:ext cx="62640" cy="62280"/>
+          </a:xfrm>
+          <a:custGeom>
+            <a:avLst/>
+            <a:gdLst/>
+            <a:ahLst/>
+            <a:rect l="0" t="0" r="r" b="b"/>
+            <a:pathLst>
+              <a:path w="174" h="173">
+                <a:moveTo>
+                  <a:pt x="0" y="87"/>
+                </a:moveTo>
+                <a:cubicBezTo>
+                  <a:pt x="0" y="-29"/>
+                  <a:pt x="174" y="-29"/>
+                  <a:pt x="174" y="87"/>
+                </a:cubicBezTo>
+                <a:cubicBezTo>
+                  <a:pt x="174" y="202"/>
+                  <a:pt x="0" y="202"/>
+                  <a:pt x="0" y="87"/>
+                </a:cubicBezTo>
+                <a:close/>
+              </a:path>
+            </a:pathLst>
+          </a:custGeom>
+          <a:solidFill>
+            <a:srgbClr val="009E73"/>
+          </a:solidFill>
+          <a:ln w="0">
+            <a:noFill/>
+          </a:ln>
+        </p:spPr>
+        <p:txBody>
+          <a:bodyPr lIns="0" tIns="0" rIns="0" bIns="0" anchor="t">
+            <a:noAutofit/>
+          </a:bodyPr>
+          <a:p>
+            <a:endParaRPr lang="en-US" sz="2400" b="0" u="none" strike="noStrike">
+              <a:solidFill>
+                <a:srgbClr val="FFFFFF"/>
+              </a:solidFill>
+              <a:effectLst/>
+              <a:uFillTx/>
+              <a:latin typeface="Times New Roman"/>
+            </a:endParaRPr>
+          </a:p>
+        </p:txBody>
+      </p:sp>
+      <p:sp>
+        <p:nvSpPr>
+          <p:cNvPr id="64" name=""/>
+          <p:cNvSpPr/>
+          <p:nvPr/>
+        </p:nvSpPr>
+        <p:spPr>
+          <a:xfrm>
+            <a:off x="3706200" y="2381400"/>
+            <a:ext cx="62640" cy="62280"/>
+          </a:xfrm>
+          <a:custGeom>
+            <a:avLst/>
+            <a:gdLst/>
+            <a:ahLst/>
+            <a:rect l="0" t="0" r="r" b="b"/>
+            <a:pathLst>
+              <a:path fill="none" w="174" h="173">
+                <a:moveTo>
+                  <a:pt x="174" y="87"/>
+                </a:moveTo>
+                <a:cubicBezTo>
+                  <a:pt x="174" y="202"/>
+                  <a:pt x="0" y="202"/>
+                  <a:pt x="0" y="87"/>
+                </a:cubicBezTo>
+                <a:cubicBezTo>
+                  <a:pt x="0" y="-29"/>
+                  <a:pt x="174" y="-29"/>
+                  <a:pt x="174" y="87"/>
+                </a:cubicBezTo>
+              </a:path>
+            </a:pathLst>
+          </a:custGeom>
+          <a:ln cap="rnd" w="7920">
+            <a:solidFill>
+              <a:srgbClr val="009E73"/>
+            </a:solidFill>
+            <a:round/>
+          </a:ln>
+        </p:spPr>
+        <p:txBody>
+          <a:bodyPr lIns="3960" tIns="3960" rIns="3960" bIns="3960" anchor="t">
+            <a:noAutofit/>
+          </a:bodyPr>
+          <a:p>
+            <a:endParaRPr lang="en-US" sz="2400" b="0" u="none" strike="noStrike">
+              <a:solidFill>
+                <a:srgbClr val="000000"/>
+              </a:solidFill>
+              <a:effectLst/>
+              <a:uFillTx/>
+              <a:latin typeface="Times New Roman"/>
+            </a:endParaRPr>
+          </a:p>
+        </p:txBody>
+      </p:sp>
+      <p:sp>
+        <p:nvSpPr>
+          <p:cNvPr id="65" name=""/>
+          <p:cNvSpPr/>
+          <p:nvPr/>
+        </p:nvSpPr>
+        <p:spPr>
+          <a:xfrm>
+            <a:off x="4004640" y="1983600"/>
+            <a:ext cx="63000" cy="62640"/>
+          </a:xfrm>
+          <a:custGeom>
+            <a:avLst/>
+            <a:gdLst/>
+            <a:ahLst/>
+            <a:rect l="0" t="0" r="r" b="b"/>
+            <a:pathLst>
+              <a:path w="175" h="174">
+                <a:moveTo>
+                  <a:pt x="0" y="87"/>
+                </a:moveTo>
+                <a:cubicBezTo>
+                  <a:pt x="0" y="-29"/>
+                  <a:pt x="175" y="-29"/>
+                  <a:pt x="175" y="87"/>
+                </a:cubicBezTo>
+                <a:cubicBezTo>
+                  <a:pt x="175" y="203"/>
+                  <a:pt x="0" y="203"/>
+                  <a:pt x="0" y="87"/>
+                </a:cubicBezTo>
+                <a:close/>
+              </a:path>
+            </a:pathLst>
+          </a:custGeom>
+          <a:solidFill>
+            <a:srgbClr val="009E73"/>
+          </a:solidFill>
+          <a:ln w="0">
+            <a:noFill/>
+          </a:ln>
+        </p:spPr>
+        <p:txBody>
+          <a:bodyPr lIns="0" tIns="0" rIns="0" bIns="0" anchor="t">
+            <a:noAutofit/>
+          </a:bodyPr>
+          <a:p>
+            <a:endParaRPr lang="en-US" sz="2400" b="0" u="none" strike="noStrike">
+              <a:solidFill>
+                <a:srgbClr val="FFFFFF"/>
+              </a:solidFill>
+              <a:effectLst/>
+              <a:uFillTx/>
+              <a:latin typeface="Times New Roman"/>
+            </a:endParaRPr>
+          </a:p>
+        </p:txBody>
+      </p:sp>
+      <p:sp>
+        <p:nvSpPr>
+          <p:cNvPr id="66" name=""/>
+          <p:cNvSpPr/>
+          <p:nvPr/>
+        </p:nvSpPr>
+        <p:spPr>
+          <a:xfrm>
+            <a:off x="4004640" y="1983600"/>
+            <a:ext cx="63000" cy="62640"/>
+          </a:xfrm>
+          <a:custGeom>
+            <a:avLst/>
+            <a:gdLst/>
+            <a:ahLst/>
+            <a:rect l="0" t="0" r="r" b="b"/>
+            <a:pathLst>
+              <a:path fill="none" w="175" h="174">
+                <a:moveTo>
+                  <a:pt x="175" y="87"/>
+                </a:moveTo>
+                <a:cubicBezTo>
+                  <a:pt x="175" y="203"/>
+                  <a:pt x="0" y="203"/>
+                  <a:pt x="0" y="87"/>
+                </a:cubicBezTo>
+                <a:cubicBezTo>
+                  <a:pt x="0" y="-29"/>
+                  <a:pt x="175" y="-29"/>
+                  <a:pt x="175" y="87"/>
+                </a:cubicBezTo>
+              </a:path>
+            </a:pathLst>
+          </a:custGeom>
+          <a:ln cap="rnd" w="7920">
+            <a:solidFill>
+              <a:srgbClr val="009E73"/>
+            </a:solidFill>
+            <a:round/>
+          </a:ln>
+        </p:spPr>
+        <p:txBody>
+          <a:bodyPr lIns="3960" tIns="3960" rIns="3960" bIns="3960" anchor="t">
+            <a:noAutofit/>
+          </a:bodyPr>
+          <a:p>
+            <a:endParaRPr lang="en-US" sz="2400" b="0" u="none" strike="noStrike">
+              <a:solidFill>
+                <a:srgbClr val="000000"/>
+              </a:solidFill>
+              <a:effectLst/>
+              <a:uFillTx/>
+              <a:latin typeface="Times New Roman"/>
+            </a:endParaRPr>
+          </a:p>
+        </p:txBody>
+      </p:sp>
+      <p:sp>
+        <p:nvSpPr>
+          <p:cNvPr id="67" name=""/>
+          <p:cNvSpPr/>
+          <p:nvPr/>
+        </p:nvSpPr>
+        <p:spPr>
+          <a:xfrm>
+            <a:off x="4303440" y="2008440"/>
+            <a:ext cx="62640" cy="62640"/>
+          </a:xfrm>
+          <a:custGeom>
+            <a:avLst/>
+            <a:gdLst/>
+            <a:ahLst/>
+            <a:rect l="0" t="0" r="r" b="b"/>
+            <a:pathLst>
+              <a:path w="174" h="174">
+                <a:moveTo>
+                  <a:pt x="0" y="87"/>
+                </a:moveTo>
+                <a:cubicBezTo>
+                  <a:pt x="0" y="-29"/>
+                  <a:pt x="174" y="-29"/>
+                  <a:pt x="174" y="87"/>
+                </a:cubicBezTo>
+                <a:cubicBezTo>
+                  <a:pt x="174" y="203"/>
+                  <a:pt x="0" y="203"/>
+                  <a:pt x="0" y="87"/>
+                </a:cubicBezTo>
+                <a:close/>
+              </a:path>
+            </a:pathLst>
+          </a:custGeom>
+          <a:solidFill>
+            <a:srgbClr val="009E73"/>
+          </a:solidFill>
+          <a:ln w="0">
+            <a:noFill/>
+          </a:ln>
+        </p:spPr>
+        <p:txBody>
+          <a:bodyPr lIns="0" tIns="0" rIns="0" bIns="0" anchor="t">
+            <a:noAutofit/>
+          </a:bodyPr>
+          <a:p>
+            <a:endParaRPr lang="en-US" sz="2400" b="0" u="none" strike="noStrike">
+              <a:solidFill>
+                <a:srgbClr val="FFFFFF"/>
+              </a:solidFill>
+              <a:effectLst/>
+              <a:uFillTx/>
+              <a:latin typeface="Times New Roman"/>
+            </a:endParaRPr>
+          </a:p>
+        </p:txBody>
+      </p:sp>
+      <p:sp>
+        <p:nvSpPr>
+          <p:cNvPr id="68" name=""/>
+          <p:cNvSpPr/>
+          <p:nvPr/>
+        </p:nvSpPr>
+        <p:spPr>
+          <a:xfrm>
+            <a:off x="4303440" y="2008440"/>
+            <a:ext cx="62640" cy="62640"/>
+          </a:xfrm>
+          <a:custGeom>
+            <a:avLst/>
+            <a:gdLst/>
+            <a:ahLst/>
+            <a:rect l="0" t="0" r="r" b="b"/>
+            <a:pathLst>
+              <a:path fill="none" w="174" h="174">
+                <a:moveTo>
+                  <a:pt x="174" y="87"/>
+                </a:moveTo>
+                <a:cubicBezTo>
+                  <a:pt x="174" y="203"/>
+                  <a:pt x="0" y="203"/>
+                  <a:pt x="0" y="87"/>
+                </a:cubicBezTo>
+                <a:cubicBezTo>
+                  <a:pt x="0" y="-29"/>
+                  <a:pt x="174" y="-29"/>
+                  <a:pt x="174" y="87"/>
+                </a:cubicBezTo>
+              </a:path>
+            </a:pathLst>
+          </a:custGeom>
+          <a:ln cap="rnd" w="7920">
+            <a:solidFill>
+              <a:srgbClr val="009E73"/>
+            </a:solidFill>
+            <a:round/>
+          </a:ln>
+        </p:spPr>
+        <p:txBody>
+          <a:bodyPr lIns="3960" tIns="3960" rIns="3960" bIns="3960" anchor="t">
+            <a:noAutofit/>
+          </a:bodyPr>
+          <a:p>
+            <a:endParaRPr lang="en-US" sz="2400" b="0" u="none" strike="noStrike">
+              <a:solidFill>
+                <a:srgbClr val="000000"/>
+              </a:solidFill>
+              <a:effectLst/>
+              <a:uFillTx/>
+              <a:latin typeface="Times New Roman"/>
+            </a:endParaRPr>
+          </a:p>
+        </p:txBody>
+      </p:sp>
+      <p:sp>
+        <p:nvSpPr>
+          <p:cNvPr id="69" name=""/>
+          <p:cNvSpPr/>
+          <p:nvPr/>
+        </p:nvSpPr>
+        <p:spPr>
+          <a:xfrm>
+            <a:off x="4602240" y="2021760"/>
             <a:ext cx="62640" cy="63000"/>
           </a:xfrm>
           <a:custGeom>
@@ -3194,13 +3539,13 @@
       </p:sp>
       <p:sp>
         <p:nvSpPr>
-          <p:cNvPr id="64" name=""/>
-          <p:cNvSpPr/>
-          <p:nvPr/>
-        </p:nvSpPr>
-        <p:spPr>
-          <a:xfrm>
-            <a:off x="3706200" y="2387520"/>
+          <p:cNvPr id="70" name=""/>
+          <p:cNvSpPr/>
+          <p:nvPr/>
+        </p:nvSpPr>
+        <p:spPr>
+          <a:xfrm>
+            <a:off x="4602240" y="2021760"/>
             <a:ext cx="62640" cy="63000"/>
           </a:xfrm>
           <a:custGeom>
@@ -3251,14 +3596,14 @@
       </p:sp>
       <p:sp>
         <p:nvSpPr>
-          <p:cNvPr id="65" name=""/>
-          <p:cNvSpPr/>
-          <p:nvPr/>
-        </p:nvSpPr>
-        <p:spPr>
-          <a:xfrm>
-            <a:off x="4004640" y="1983240"/>
-            <a:ext cx="63000" cy="62640"/>
+          <p:cNvPr id="71" name=""/>
+          <p:cNvSpPr/>
+          <p:nvPr/>
+        </p:nvSpPr>
+        <p:spPr>
+          <a:xfrm>
+            <a:off x="3108960" y="1144800"/>
+            <a:ext cx="62640" cy="63000"/>
           </a:xfrm>
           <a:custGeom>
             <a:avLst/>
@@ -3266,26 +3611,26 @@
             <a:ahLst/>
             <a:rect l="0" t="0" r="r" b="b"/>
             <a:pathLst>
-              <a:path w="175" h="174">
+              <a:path w="174" h="175">
                 <a:moveTo>
-                  <a:pt x="0" y="86"/>
+                  <a:pt x="0" y="88"/>
                 </a:moveTo>
                 <a:cubicBezTo>
                   <a:pt x="0" y="-29"/>
-                  <a:pt x="175" y="-29"/>
-                  <a:pt x="175" y="86"/>
+                  <a:pt x="174" y="-29"/>
+                  <a:pt x="174" y="88"/>
                 </a:cubicBezTo>
                 <a:cubicBezTo>
-                  <a:pt x="175" y="203"/>
-                  <a:pt x="0" y="203"/>
-                  <a:pt x="0" y="86"/>
+                  <a:pt x="174" y="204"/>
+                  <a:pt x="0" y="204"/>
+                  <a:pt x="0" y="88"/>
                 </a:cubicBezTo>
                 <a:close/>
               </a:path>
             </a:pathLst>
           </a:custGeom>
           <a:solidFill>
-            <a:srgbClr val="009E73"/>
+            <a:srgbClr val="0072B2"/>
           </a:solidFill>
           <a:ln w="0">
             <a:noFill/>
@@ -3309,14 +3654,14 @@
       </p:sp>
       <p:sp>
         <p:nvSpPr>
-          <p:cNvPr id="66" name=""/>
-          <p:cNvSpPr/>
-          <p:nvPr/>
-        </p:nvSpPr>
-        <p:spPr>
-          <a:xfrm>
-            <a:off x="4004640" y="1983240"/>
-            <a:ext cx="63000" cy="62640"/>
+          <p:cNvPr id="72" name=""/>
+          <p:cNvSpPr/>
+          <p:nvPr/>
+        </p:nvSpPr>
+        <p:spPr>
+          <a:xfrm>
+            <a:off x="3108960" y="1144800"/>
+            <a:ext cx="62640" cy="63000"/>
           </a:xfrm>
           <a:custGeom>
             <a:avLst/>
@@ -3324,26 +3669,26 @@
             <a:ahLst/>
             <a:rect l="0" t="0" r="r" b="b"/>
             <a:pathLst>
-              <a:path fill="none" w="175" h="174">
+              <a:path fill="none" w="174" h="175">
                 <a:moveTo>
-                  <a:pt x="175" y="86"/>
+                  <a:pt x="174" y="88"/>
                 </a:moveTo>
                 <a:cubicBezTo>
-                  <a:pt x="175" y="203"/>
-                  <a:pt x="0" y="203"/>
-                  <a:pt x="0" y="86"/>
+                  <a:pt x="174" y="204"/>
+                  <a:pt x="0" y="204"/>
+                  <a:pt x="0" y="88"/>
                 </a:cubicBezTo>
                 <a:cubicBezTo>
                   <a:pt x="0" y="-29"/>
-                  <a:pt x="175" y="-29"/>
-                  <a:pt x="175" y="86"/>
+                  <a:pt x="174" y="-29"/>
+                  <a:pt x="174" y="88"/>
                 </a:cubicBezTo>
               </a:path>
             </a:pathLst>
           </a:custGeom>
           <a:ln cap="rnd" w="7920">
             <a:solidFill>
-              <a:srgbClr val="009E73"/>
+              <a:srgbClr val="0072B2"/>
             </a:solidFill>
             <a:round/>
           </a:ln>
@@ -3366,13 +3711,128 @@
       </p:sp>
       <p:sp>
         <p:nvSpPr>
-          <p:cNvPr id="67" name=""/>
-          <p:cNvSpPr/>
-          <p:nvPr/>
-        </p:nvSpPr>
-        <p:spPr>
-          <a:xfrm>
-            <a:off x="4303440" y="2007360"/>
+          <p:cNvPr id="73" name=""/>
+          <p:cNvSpPr/>
+          <p:nvPr/>
+        </p:nvSpPr>
+        <p:spPr>
+          <a:xfrm>
+            <a:off x="3407400" y="1044000"/>
+            <a:ext cx="62640" cy="62640"/>
+          </a:xfrm>
+          <a:custGeom>
+            <a:avLst/>
+            <a:gdLst/>
+            <a:ahLst/>
+            <a:rect l="0" t="0" r="r" b="b"/>
+            <a:pathLst>
+              <a:path w="174" h="174">
+                <a:moveTo>
+                  <a:pt x="0" y="87"/>
+                </a:moveTo>
+                <a:cubicBezTo>
+                  <a:pt x="0" y="-29"/>
+                  <a:pt x="174" y="-29"/>
+                  <a:pt x="174" y="87"/>
+                </a:cubicBezTo>
+                <a:cubicBezTo>
+                  <a:pt x="174" y="203"/>
+                  <a:pt x="0" y="203"/>
+                  <a:pt x="0" y="87"/>
+                </a:cubicBezTo>
+                <a:close/>
+              </a:path>
+            </a:pathLst>
+          </a:custGeom>
+          <a:solidFill>
+            <a:srgbClr val="0072B2"/>
+          </a:solidFill>
+          <a:ln w="0">
+            <a:noFill/>
+          </a:ln>
+        </p:spPr>
+        <p:txBody>
+          <a:bodyPr lIns="0" tIns="0" rIns="0" bIns="0" anchor="t">
+            <a:noAutofit/>
+          </a:bodyPr>
+          <a:p>
+            <a:endParaRPr lang="en-US" sz="2400" b="0" u="none" strike="noStrike">
+              <a:solidFill>
+                <a:srgbClr val="FFFFFF"/>
+              </a:solidFill>
+              <a:effectLst/>
+              <a:uFillTx/>
+              <a:latin typeface="Times New Roman"/>
+            </a:endParaRPr>
+          </a:p>
+        </p:txBody>
+      </p:sp>
+      <p:sp>
+        <p:nvSpPr>
+          <p:cNvPr id="74" name=""/>
+          <p:cNvSpPr/>
+          <p:nvPr/>
+        </p:nvSpPr>
+        <p:spPr>
+          <a:xfrm>
+            <a:off x="3407400" y="1044000"/>
+            <a:ext cx="62640" cy="62640"/>
+          </a:xfrm>
+          <a:custGeom>
+            <a:avLst/>
+            <a:gdLst/>
+            <a:ahLst/>
+            <a:rect l="0" t="0" r="r" b="b"/>
+            <a:pathLst>
+              <a:path fill="none" w="174" h="174">
+                <a:moveTo>
+                  <a:pt x="174" y="87"/>
+                </a:moveTo>
+                <a:cubicBezTo>
+                  <a:pt x="174" y="203"/>
+                  <a:pt x="0" y="203"/>
+                  <a:pt x="0" y="87"/>
+                </a:cubicBezTo>
+                <a:cubicBezTo>
+                  <a:pt x="0" y="-29"/>
+                  <a:pt x="174" y="-29"/>
+                  <a:pt x="174" y="87"/>
+                </a:cubicBezTo>
+              </a:path>
+            </a:pathLst>
+          </a:custGeom>
+          <a:ln cap="rnd" w="7920">
+            <a:solidFill>
+              <a:srgbClr val="0072B2"/>
+            </a:solidFill>
+            <a:round/>
+          </a:ln>
+        </p:spPr>
+        <p:txBody>
+          <a:bodyPr lIns="3960" tIns="3960" rIns="3960" bIns="3960" anchor="t">
+            <a:noAutofit/>
+          </a:bodyPr>
+          <a:p>
+            <a:endParaRPr lang="en-US" sz="2400" b="0" u="none" strike="noStrike">
+              <a:solidFill>
+                <a:srgbClr val="000000"/>
+              </a:solidFill>
+              <a:effectLst/>
+              <a:uFillTx/>
+              <a:latin typeface="Times New Roman"/>
+            </a:endParaRPr>
+          </a:p>
+        </p:txBody>
+      </p:sp>
+      <p:sp>
+        <p:nvSpPr>
+          <p:cNvPr id="75" name=""/>
+          <p:cNvSpPr/>
+          <p:nvPr/>
+        </p:nvSpPr>
+        <p:spPr>
+          <a:xfrm>
+            <a:off x="3706200" y="997200"/>
             <a:ext cx="62640" cy="62640"/>
           </a:xfrm>
           <a:custGeom>
@@ -3400,7 +3860,7 @@
             </a:pathLst>
           </a:custGeom>
           <a:solidFill>
-            <a:srgbClr val="009E73"/>
+            <a:srgbClr val="0072B2"/>
           </a:solidFill>
           <a:ln w="0">
             <a:noFill/>
@@ -3424,13 +3884,13 @@
       </p:sp>
       <p:sp>
         <p:nvSpPr>
-          <p:cNvPr id="68" name=""/>
-          <p:cNvSpPr/>
-          <p:nvPr/>
-        </p:nvSpPr>
-        <p:spPr>
-          <a:xfrm>
-            <a:off x="4303440" y="2007360"/>
+          <p:cNvPr id="76" name=""/>
+          <p:cNvSpPr/>
+          <p:nvPr/>
+        </p:nvSpPr>
+        <p:spPr>
+          <a:xfrm>
+            <a:off x="3706200" y="997200"/>
             <a:ext cx="62640" cy="62640"/>
           </a:xfrm>
           <a:custGeom>
@@ -3458,36 +3918,2283 @@
           </a:custGeom>
           <a:ln cap="rnd" w="7920">
             <a:solidFill>
+              <a:srgbClr val="0072B2"/>
+            </a:solidFill>
+            <a:round/>
+          </a:ln>
+        </p:spPr>
+        <p:txBody>
+          <a:bodyPr lIns="3960" tIns="3960" rIns="3960" bIns="3960" anchor="t">
+            <a:noAutofit/>
+          </a:bodyPr>
+          <a:p>
+            <a:endParaRPr lang="en-US" sz="2400" b="0" u="none" strike="noStrike">
+              <a:solidFill>
+                <a:srgbClr val="000000"/>
+              </a:solidFill>
+              <a:effectLst/>
+              <a:uFillTx/>
+              <a:latin typeface="Times New Roman"/>
+            </a:endParaRPr>
+          </a:p>
+        </p:txBody>
+      </p:sp>
+      <p:sp>
+        <p:nvSpPr>
+          <p:cNvPr id="77" name=""/>
+          <p:cNvSpPr/>
+          <p:nvPr/>
+        </p:nvSpPr>
+        <p:spPr>
+          <a:xfrm>
+            <a:off x="4004640" y="642960"/>
+            <a:ext cx="63000" cy="62640"/>
+          </a:xfrm>
+          <a:custGeom>
+            <a:avLst/>
+            <a:gdLst/>
+            <a:ahLst/>
+            <a:rect l="0" t="0" r="r" b="b"/>
+            <a:pathLst>
+              <a:path w="175" h="174">
+                <a:moveTo>
+                  <a:pt x="0" y="88"/>
+                </a:moveTo>
+                <a:cubicBezTo>
+                  <a:pt x="0" y="-29"/>
+                  <a:pt x="175" y="-29"/>
+                  <a:pt x="175" y="88"/>
+                </a:cubicBezTo>
+                <a:cubicBezTo>
+                  <a:pt x="175" y="203"/>
+                  <a:pt x="0" y="203"/>
+                  <a:pt x="0" y="88"/>
+                </a:cubicBezTo>
+                <a:close/>
+              </a:path>
+            </a:pathLst>
+          </a:custGeom>
+          <a:solidFill>
+            <a:srgbClr val="0072B2"/>
+          </a:solidFill>
+          <a:ln w="0">
+            <a:noFill/>
+          </a:ln>
+        </p:spPr>
+        <p:txBody>
+          <a:bodyPr lIns="0" tIns="0" rIns="0" bIns="0" anchor="t">
+            <a:noAutofit/>
+          </a:bodyPr>
+          <a:p>
+            <a:endParaRPr lang="en-US" sz="2400" b="0" u="none" strike="noStrike">
+              <a:solidFill>
+                <a:srgbClr val="FFFFFF"/>
+              </a:solidFill>
+              <a:effectLst/>
+              <a:uFillTx/>
+              <a:latin typeface="Times New Roman"/>
+            </a:endParaRPr>
+          </a:p>
+        </p:txBody>
+      </p:sp>
+      <p:sp>
+        <p:nvSpPr>
+          <p:cNvPr id="78" name=""/>
+          <p:cNvSpPr/>
+          <p:nvPr/>
+        </p:nvSpPr>
+        <p:spPr>
+          <a:xfrm>
+            <a:off x="4004640" y="642960"/>
+            <a:ext cx="63000" cy="62640"/>
+          </a:xfrm>
+          <a:custGeom>
+            <a:avLst/>
+            <a:gdLst/>
+            <a:ahLst/>
+            <a:rect l="0" t="0" r="r" b="b"/>
+            <a:pathLst>
+              <a:path fill="none" w="175" h="174">
+                <a:moveTo>
+                  <a:pt x="175" y="88"/>
+                </a:moveTo>
+                <a:cubicBezTo>
+                  <a:pt x="175" y="203"/>
+                  <a:pt x="0" y="203"/>
+                  <a:pt x="0" y="88"/>
+                </a:cubicBezTo>
+                <a:cubicBezTo>
+                  <a:pt x="0" y="-29"/>
+                  <a:pt x="175" y="-29"/>
+                  <a:pt x="175" y="88"/>
+                </a:cubicBezTo>
+              </a:path>
+            </a:pathLst>
+          </a:custGeom>
+          <a:ln cap="rnd" w="7920">
+            <a:solidFill>
+              <a:srgbClr val="0072B2"/>
+            </a:solidFill>
+            <a:round/>
+          </a:ln>
+        </p:spPr>
+        <p:txBody>
+          <a:bodyPr lIns="3960" tIns="3960" rIns="3960" bIns="3960" anchor="t">
+            <a:noAutofit/>
+          </a:bodyPr>
+          <a:p>
+            <a:endParaRPr lang="en-US" sz="2400" b="0" u="none" strike="noStrike">
+              <a:solidFill>
+                <a:srgbClr val="000000"/>
+              </a:solidFill>
+              <a:effectLst/>
+              <a:uFillTx/>
+              <a:latin typeface="Times New Roman"/>
+            </a:endParaRPr>
+          </a:p>
+        </p:txBody>
+      </p:sp>
+      <p:sp>
+        <p:nvSpPr>
+          <p:cNvPr id="79" name=""/>
+          <p:cNvSpPr/>
+          <p:nvPr/>
+        </p:nvSpPr>
+        <p:spPr>
+          <a:xfrm>
+            <a:off x="4303440" y="610560"/>
+            <a:ext cx="62640" cy="62640"/>
+          </a:xfrm>
+          <a:custGeom>
+            <a:avLst/>
+            <a:gdLst/>
+            <a:ahLst/>
+            <a:rect l="0" t="0" r="r" b="b"/>
+            <a:pathLst>
+              <a:path w="174" h="174">
+                <a:moveTo>
+                  <a:pt x="0" y="86"/>
+                </a:moveTo>
+                <a:cubicBezTo>
+                  <a:pt x="0" y="-29"/>
+                  <a:pt x="174" y="-29"/>
+                  <a:pt x="174" y="86"/>
+                </a:cubicBezTo>
+                <a:cubicBezTo>
+                  <a:pt x="174" y="203"/>
+                  <a:pt x="0" y="203"/>
+                  <a:pt x="0" y="86"/>
+                </a:cubicBezTo>
+                <a:close/>
+              </a:path>
+            </a:pathLst>
+          </a:custGeom>
+          <a:solidFill>
+            <a:srgbClr val="0072B2"/>
+          </a:solidFill>
+          <a:ln w="0">
+            <a:noFill/>
+          </a:ln>
+        </p:spPr>
+        <p:txBody>
+          <a:bodyPr lIns="0" tIns="0" rIns="0" bIns="0" anchor="t">
+            <a:noAutofit/>
+          </a:bodyPr>
+          <a:p>
+            <a:endParaRPr lang="en-US" sz="2400" b="0" u="none" strike="noStrike">
+              <a:solidFill>
+                <a:srgbClr val="FFFFFF"/>
+              </a:solidFill>
+              <a:effectLst/>
+              <a:uFillTx/>
+              <a:latin typeface="Times New Roman"/>
+            </a:endParaRPr>
+          </a:p>
+        </p:txBody>
+      </p:sp>
+      <p:sp>
+        <p:nvSpPr>
+          <p:cNvPr id="80" name=""/>
+          <p:cNvSpPr/>
+          <p:nvPr/>
+        </p:nvSpPr>
+        <p:spPr>
+          <a:xfrm>
+            <a:off x="4303440" y="610560"/>
+            <a:ext cx="62640" cy="62640"/>
+          </a:xfrm>
+          <a:custGeom>
+            <a:avLst/>
+            <a:gdLst/>
+            <a:ahLst/>
+            <a:rect l="0" t="0" r="r" b="b"/>
+            <a:pathLst>
+              <a:path fill="none" w="174" h="174">
+                <a:moveTo>
+                  <a:pt x="174" y="86"/>
+                </a:moveTo>
+                <a:cubicBezTo>
+                  <a:pt x="174" y="203"/>
+                  <a:pt x="0" y="203"/>
+                  <a:pt x="0" y="86"/>
+                </a:cubicBezTo>
+                <a:cubicBezTo>
+                  <a:pt x="0" y="-29"/>
+                  <a:pt x="174" y="-29"/>
+                  <a:pt x="174" y="86"/>
+                </a:cubicBezTo>
+              </a:path>
+            </a:pathLst>
+          </a:custGeom>
+          <a:ln cap="rnd" w="7920">
+            <a:solidFill>
+              <a:srgbClr val="0072B2"/>
+            </a:solidFill>
+            <a:round/>
+          </a:ln>
+        </p:spPr>
+        <p:txBody>
+          <a:bodyPr lIns="3960" tIns="3960" rIns="3960" bIns="3960" anchor="t">
+            <a:noAutofit/>
+          </a:bodyPr>
+          <a:p>
+            <a:endParaRPr lang="en-US" sz="2400" b="0" u="none" strike="noStrike">
+              <a:solidFill>
+                <a:srgbClr val="000000"/>
+              </a:solidFill>
+              <a:effectLst/>
+              <a:uFillTx/>
+              <a:latin typeface="Times New Roman"/>
+            </a:endParaRPr>
+          </a:p>
+        </p:txBody>
+      </p:sp>
+      <p:sp>
+        <p:nvSpPr>
+          <p:cNvPr id="81" name=""/>
+          <p:cNvSpPr/>
+          <p:nvPr/>
+        </p:nvSpPr>
+        <p:spPr>
+          <a:xfrm>
+            <a:off x="4602240" y="648360"/>
+            <a:ext cx="62640" cy="63000"/>
+          </a:xfrm>
+          <a:custGeom>
+            <a:avLst/>
+            <a:gdLst/>
+            <a:ahLst/>
+            <a:rect l="0" t="0" r="r" b="b"/>
+            <a:pathLst>
+              <a:path w="174" h="175">
+                <a:moveTo>
+                  <a:pt x="0" y="88"/>
+                </a:moveTo>
+                <a:cubicBezTo>
+                  <a:pt x="0" y="-29"/>
+                  <a:pt x="174" y="-29"/>
+                  <a:pt x="174" y="88"/>
+                </a:cubicBezTo>
+                <a:cubicBezTo>
+                  <a:pt x="174" y="204"/>
+                  <a:pt x="0" y="204"/>
+                  <a:pt x="0" y="88"/>
+                </a:cubicBezTo>
+                <a:close/>
+              </a:path>
+            </a:pathLst>
+          </a:custGeom>
+          <a:solidFill>
+            <a:srgbClr val="0072B2"/>
+          </a:solidFill>
+          <a:ln w="0">
+            <a:noFill/>
+          </a:ln>
+        </p:spPr>
+        <p:txBody>
+          <a:bodyPr lIns="0" tIns="0" rIns="0" bIns="0" anchor="t">
+            <a:noAutofit/>
+          </a:bodyPr>
+          <a:p>
+            <a:endParaRPr lang="en-US" sz="2400" b="0" u="none" strike="noStrike">
+              <a:solidFill>
+                <a:srgbClr val="FFFFFF"/>
+              </a:solidFill>
+              <a:effectLst/>
+              <a:uFillTx/>
+              <a:latin typeface="Times New Roman"/>
+            </a:endParaRPr>
+          </a:p>
+        </p:txBody>
+      </p:sp>
+      <p:sp>
+        <p:nvSpPr>
+          <p:cNvPr id="82" name=""/>
+          <p:cNvSpPr/>
+          <p:nvPr/>
+        </p:nvSpPr>
+        <p:spPr>
+          <a:xfrm>
+            <a:off x="4602240" y="648360"/>
+            <a:ext cx="62640" cy="63000"/>
+          </a:xfrm>
+          <a:custGeom>
+            <a:avLst/>
+            <a:gdLst/>
+            <a:ahLst/>
+            <a:rect l="0" t="0" r="r" b="b"/>
+            <a:pathLst>
+              <a:path fill="none" w="174" h="175">
+                <a:moveTo>
+                  <a:pt x="174" y="88"/>
+                </a:moveTo>
+                <a:cubicBezTo>
+                  <a:pt x="174" y="204"/>
+                  <a:pt x="0" y="204"/>
+                  <a:pt x="0" y="88"/>
+                </a:cubicBezTo>
+                <a:cubicBezTo>
+                  <a:pt x="0" y="-29"/>
+                  <a:pt x="174" y="-29"/>
+                  <a:pt x="174" y="88"/>
+                </a:cubicBezTo>
+              </a:path>
+            </a:pathLst>
+          </a:custGeom>
+          <a:ln cap="rnd" w="7920">
+            <a:solidFill>
+              <a:srgbClr val="0072B2"/>
+            </a:solidFill>
+            <a:round/>
+          </a:ln>
+        </p:spPr>
+        <p:txBody>
+          <a:bodyPr lIns="3960" tIns="3960" rIns="3960" bIns="3960" anchor="t">
+            <a:noAutofit/>
+          </a:bodyPr>
+          <a:p>
+            <a:endParaRPr lang="en-US" sz="2400" b="0" u="none" strike="noStrike">
+              <a:solidFill>
+                <a:srgbClr val="000000"/>
+              </a:solidFill>
+              <a:effectLst/>
+              <a:uFillTx/>
+              <a:latin typeface="Times New Roman"/>
+            </a:endParaRPr>
+          </a:p>
+        </p:txBody>
+      </p:sp>
+      <p:sp>
+        <p:nvSpPr>
+          <p:cNvPr id="83" name=""/>
+          <p:cNvSpPr/>
+          <p:nvPr/>
+        </p:nvSpPr>
+        <p:spPr>
+          <a:xfrm>
+            <a:off x="3108960" y="1370880"/>
+            <a:ext cx="62640" cy="62640"/>
+          </a:xfrm>
+          <a:custGeom>
+            <a:avLst/>
+            <a:gdLst/>
+            <a:ahLst/>
+            <a:rect l="0" t="0" r="r" b="b"/>
+            <a:pathLst>
+              <a:path w="174" h="174">
+                <a:moveTo>
+                  <a:pt x="0" y="88"/>
+                </a:moveTo>
+                <a:cubicBezTo>
+                  <a:pt x="0" y="-29"/>
+                  <a:pt x="174" y="-29"/>
+                  <a:pt x="174" y="88"/>
+                </a:cubicBezTo>
+                <a:cubicBezTo>
+                  <a:pt x="174" y="203"/>
+                  <a:pt x="0" y="203"/>
+                  <a:pt x="0" y="88"/>
+                </a:cubicBezTo>
+                <a:close/>
+              </a:path>
+            </a:pathLst>
+          </a:custGeom>
+          <a:solidFill>
+            <a:srgbClr val="E69F00"/>
+          </a:solidFill>
+          <a:ln w="0">
+            <a:noFill/>
+          </a:ln>
+        </p:spPr>
+        <p:txBody>
+          <a:bodyPr lIns="0" tIns="0" rIns="0" bIns="0" anchor="t">
+            <a:noAutofit/>
+          </a:bodyPr>
+          <a:p>
+            <a:endParaRPr lang="en-US" sz="2400" b="0" u="none" strike="noStrike">
+              <a:solidFill>
+                <a:srgbClr val="000000"/>
+              </a:solidFill>
+              <a:effectLst/>
+              <a:uFillTx/>
+              <a:latin typeface="Times New Roman"/>
+            </a:endParaRPr>
+          </a:p>
+        </p:txBody>
+      </p:sp>
+      <p:sp>
+        <p:nvSpPr>
+          <p:cNvPr id="84" name=""/>
+          <p:cNvSpPr/>
+          <p:nvPr/>
+        </p:nvSpPr>
+        <p:spPr>
+          <a:xfrm>
+            <a:off x="3108960" y="1370880"/>
+            <a:ext cx="62640" cy="62640"/>
+          </a:xfrm>
+          <a:custGeom>
+            <a:avLst/>
+            <a:gdLst/>
+            <a:ahLst/>
+            <a:rect l="0" t="0" r="r" b="b"/>
+            <a:pathLst>
+              <a:path fill="none" w="174" h="174">
+                <a:moveTo>
+                  <a:pt x="174" y="88"/>
+                </a:moveTo>
+                <a:cubicBezTo>
+                  <a:pt x="174" y="203"/>
+                  <a:pt x="0" y="203"/>
+                  <a:pt x="0" y="88"/>
+                </a:cubicBezTo>
+                <a:cubicBezTo>
+                  <a:pt x="0" y="-29"/>
+                  <a:pt x="174" y="-29"/>
+                  <a:pt x="174" y="88"/>
+                </a:cubicBezTo>
+              </a:path>
+            </a:pathLst>
+          </a:custGeom>
+          <a:ln cap="rnd" w="7920">
+            <a:solidFill>
+              <a:srgbClr val="E69F00"/>
+            </a:solidFill>
+            <a:round/>
+          </a:ln>
+        </p:spPr>
+        <p:txBody>
+          <a:bodyPr lIns="3960" tIns="3960" rIns="3960" bIns="3960" anchor="t">
+            <a:noAutofit/>
+          </a:bodyPr>
+          <a:p>
+            <a:endParaRPr lang="en-US" sz="2400" b="0" u="none" strike="noStrike">
+              <a:solidFill>
+                <a:srgbClr val="000000"/>
+              </a:solidFill>
+              <a:effectLst/>
+              <a:uFillTx/>
+              <a:latin typeface="Times New Roman"/>
+            </a:endParaRPr>
+          </a:p>
+        </p:txBody>
+      </p:sp>
+      <p:sp>
+        <p:nvSpPr>
+          <p:cNvPr id="85" name=""/>
+          <p:cNvSpPr/>
+          <p:nvPr/>
+        </p:nvSpPr>
+        <p:spPr>
+          <a:xfrm>
+            <a:off x="3407400" y="1375920"/>
+            <a:ext cx="62640" cy="62640"/>
+          </a:xfrm>
+          <a:custGeom>
+            <a:avLst/>
+            <a:gdLst/>
+            <a:ahLst/>
+            <a:rect l="0" t="0" r="r" b="b"/>
+            <a:pathLst>
+              <a:path w="174" h="174">
+                <a:moveTo>
+                  <a:pt x="0" y="88"/>
+                </a:moveTo>
+                <a:cubicBezTo>
+                  <a:pt x="0" y="-29"/>
+                  <a:pt x="174" y="-29"/>
+                  <a:pt x="174" y="88"/>
+                </a:cubicBezTo>
+                <a:cubicBezTo>
+                  <a:pt x="174" y="203"/>
+                  <a:pt x="0" y="203"/>
+                  <a:pt x="0" y="88"/>
+                </a:cubicBezTo>
+                <a:close/>
+              </a:path>
+            </a:pathLst>
+          </a:custGeom>
+          <a:solidFill>
+            <a:srgbClr val="E69F00"/>
+          </a:solidFill>
+          <a:ln w="0">
+            <a:noFill/>
+          </a:ln>
+        </p:spPr>
+        <p:txBody>
+          <a:bodyPr lIns="0" tIns="0" rIns="0" bIns="0" anchor="t">
+            <a:noAutofit/>
+          </a:bodyPr>
+          <a:p>
+            <a:endParaRPr lang="en-US" sz="2400" b="0" u="none" strike="noStrike">
+              <a:solidFill>
+                <a:srgbClr val="000000"/>
+              </a:solidFill>
+              <a:effectLst/>
+              <a:uFillTx/>
+              <a:latin typeface="Times New Roman"/>
+            </a:endParaRPr>
+          </a:p>
+        </p:txBody>
+      </p:sp>
+      <p:sp>
+        <p:nvSpPr>
+          <p:cNvPr id="86" name=""/>
+          <p:cNvSpPr/>
+          <p:nvPr/>
+        </p:nvSpPr>
+        <p:spPr>
+          <a:xfrm>
+            <a:off x="3407400" y="1375920"/>
+            <a:ext cx="62640" cy="62640"/>
+          </a:xfrm>
+          <a:custGeom>
+            <a:avLst/>
+            <a:gdLst/>
+            <a:ahLst/>
+            <a:rect l="0" t="0" r="r" b="b"/>
+            <a:pathLst>
+              <a:path fill="none" w="174" h="174">
+                <a:moveTo>
+                  <a:pt x="174" y="88"/>
+                </a:moveTo>
+                <a:cubicBezTo>
+                  <a:pt x="174" y="203"/>
+                  <a:pt x="0" y="203"/>
+                  <a:pt x="0" y="88"/>
+                </a:cubicBezTo>
+                <a:cubicBezTo>
+                  <a:pt x="0" y="-29"/>
+                  <a:pt x="174" y="-29"/>
+                  <a:pt x="174" y="88"/>
+                </a:cubicBezTo>
+              </a:path>
+            </a:pathLst>
+          </a:custGeom>
+          <a:ln cap="rnd" w="7920">
+            <a:solidFill>
+              <a:srgbClr val="E69F00"/>
+            </a:solidFill>
+            <a:round/>
+          </a:ln>
+        </p:spPr>
+        <p:txBody>
+          <a:bodyPr lIns="3960" tIns="3960" rIns="3960" bIns="3960" anchor="t">
+            <a:noAutofit/>
+          </a:bodyPr>
+          <a:p>
+            <a:endParaRPr lang="en-US" sz="2400" b="0" u="none" strike="noStrike">
+              <a:solidFill>
+                <a:srgbClr val="000000"/>
+              </a:solidFill>
+              <a:effectLst/>
+              <a:uFillTx/>
+              <a:latin typeface="Times New Roman"/>
+            </a:endParaRPr>
+          </a:p>
+        </p:txBody>
+      </p:sp>
+      <p:sp>
+        <p:nvSpPr>
+          <p:cNvPr id="87" name=""/>
+          <p:cNvSpPr/>
+          <p:nvPr/>
+        </p:nvSpPr>
+        <p:spPr>
+          <a:xfrm>
+            <a:off x="3706200" y="1375560"/>
+            <a:ext cx="62640" cy="62640"/>
+          </a:xfrm>
+          <a:custGeom>
+            <a:avLst/>
+            <a:gdLst/>
+            <a:ahLst/>
+            <a:rect l="0" t="0" r="r" b="b"/>
+            <a:pathLst>
+              <a:path w="174" h="174">
+                <a:moveTo>
+                  <a:pt x="0" y="87"/>
+                </a:moveTo>
+                <a:cubicBezTo>
+                  <a:pt x="0" y="-29"/>
+                  <a:pt x="174" y="-29"/>
+                  <a:pt x="174" y="87"/>
+                </a:cubicBezTo>
+                <a:cubicBezTo>
+                  <a:pt x="174" y="203"/>
+                  <a:pt x="0" y="203"/>
+                  <a:pt x="0" y="87"/>
+                </a:cubicBezTo>
+                <a:close/>
+              </a:path>
+            </a:pathLst>
+          </a:custGeom>
+          <a:solidFill>
+            <a:srgbClr val="E69F00"/>
+          </a:solidFill>
+          <a:ln w="0">
+            <a:noFill/>
+          </a:ln>
+        </p:spPr>
+        <p:txBody>
+          <a:bodyPr lIns="0" tIns="0" rIns="0" bIns="0" anchor="t">
+            <a:noAutofit/>
+          </a:bodyPr>
+          <a:p>
+            <a:endParaRPr lang="en-US" sz="2400" b="0" u="none" strike="noStrike">
+              <a:solidFill>
+                <a:srgbClr val="000000"/>
+              </a:solidFill>
+              <a:effectLst/>
+              <a:uFillTx/>
+              <a:latin typeface="Times New Roman"/>
+            </a:endParaRPr>
+          </a:p>
+        </p:txBody>
+      </p:sp>
+      <p:sp>
+        <p:nvSpPr>
+          <p:cNvPr id="88" name=""/>
+          <p:cNvSpPr/>
+          <p:nvPr/>
+        </p:nvSpPr>
+        <p:spPr>
+          <a:xfrm>
+            <a:off x="3706200" y="1375560"/>
+            <a:ext cx="62640" cy="62640"/>
+          </a:xfrm>
+          <a:custGeom>
+            <a:avLst/>
+            <a:gdLst/>
+            <a:ahLst/>
+            <a:rect l="0" t="0" r="r" b="b"/>
+            <a:pathLst>
+              <a:path fill="none" w="174" h="174">
+                <a:moveTo>
+                  <a:pt x="174" y="87"/>
+                </a:moveTo>
+                <a:cubicBezTo>
+                  <a:pt x="174" y="203"/>
+                  <a:pt x="0" y="203"/>
+                  <a:pt x="0" y="87"/>
+                </a:cubicBezTo>
+                <a:cubicBezTo>
+                  <a:pt x="0" y="-29"/>
+                  <a:pt x="174" y="-29"/>
+                  <a:pt x="174" y="87"/>
+                </a:cubicBezTo>
+              </a:path>
+            </a:pathLst>
+          </a:custGeom>
+          <a:ln cap="rnd" w="7920">
+            <a:solidFill>
+              <a:srgbClr val="E69F00"/>
+            </a:solidFill>
+            <a:round/>
+          </a:ln>
+        </p:spPr>
+        <p:txBody>
+          <a:bodyPr lIns="3960" tIns="3960" rIns="3960" bIns="3960" anchor="t">
+            <a:noAutofit/>
+          </a:bodyPr>
+          <a:p>
+            <a:endParaRPr lang="en-US" sz="2400" b="0" u="none" strike="noStrike">
+              <a:solidFill>
+                <a:srgbClr val="000000"/>
+              </a:solidFill>
+              <a:effectLst/>
+              <a:uFillTx/>
+              <a:latin typeface="Times New Roman"/>
+            </a:endParaRPr>
+          </a:p>
+        </p:txBody>
+      </p:sp>
+      <p:sp>
+        <p:nvSpPr>
+          <p:cNvPr id="89" name=""/>
+          <p:cNvSpPr/>
+          <p:nvPr/>
+        </p:nvSpPr>
+        <p:spPr>
+          <a:xfrm>
+            <a:off x="4004640" y="1378080"/>
+            <a:ext cx="63000" cy="62640"/>
+          </a:xfrm>
+          <a:custGeom>
+            <a:avLst/>
+            <a:gdLst/>
+            <a:ahLst/>
+            <a:rect l="0" t="0" r="r" b="b"/>
+            <a:pathLst>
+              <a:path w="175" h="174">
+                <a:moveTo>
+                  <a:pt x="0" y="88"/>
+                </a:moveTo>
+                <a:cubicBezTo>
+                  <a:pt x="0" y="-29"/>
+                  <a:pt x="175" y="-29"/>
+                  <a:pt x="175" y="88"/>
+                </a:cubicBezTo>
+                <a:cubicBezTo>
+                  <a:pt x="175" y="203"/>
+                  <a:pt x="0" y="203"/>
+                  <a:pt x="0" y="88"/>
+                </a:cubicBezTo>
+                <a:close/>
+              </a:path>
+            </a:pathLst>
+          </a:custGeom>
+          <a:solidFill>
+            <a:srgbClr val="E69F00"/>
+          </a:solidFill>
+          <a:ln w="0">
+            <a:noFill/>
+          </a:ln>
+        </p:spPr>
+        <p:txBody>
+          <a:bodyPr lIns="0" tIns="0" rIns="0" bIns="0" anchor="t">
+            <a:noAutofit/>
+          </a:bodyPr>
+          <a:p>
+            <a:endParaRPr lang="en-US" sz="2400" b="0" u="none" strike="noStrike">
+              <a:solidFill>
+                <a:srgbClr val="000000"/>
+              </a:solidFill>
+              <a:effectLst/>
+              <a:uFillTx/>
+              <a:latin typeface="Times New Roman"/>
+            </a:endParaRPr>
+          </a:p>
+        </p:txBody>
+      </p:sp>
+      <p:sp>
+        <p:nvSpPr>
+          <p:cNvPr id="90" name=""/>
+          <p:cNvSpPr/>
+          <p:nvPr/>
+        </p:nvSpPr>
+        <p:spPr>
+          <a:xfrm>
+            <a:off x="4004640" y="1378080"/>
+            <a:ext cx="63000" cy="62640"/>
+          </a:xfrm>
+          <a:custGeom>
+            <a:avLst/>
+            <a:gdLst/>
+            <a:ahLst/>
+            <a:rect l="0" t="0" r="r" b="b"/>
+            <a:pathLst>
+              <a:path fill="none" w="175" h="174">
+                <a:moveTo>
+                  <a:pt x="175" y="88"/>
+                </a:moveTo>
+                <a:cubicBezTo>
+                  <a:pt x="175" y="203"/>
+                  <a:pt x="0" y="203"/>
+                  <a:pt x="0" y="88"/>
+                </a:cubicBezTo>
+                <a:cubicBezTo>
+                  <a:pt x="0" y="-29"/>
+                  <a:pt x="175" y="-29"/>
+                  <a:pt x="175" y="88"/>
+                </a:cubicBezTo>
+              </a:path>
+            </a:pathLst>
+          </a:custGeom>
+          <a:ln cap="rnd" w="7920">
+            <a:solidFill>
+              <a:srgbClr val="E69F00"/>
+            </a:solidFill>
+            <a:round/>
+          </a:ln>
+        </p:spPr>
+        <p:txBody>
+          <a:bodyPr lIns="3960" tIns="3960" rIns="3960" bIns="3960" anchor="t">
+            <a:noAutofit/>
+          </a:bodyPr>
+          <a:p>
+            <a:endParaRPr lang="en-US" sz="2400" b="0" u="none" strike="noStrike">
+              <a:solidFill>
+                <a:srgbClr val="000000"/>
+              </a:solidFill>
+              <a:effectLst/>
+              <a:uFillTx/>
+              <a:latin typeface="Times New Roman"/>
+            </a:endParaRPr>
+          </a:p>
+        </p:txBody>
+      </p:sp>
+      <p:sp>
+        <p:nvSpPr>
+          <p:cNvPr id="91" name=""/>
+          <p:cNvSpPr/>
+          <p:nvPr/>
+        </p:nvSpPr>
+        <p:spPr>
+          <a:xfrm>
+            <a:off x="4303440" y="1378440"/>
+            <a:ext cx="62640" cy="62640"/>
+          </a:xfrm>
+          <a:custGeom>
+            <a:avLst/>
+            <a:gdLst/>
+            <a:ahLst/>
+            <a:rect l="0" t="0" r="r" b="b"/>
+            <a:pathLst>
+              <a:path w="174" h="174">
+                <a:moveTo>
+                  <a:pt x="0" y="87"/>
+                </a:moveTo>
+                <a:cubicBezTo>
+                  <a:pt x="0" y="-29"/>
+                  <a:pt x="174" y="-29"/>
+                  <a:pt x="174" y="87"/>
+                </a:cubicBezTo>
+                <a:cubicBezTo>
+                  <a:pt x="174" y="203"/>
+                  <a:pt x="0" y="203"/>
+                  <a:pt x="0" y="87"/>
+                </a:cubicBezTo>
+                <a:close/>
+              </a:path>
+            </a:pathLst>
+          </a:custGeom>
+          <a:solidFill>
+            <a:srgbClr val="E69F00"/>
+          </a:solidFill>
+          <a:ln w="0">
+            <a:noFill/>
+          </a:ln>
+        </p:spPr>
+        <p:txBody>
+          <a:bodyPr lIns="0" tIns="0" rIns="0" bIns="0" anchor="t">
+            <a:noAutofit/>
+          </a:bodyPr>
+          <a:p>
+            <a:endParaRPr lang="en-US" sz="2400" b="0" u="none" strike="noStrike">
+              <a:solidFill>
+                <a:srgbClr val="000000"/>
+              </a:solidFill>
+              <a:effectLst/>
+              <a:uFillTx/>
+              <a:latin typeface="Times New Roman"/>
+            </a:endParaRPr>
+          </a:p>
+        </p:txBody>
+      </p:sp>
+      <p:sp>
+        <p:nvSpPr>
+          <p:cNvPr id="92" name=""/>
+          <p:cNvSpPr/>
+          <p:nvPr/>
+        </p:nvSpPr>
+        <p:spPr>
+          <a:xfrm>
+            <a:off x="4303440" y="1378440"/>
+            <a:ext cx="62640" cy="62640"/>
+          </a:xfrm>
+          <a:custGeom>
+            <a:avLst/>
+            <a:gdLst/>
+            <a:ahLst/>
+            <a:rect l="0" t="0" r="r" b="b"/>
+            <a:pathLst>
+              <a:path fill="none" w="174" h="174">
+                <a:moveTo>
+                  <a:pt x="174" y="87"/>
+                </a:moveTo>
+                <a:cubicBezTo>
+                  <a:pt x="174" y="203"/>
+                  <a:pt x="0" y="203"/>
+                  <a:pt x="0" y="87"/>
+                </a:cubicBezTo>
+                <a:cubicBezTo>
+                  <a:pt x="0" y="-29"/>
+                  <a:pt x="174" y="-29"/>
+                  <a:pt x="174" y="87"/>
+                </a:cubicBezTo>
+              </a:path>
+            </a:pathLst>
+          </a:custGeom>
+          <a:ln cap="rnd" w="7920">
+            <a:solidFill>
+              <a:srgbClr val="E69F00"/>
+            </a:solidFill>
+            <a:round/>
+          </a:ln>
+        </p:spPr>
+        <p:txBody>
+          <a:bodyPr lIns="3960" tIns="3960" rIns="3960" bIns="3960" anchor="t">
+            <a:noAutofit/>
+          </a:bodyPr>
+          <a:p>
+            <a:endParaRPr lang="en-US" sz="2400" b="0" u="none" strike="noStrike">
+              <a:solidFill>
+                <a:srgbClr val="000000"/>
+              </a:solidFill>
+              <a:effectLst/>
+              <a:uFillTx/>
+              <a:latin typeface="Times New Roman"/>
+            </a:endParaRPr>
+          </a:p>
+        </p:txBody>
+      </p:sp>
+      <p:sp>
+        <p:nvSpPr>
+          <p:cNvPr id="93" name=""/>
+          <p:cNvSpPr/>
+          <p:nvPr/>
+        </p:nvSpPr>
+        <p:spPr>
+          <a:xfrm>
+            <a:off x="4602240" y="1379520"/>
+            <a:ext cx="62640" cy="62640"/>
+          </a:xfrm>
+          <a:custGeom>
+            <a:avLst/>
+            <a:gdLst/>
+            <a:ahLst/>
+            <a:rect l="0" t="0" r="r" b="b"/>
+            <a:pathLst>
+              <a:path w="174" h="174">
+                <a:moveTo>
+                  <a:pt x="0" y="87"/>
+                </a:moveTo>
+                <a:cubicBezTo>
+                  <a:pt x="0" y="-29"/>
+                  <a:pt x="174" y="-29"/>
+                  <a:pt x="174" y="87"/>
+                </a:cubicBezTo>
+                <a:cubicBezTo>
+                  <a:pt x="174" y="203"/>
+                  <a:pt x="0" y="203"/>
+                  <a:pt x="0" y="87"/>
+                </a:cubicBezTo>
+                <a:close/>
+              </a:path>
+            </a:pathLst>
+          </a:custGeom>
+          <a:solidFill>
+            <a:srgbClr val="E69F00"/>
+          </a:solidFill>
+          <a:ln w="0">
+            <a:noFill/>
+          </a:ln>
+        </p:spPr>
+        <p:txBody>
+          <a:bodyPr lIns="0" tIns="0" rIns="0" bIns="0" anchor="t">
+            <a:noAutofit/>
+          </a:bodyPr>
+          <a:p>
+            <a:endParaRPr lang="en-US" sz="2400" b="0" u="none" strike="noStrike">
+              <a:solidFill>
+                <a:srgbClr val="000000"/>
+              </a:solidFill>
+              <a:effectLst/>
+              <a:uFillTx/>
+              <a:latin typeface="Times New Roman"/>
+            </a:endParaRPr>
+          </a:p>
+        </p:txBody>
+      </p:sp>
+      <p:sp>
+        <p:nvSpPr>
+          <p:cNvPr id="94" name=""/>
+          <p:cNvSpPr/>
+          <p:nvPr/>
+        </p:nvSpPr>
+        <p:spPr>
+          <a:xfrm>
+            <a:off x="4602240" y="1379520"/>
+            <a:ext cx="62640" cy="62640"/>
+          </a:xfrm>
+          <a:custGeom>
+            <a:avLst/>
+            <a:gdLst/>
+            <a:ahLst/>
+            <a:rect l="0" t="0" r="r" b="b"/>
+            <a:pathLst>
+              <a:path fill="none" w="174" h="174">
+                <a:moveTo>
+                  <a:pt x="174" y="87"/>
+                </a:moveTo>
+                <a:cubicBezTo>
+                  <a:pt x="174" y="203"/>
+                  <a:pt x="0" y="203"/>
+                  <a:pt x="0" y="87"/>
+                </a:cubicBezTo>
+                <a:cubicBezTo>
+                  <a:pt x="0" y="-29"/>
+                  <a:pt x="174" y="-29"/>
+                  <a:pt x="174" y="87"/>
+                </a:cubicBezTo>
+              </a:path>
+            </a:pathLst>
+          </a:custGeom>
+          <a:ln cap="rnd" w="7920">
+            <a:solidFill>
+              <a:srgbClr val="E69F00"/>
+            </a:solidFill>
+            <a:round/>
+          </a:ln>
+        </p:spPr>
+        <p:txBody>
+          <a:bodyPr lIns="3960" tIns="3960" rIns="3960" bIns="3960" anchor="t">
+            <a:noAutofit/>
+          </a:bodyPr>
+          <a:p>
+            <a:endParaRPr lang="en-US" sz="2400" b="0" u="none" strike="noStrike">
+              <a:solidFill>
+                <a:srgbClr val="000000"/>
+              </a:solidFill>
+              <a:effectLst/>
+              <a:uFillTx/>
+              <a:latin typeface="Times New Roman"/>
+            </a:endParaRPr>
+          </a:p>
+        </p:txBody>
+      </p:sp>
+      <p:sp>
+        <p:nvSpPr>
+          <p:cNvPr id="95" name=""/>
+          <p:cNvSpPr/>
+          <p:nvPr/>
+        </p:nvSpPr>
+        <p:spPr>
+          <a:xfrm flipV="1">
+            <a:off x="2960640" y="538560"/>
+            <a:ext cx="0" cy="2266560"/>
+          </a:xfrm>
+          <a:prstGeom prst="line">
+            <a:avLst/>
+          </a:prstGeom>
+          <a:ln cap="sq" w="9360">
+            <a:solidFill>
+              <a:srgbClr val="333333"/>
+            </a:solidFill>
+            <a:round/>
+          </a:ln>
+        </p:spPr>
+        <p:style>
+          <a:lnRef idx="0"/>
+          <a:fillRef idx="0"/>
+          <a:effectRef idx="0"/>
+          <a:fontRef idx="minor"/>
+        </p:style>
+        <p:txBody>
+          <a:bodyPr lIns="4680" tIns="4680" rIns="4680" bIns="4680" anchor="t">
+            <a:noAutofit/>
+          </a:bodyPr>
+          <a:p>
+            <a:endParaRPr lang="en-US" sz="2400" b="0" u="none" strike="noStrike">
+              <a:solidFill>
+                <a:srgbClr val="000000"/>
+              </a:solidFill>
+              <a:effectLst/>
+              <a:uFillTx/>
+              <a:latin typeface="Times New Roman"/>
+            </a:endParaRPr>
+          </a:p>
+        </p:txBody>
+      </p:sp>
+      <p:sp>
+        <p:nvSpPr>
+          <p:cNvPr id="96" name=""/>
+          <p:cNvSpPr txBox="1"/>
+          <p:nvPr/>
+        </p:nvSpPr>
+        <p:spPr>
+          <a:xfrm>
+            <a:off x="137520" y="118440"/>
+            <a:ext cx="164880" cy="164880"/>
+          </a:xfrm>
+          <a:prstGeom prst="rect">
+            <a:avLst/>
+          </a:prstGeom>
+          <a:noFill/>
+          <a:ln w="0">
+            <a:noFill/>
+          </a:ln>
+        </p:spPr>
+        <p:txBody>
+          <a:bodyPr wrap="none" lIns="0" tIns="0" rIns="0" bIns="0" anchor="t">
+            <a:spAutoFit/>
+          </a:bodyPr>
+          <a:p>
+            <a:pPr/>
+            <a:r>
+              <a:rPr lang="en-US" sz="1300" b="1" u="none" strike="noStrike">
+                <a:solidFill>
+                  <a:srgbClr val="000000"/>
+                </a:solidFill>
+                <a:effectLst/>
+                <a:uFillTx/>
+                <a:latin typeface="Arial"/>
+                <a:ea typeface="Arial"/>
+              </a:rPr>
+              <a:t>a</a:t>
+            </a:r>
+            <a:endParaRPr lang="en-US" sz="1300" b="0" u="none" strike="noStrike">
+              <a:solidFill>
+                <a:srgbClr val="000000"/>
+              </a:solidFill>
+              <a:effectLst/>
+              <a:uFillTx/>
+              <a:latin typeface="Times New Roman"/>
+            </a:endParaRPr>
+          </a:p>
+        </p:txBody>
+      </p:sp>
+      <p:sp>
+        <p:nvSpPr>
+          <p:cNvPr id="97" name=""/>
+          <p:cNvSpPr txBox="1"/>
+          <p:nvPr/>
+        </p:nvSpPr>
+        <p:spPr>
+          <a:xfrm>
+            <a:off x="2777040" y="2307960"/>
+            <a:ext cx="142560" cy="102600"/>
+          </a:xfrm>
+          <a:prstGeom prst="rect">
+            <a:avLst/>
+          </a:prstGeom>
+          <a:noFill/>
+          <a:ln w="0">
+            <a:noFill/>
+          </a:ln>
+        </p:spPr>
+        <p:txBody>
+          <a:bodyPr wrap="none" lIns="0" tIns="0" rIns="0" bIns="0" anchor="t">
+            <a:spAutoFit/>
+          </a:bodyPr>
+          <a:p>
+            <a:pPr/>
+            <a:r>
+              <a:rPr lang="en-US" sz="800" b="0" u="none" strike="noStrike">
+                <a:solidFill>
+                  <a:srgbClr val="262626"/>
+                </a:solidFill>
+                <a:effectLst/>
+                <a:uFillTx/>
+                <a:latin typeface="Arial"/>
+                <a:ea typeface="Arial"/>
+              </a:rPr>
+              <a:t>0.3</a:t>
+            </a:r>
+            <a:endParaRPr lang="en-US" sz="800" b="0" u="none" strike="noStrike">
+              <a:solidFill>
+                <a:srgbClr val="000000"/>
+              </a:solidFill>
+              <a:effectLst/>
+              <a:uFillTx/>
+              <a:latin typeface="Times New Roman"/>
+            </a:endParaRPr>
+          </a:p>
+        </p:txBody>
+      </p:sp>
+      <p:sp>
+        <p:nvSpPr>
+          <p:cNvPr id="98" name=""/>
+          <p:cNvSpPr txBox="1"/>
+          <p:nvPr/>
+        </p:nvSpPr>
+        <p:spPr>
+          <a:xfrm>
+            <a:off x="2777040" y="1699200"/>
+            <a:ext cx="142560" cy="102600"/>
+          </a:xfrm>
+          <a:prstGeom prst="rect">
+            <a:avLst/>
+          </a:prstGeom>
+          <a:noFill/>
+          <a:ln w="0">
+            <a:noFill/>
+          </a:ln>
+        </p:spPr>
+        <p:txBody>
+          <a:bodyPr wrap="none" lIns="0" tIns="0" rIns="0" bIns="0" anchor="t">
+            <a:spAutoFit/>
+          </a:bodyPr>
+          <a:p>
+            <a:pPr/>
+            <a:r>
+              <a:rPr lang="en-US" sz="800" b="0" u="none" strike="noStrike">
+                <a:solidFill>
+                  <a:srgbClr val="262626"/>
+                </a:solidFill>
+                <a:effectLst/>
+                <a:uFillTx/>
+                <a:latin typeface="Arial"/>
+                <a:ea typeface="Arial"/>
+              </a:rPr>
+              <a:t>0.5</a:t>
+            </a:r>
+            <a:endParaRPr lang="en-US" sz="800" b="0" u="none" strike="noStrike">
+              <a:solidFill>
+                <a:srgbClr val="000000"/>
+              </a:solidFill>
+              <a:effectLst/>
+              <a:uFillTx/>
+              <a:latin typeface="Times New Roman"/>
+            </a:endParaRPr>
+          </a:p>
+        </p:txBody>
+      </p:sp>
+      <p:sp>
+        <p:nvSpPr>
+          <p:cNvPr id="99" name=""/>
+          <p:cNvSpPr/>
+          <p:nvPr/>
+        </p:nvSpPr>
+        <p:spPr>
+          <a:xfrm>
+            <a:off x="2929320" y="2358720"/>
+            <a:ext cx="31320" cy="0"/>
+          </a:xfrm>
+          <a:prstGeom prst="line">
+            <a:avLst/>
+          </a:prstGeom>
+          <a:ln w="7920">
+            <a:solidFill>
+              <a:srgbClr val="333333"/>
+            </a:solidFill>
+            <a:round/>
+          </a:ln>
+        </p:spPr>
+        <p:style>
+          <a:lnRef idx="0"/>
+          <a:fillRef idx="0"/>
+          <a:effectRef idx="0"/>
+          <a:fontRef idx="minor"/>
+        </p:style>
+        <p:txBody>
+          <a:bodyPr lIns="3960" tIns="-3960" rIns="3960" bIns="-3960" anchor="t">
+            <a:noAutofit/>
+          </a:bodyPr>
+          <a:p>
+            <a:endParaRPr lang="en-US" sz="2400" b="0" u="none" strike="noStrike">
+              <a:solidFill>
+                <a:srgbClr val="000000"/>
+              </a:solidFill>
+              <a:effectLst/>
+              <a:uFillTx/>
+              <a:latin typeface="Times New Roman"/>
+            </a:endParaRPr>
+          </a:p>
+        </p:txBody>
+      </p:sp>
+      <p:sp>
+        <p:nvSpPr>
+          <p:cNvPr id="100" name=""/>
+          <p:cNvSpPr/>
+          <p:nvPr/>
+        </p:nvSpPr>
+        <p:spPr>
+          <a:xfrm>
+            <a:off x="2929320" y="1749600"/>
+            <a:ext cx="31320" cy="0"/>
+          </a:xfrm>
+          <a:prstGeom prst="line">
+            <a:avLst/>
+          </a:prstGeom>
+          <a:ln w="7920">
+            <a:solidFill>
+              <a:srgbClr val="333333"/>
+            </a:solidFill>
+            <a:round/>
+          </a:ln>
+        </p:spPr>
+        <p:style>
+          <a:lnRef idx="0"/>
+          <a:fillRef idx="0"/>
+          <a:effectRef idx="0"/>
+          <a:fontRef idx="minor"/>
+        </p:style>
+        <p:txBody>
+          <a:bodyPr lIns="3960" tIns="-3960" rIns="3960" bIns="-3960" anchor="t">
+            <a:noAutofit/>
+          </a:bodyPr>
+          <a:p>
+            <a:endParaRPr lang="en-US" sz="2400" b="0" u="none" strike="noStrike">
+              <a:solidFill>
+                <a:srgbClr val="000000"/>
+              </a:solidFill>
+              <a:effectLst/>
+              <a:uFillTx/>
+              <a:latin typeface="Times New Roman"/>
+            </a:endParaRPr>
+          </a:p>
+        </p:txBody>
+      </p:sp>
+      <p:sp>
+        <p:nvSpPr>
+          <p:cNvPr id="101" name=""/>
+          <p:cNvSpPr/>
+          <p:nvPr/>
+        </p:nvSpPr>
+        <p:spPr>
+          <a:xfrm>
+            <a:off x="2929320" y="1140840"/>
+            <a:ext cx="31320" cy="0"/>
+          </a:xfrm>
+          <a:prstGeom prst="line">
+            <a:avLst/>
+          </a:prstGeom>
+          <a:ln w="7920">
+            <a:solidFill>
+              <a:srgbClr val="333333"/>
+            </a:solidFill>
+            <a:round/>
+          </a:ln>
+        </p:spPr>
+        <p:style>
+          <a:lnRef idx="0"/>
+          <a:fillRef idx="0"/>
+          <a:effectRef idx="0"/>
+          <a:fontRef idx="minor"/>
+        </p:style>
+        <p:txBody>
+          <a:bodyPr lIns="3960" tIns="-3960" rIns="3960" bIns="-3960" anchor="t">
+            <a:noAutofit/>
+          </a:bodyPr>
+          <a:p>
+            <a:endParaRPr lang="en-US" sz="2400" b="0" u="none" strike="noStrike">
+              <a:solidFill>
+                <a:srgbClr val="000000"/>
+              </a:solidFill>
+              <a:effectLst/>
+              <a:uFillTx/>
+              <a:latin typeface="Times New Roman"/>
+            </a:endParaRPr>
+          </a:p>
+        </p:txBody>
+      </p:sp>
+      <p:sp>
+        <p:nvSpPr>
+          <p:cNvPr id="102" name=""/>
+          <p:cNvSpPr/>
+          <p:nvPr/>
+        </p:nvSpPr>
+        <p:spPr>
+          <a:xfrm>
+            <a:off x="2960640" y="2805120"/>
+            <a:ext cx="1851840" cy="0"/>
+          </a:xfrm>
+          <a:prstGeom prst="line">
+            <a:avLst/>
+          </a:prstGeom>
+          <a:ln cap="sq" w="9360">
+            <a:solidFill>
+              <a:srgbClr val="333333"/>
+            </a:solidFill>
+            <a:round/>
+          </a:ln>
+        </p:spPr>
+        <p:style>
+          <a:lnRef idx="0"/>
+          <a:fillRef idx="0"/>
+          <a:effectRef idx="0"/>
+          <a:fontRef idx="minor"/>
+        </p:style>
+        <p:txBody>
+          <a:bodyPr lIns="4680" tIns="-4680" rIns="4680" bIns="-4680" anchor="t">
+            <a:noAutofit/>
+          </a:bodyPr>
+          <a:p>
+            <a:endParaRPr lang="en-US" sz="2400" b="0" u="none" strike="noStrike">
+              <a:solidFill>
+                <a:srgbClr val="000000"/>
+              </a:solidFill>
+              <a:effectLst/>
+              <a:uFillTx/>
+              <a:latin typeface="Times New Roman"/>
+            </a:endParaRPr>
+          </a:p>
+        </p:txBody>
+      </p:sp>
+      <p:sp>
+        <p:nvSpPr>
+          <p:cNvPr id="103" name=""/>
+          <p:cNvSpPr/>
+          <p:nvPr/>
+        </p:nvSpPr>
+        <p:spPr>
+          <a:xfrm flipV="1">
+            <a:off x="3139920" y="2805120"/>
+            <a:ext cx="0" cy="31680"/>
+          </a:xfrm>
+          <a:prstGeom prst="line">
+            <a:avLst/>
+          </a:prstGeom>
+          <a:ln w="7920">
+            <a:solidFill>
+              <a:srgbClr val="333333"/>
+            </a:solidFill>
+            <a:round/>
+          </a:ln>
+        </p:spPr>
+        <p:style>
+          <a:lnRef idx="0"/>
+          <a:fillRef idx="0"/>
+          <a:effectRef idx="0"/>
+          <a:fontRef idx="minor"/>
+        </p:style>
+        <p:txBody>
+          <a:bodyPr lIns="3960" tIns="3960" rIns="3960" bIns="3960" anchor="t">
+            <a:noAutofit/>
+          </a:bodyPr>
+          <a:p>
+            <a:endParaRPr lang="en-US" sz="2400" b="0" u="none" strike="noStrike">
+              <a:solidFill>
+                <a:srgbClr val="000000"/>
+              </a:solidFill>
+              <a:effectLst/>
+              <a:uFillTx/>
+              <a:latin typeface="Times New Roman"/>
+            </a:endParaRPr>
+          </a:p>
+        </p:txBody>
+      </p:sp>
+      <p:sp>
+        <p:nvSpPr>
+          <p:cNvPr id="104" name=""/>
+          <p:cNvSpPr/>
+          <p:nvPr/>
+        </p:nvSpPr>
+        <p:spPr>
+          <a:xfrm flipV="1">
+            <a:off x="3438720" y="2805120"/>
+            <a:ext cx="0" cy="31680"/>
+          </a:xfrm>
+          <a:prstGeom prst="line">
+            <a:avLst/>
+          </a:prstGeom>
+          <a:ln w="7920">
+            <a:solidFill>
+              <a:srgbClr val="333333"/>
+            </a:solidFill>
+            <a:round/>
+          </a:ln>
+        </p:spPr>
+        <p:style>
+          <a:lnRef idx="0"/>
+          <a:fillRef idx="0"/>
+          <a:effectRef idx="0"/>
+          <a:fontRef idx="minor"/>
+        </p:style>
+        <p:txBody>
+          <a:bodyPr lIns="3960" tIns="3960" rIns="3960" bIns="3960" anchor="t">
+            <a:noAutofit/>
+          </a:bodyPr>
+          <a:p>
+            <a:endParaRPr lang="en-US" sz="2400" b="0" u="none" strike="noStrike">
+              <a:solidFill>
+                <a:srgbClr val="000000"/>
+              </a:solidFill>
+              <a:effectLst/>
+              <a:uFillTx/>
+              <a:latin typeface="Times New Roman"/>
+            </a:endParaRPr>
+          </a:p>
+        </p:txBody>
+      </p:sp>
+      <p:sp>
+        <p:nvSpPr>
+          <p:cNvPr id="105" name=""/>
+          <p:cNvSpPr/>
+          <p:nvPr/>
+        </p:nvSpPr>
+        <p:spPr>
+          <a:xfrm flipV="1">
+            <a:off x="3737520" y="2805120"/>
+            <a:ext cx="0" cy="31680"/>
+          </a:xfrm>
+          <a:prstGeom prst="line">
+            <a:avLst/>
+          </a:prstGeom>
+          <a:ln w="7920">
+            <a:solidFill>
+              <a:srgbClr val="333333"/>
+            </a:solidFill>
+            <a:round/>
+          </a:ln>
+        </p:spPr>
+        <p:style>
+          <a:lnRef idx="0"/>
+          <a:fillRef idx="0"/>
+          <a:effectRef idx="0"/>
+          <a:fontRef idx="minor"/>
+        </p:style>
+        <p:txBody>
+          <a:bodyPr lIns="3960" tIns="3960" rIns="3960" bIns="3960" anchor="t">
+            <a:noAutofit/>
+          </a:bodyPr>
+          <a:p>
+            <a:endParaRPr lang="en-US" sz="2400" b="0" u="none" strike="noStrike">
+              <a:solidFill>
+                <a:srgbClr val="000000"/>
+              </a:solidFill>
+              <a:effectLst/>
+              <a:uFillTx/>
+              <a:latin typeface="Times New Roman"/>
+            </a:endParaRPr>
+          </a:p>
+        </p:txBody>
+      </p:sp>
+      <p:sp>
+        <p:nvSpPr>
+          <p:cNvPr id="106" name=""/>
+          <p:cNvSpPr/>
+          <p:nvPr/>
+        </p:nvSpPr>
+        <p:spPr>
+          <a:xfrm flipV="1">
+            <a:off x="4035960" y="2805120"/>
+            <a:ext cx="0" cy="31680"/>
+          </a:xfrm>
+          <a:prstGeom prst="line">
+            <a:avLst/>
+          </a:prstGeom>
+          <a:ln w="7920">
+            <a:solidFill>
+              <a:srgbClr val="333333"/>
+            </a:solidFill>
+            <a:round/>
+          </a:ln>
+        </p:spPr>
+        <p:style>
+          <a:lnRef idx="0"/>
+          <a:fillRef idx="0"/>
+          <a:effectRef idx="0"/>
+          <a:fontRef idx="minor"/>
+        </p:style>
+        <p:txBody>
+          <a:bodyPr lIns="3960" tIns="3960" rIns="3960" bIns="3960" anchor="t">
+            <a:noAutofit/>
+          </a:bodyPr>
+          <a:p>
+            <a:endParaRPr lang="en-US" sz="2400" b="0" u="none" strike="noStrike">
+              <a:solidFill>
+                <a:srgbClr val="000000"/>
+              </a:solidFill>
+              <a:effectLst/>
+              <a:uFillTx/>
+              <a:latin typeface="Times New Roman"/>
+            </a:endParaRPr>
+          </a:p>
+        </p:txBody>
+      </p:sp>
+      <p:sp>
+        <p:nvSpPr>
+          <p:cNvPr id="107" name=""/>
+          <p:cNvSpPr/>
+          <p:nvPr/>
+        </p:nvSpPr>
+        <p:spPr>
+          <a:xfrm flipV="1">
+            <a:off x="4334760" y="2805120"/>
+            <a:ext cx="0" cy="31680"/>
+          </a:xfrm>
+          <a:prstGeom prst="line">
+            <a:avLst/>
+          </a:prstGeom>
+          <a:ln w="7920">
+            <a:solidFill>
+              <a:srgbClr val="333333"/>
+            </a:solidFill>
+            <a:round/>
+          </a:ln>
+        </p:spPr>
+        <p:style>
+          <a:lnRef idx="0"/>
+          <a:fillRef idx="0"/>
+          <a:effectRef idx="0"/>
+          <a:fontRef idx="minor"/>
+        </p:style>
+        <p:txBody>
+          <a:bodyPr lIns="3960" tIns="3960" rIns="3960" bIns="3960" anchor="t">
+            <a:noAutofit/>
+          </a:bodyPr>
+          <a:p>
+            <a:endParaRPr lang="en-US" sz="2400" b="0" u="none" strike="noStrike">
+              <a:solidFill>
+                <a:srgbClr val="000000"/>
+              </a:solidFill>
+              <a:effectLst/>
+              <a:uFillTx/>
+              <a:latin typeface="Times New Roman"/>
+            </a:endParaRPr>
+          </a:p>
+        </p:txBody>
+      </p:sp>
+      <p:sp>
+        <p:nvSpPr>
+          <p:cNvPr id="108" name=""/>
+          <p:cNvSpPr/>
+          <p:nvPr/>
+        </p:nvSpPr>
+        <p:spPr>
+          <a:xfrm flipV="1">
+            <a:off x="4633200" y="2805120"/>
+            <a:ext cx="0" cy="31680"/>
+          </a:xfrm>
+          <a:prstGeom prst="line">
+            <a:avLst/>
+          </a:prstGeom>
+          <a:ln w="7920">
+            <a:solidFill>
+              <a:srgbClr val="333333"/>
+            </a:solidFill>
+            <a:round/>
+          </a:ln>
+        </p:spPr>
+        <p:style>
+          <a:lnRef idx="0"/>
+          <a:fillRef idx="0"/>
+          <a:effectRef idx="0"/>
+          <a:fontRef idx="minor"/>
+        </p:style>
+        <p:txBody>
+          <a:bodyPr lIns="3960" tIns="3960" rIns="3960" bIns="3960" anchor="t">
+            <a:noAutofit/>
+          </a:bodyPr>
+          <a:p>
+            <a:endParaRPr lang="en-US" sz="2400" b="0" u="none" strike="noStrike">
+              <a:solidFill>
+                <a:srgbClr val="000000"/>
+              </a:solidFill>
+              <a:effectLst/>
+              <a:uFillTx/>
+              <a:latin typeface="Times New Roman"/>
+            </a:endParaRPr>
+          </a:p>
+        </p:txBody>
+      </p:sp>
+      <p:sp>
+        <p:nvSpPr>
+          <p:cNvPr id="109" name=""/>
+          <p:cNvSpPr txBox="1"/>
+          <p:nvPr/>
+        </p:nvSpPr>
+        <p:spPr>
+          <a:xfrm>
+            <a:off x="2777040" y="1090080"/>
+            <a:ext cx="142560" cy="102600"/>
+          </a:xfrm>
+          <a:prstGeom prst="rect">
+            <a:avLst/>
+          </a:prstGeom>
+          <a:noFill/>
+          <a:ln w="0">
+            <a:noFill/>
+          </a:ln>
+        </p:spPr>
+        <p:txBody>
+          <a:bodyPr wrap="none" lIns="0" tIns="0" rIns="0" bIns="0" anchor="t">
+            <a:spAutoFit/>
+          </a:bodyPr>
+          <a:p>
+            <a:pPr/>
+            <a:r>
+              <a:rPr lang="en-US" sz="800" b="0" u="none" strike="noStrike">
+                <a:solidFill>
+                  <a:srgbClr val="262626"/>
+                </a:solidFill>
+                <a:effectLst/>
+                <a:uFillTx/>
+                <a:latin typeface="Arial"/>
+                <a:ea typeface="Arial"/>
+              </a:rPr>
+              <a:t>0.7</a:t>
+            </a:r>
+            <a:endParaRPr lang="en-US" sz="800" b="0" u="none" strike="noStrike">
+              <a:solidFill>
+                <a:srgbClr val="000000"/>
+              </a:solidFill>
+              <a:effectLst/>
+              <a:uFillTx/>
+              <a:latin typeface="Times New Roman"/>
+            </a:endParaRPr>
+          </a:p>
+        </p:txBody>
+      </p:sp>
+      <p:sp>
+        <p:nvSpPr>
+          <p:cNvPr id="110" name=""/>
+          <p:cNvSpPr txBox="1"/>
+          <p:nvPr/>
+        </p:nvSpPr>
+        <p:spPr>
+          <a:xfrm rot="20100000">
+            <a:off x="2840760" y="2911680"/>
+            <a:ext cx="347040" cy="102600"/>
+          </a:xfrm>
+          <a:prstGeom prst="rect">
+            <a:avLst/>
+          </a:prstGeom>
+          <a:noFill/>
+          <a:ln w="0">
+            <a:noFill/>
+          </a:ln>
+        </p:spPr>
+        <p:txBody>
+          <a:bodyPr wrap="none" lIns="0" tIns="0" rIns="0" bIns="0" anchor="t">
+            <a:spAutoFit/>
+          </a:bodyPr>
+          <a:p>
+            <a:pPr/>
+            <a:r>
+              <a:rPr lang="en-US" sz="800" b="0" u="none" strike="noStrike">
+                <a:solidFill>
+                  <a:srgbClr val="262626"/>
+                </a:solidFill>
+                <a:effectLst/>
+                <a:uFillTx/>
+                <a:latin typeface="Arial"/>
+                <a:ea typeface="Arial"/>
+              </a:rPr>
+              <a:t>species</a:t>
+            </a:r>
+            <a:endParaRPr lang="en-US" sz="800" b="0" u="none" strike="noStrike">
+              <a:solidFill>
+                <a:srgbClr val="000000"/>
+              </a:solidFill>
+              <a:effectLst/>
+              <a:uFillTx/>
+              <a:latin typeface="Times New Roman"/>
+            </a:endParaRPr>
+          </a:p>
+        </p:txBody>
+      </p:sp>
+      <p:sp>
+        <p:nvSpPr>
+          <p:cNvPr id="111" name=""/>
+          <p:cNvSpPr txBox="1"/>
+          <p:nvPr/>
+        </p:nvSpPr>
+        <p:spPr>
+          <a:xfrm rot="20100000">
+            <a:off x="2678400" y="3009960"/>
+            <a:ext cx="849240" cy="102600"/>
+          </a:xfrm>
+          <a:prstGeom prst="rect">
+            <a:avLst/>
+          </a:prstGeom>
+          <a:noFill/>
+          <a:ln w="0">
+            <a:noFill/>
+          </a:ln>
+        </p:spPr>
+        <p:txBody>
+          <a:bodyPr wrap="none" lIns="0" tIns="0" rIns="0" bIns="0" anchor="t">
+            <a:spAutoFit/>
+          </a:bodyPr>
+          <a:p>
+            <a:pPr/>
+            <a:r>
+              <a:rPr lang="en-US" sz="800" b="0" u="none" strike="noStrike">
+                <a:solidFill>
+                  <a:srgbClr val="262626"/>
+                </a:solidFill>
+                <a:effectLst/>
+                <a:uFillTx/>
+                <a:latin typeface="Arial"/>
+                <a:ea typeface="Arial"/>
+              </a:rPr>
+              <a:t>species + province</a:t>
+            </a:r>
+            <a:endParaRPr lang="en-US" sz="800" b="0" u="none" strike="noStrike">
+              <a:solidFill>
+                <a:srgbClr val="000000"/>
+              </a:solidFill>
+              <a:effectLst/>
+              <a:uFillTx/>
+              <a:latin typeface="Times New Roman"/>
+            </a:endParaRPr>
+          </a:p>
+        </p:txBody>
+      </p:sp>
+      <p:sp>
+        <p:nvSpPr>
+          <p:cNvPr id="112" name=""/>
+          <p:cNvSpPr txBox="1"/>
+          <p:nvPr/>
+        </p:nvSpPr>
+        <p:spPr>
+          <a:xfrm rot="20100000">
+            <a:off x="3332160" y="2983320"/>
+            <a:ext cx="176400" cy="102600"/>
+          </a:xfrm>
+          <a:prstGeom prst="rect">
+            <a:avLst/>
+          </a:prstGeom>
+          <a:noFill/>
+          <a:ln w="0">
+            <a:noFill/>
+          </a:ln>
+        </p:spPr>
+        <p:txBody>
+          <a:bodyPr wrap="none" lIns="0" tIns="0" rIns="0" bIns="0" anchor="t">
+            <a:spAutoFit/>
+          </a:bodyPr>
+          <a:p>
+            <a:pPr/>
+            <a:r>
+              <a:rPr lang="en-US" sz="800" b="0" u="none" strike="noStrike">
+                <a:solidFill>
+                  <a:srgbClr val="262626"/>
+                </a:solidFill>
+                <a:effectLst/>
+                <a:uFillTx/>
+                <a:latin typeface="Arial"/>
+                <a:ea typeface="Arial"/>
+              </a:rPr>
+              <a:t>(v1)</a:t>
+            </a:r>
+            <a:endParaRPr lang="en-US" sz="800" b="0" u="none" strike="noStrike">
+              <a:solidFill>
+                <a:srgbClr val="000000"/>
+              </a:solidFill>
+              <a:effectLst/>
+              <a:uFillTx/>
+              <a:latin typeface="Times New Roman"/>
+            </a:endParaRPr>
+          </a:p>
+        </p:txBody>
+      </p:sp>
+      <p:sp>
+        <p:nvSpPr>
+          <p:cNvPr id="113" name=""/>
+          <p:cNvSpPr txBox="1"/>
+          <p:nvPr/>
+        </p:nvSpPr>
+        <p:spPr>
+          <a:xfrm rot="20100000">
+            <a:off x="3486960" y="2903400"/>
+            <a:ext cx="287280" cy="102600"/>
+          </a:xfrm>
+          <a:prstGeom prst="rect">
+            <a:avLst/>
+          </a:prstGeom>
+          <a:noFill/>
+          <a:ln w="0">
+            <a:noFill/>
+          </a:ln>
+        </p:spPr>
+        <p:txBody>
+          <a:bodyPr wrap="none" lIns="0" tIns="0" rIns="0" bIns="0" anchor="t">
+            <a:spAutoFit/>
+          </a:bodyPr>
+          <a:p>
+            <a:pPr/>
+            <a:r>
+              <a:rPr lang="en-US" sz="800" b="0" u="none" strike="noStrike">
+                <a:solidFill>
+                  <a:srgbClr val="262626"/>
+                </a:solidFill>
+                <a:effectLst/>
+                <a:uFillTx/>
+                <a:latin typeface="Arial"/>
+                <a:ea typeface="Arial"/>
+              </a:rPr>
+              <a:t>+ year</a:t>
+            </a:r>
+            <a:endParaRPr lang="en-US" sz="800" b="0" u="none" strike="noStrike">
+              <a:solidFill>
+                <a:srgbClr val="000000"/>
+              </a:solidFill>
+              <a:effectLst/>
+              <a:uFillTx/>
+              <a:latin typeface="Times New Roman"/>
+            </a:endParaRPr>
+          </a:p>
+        </p:txBody>
+      </p:sp>
+      <p:sp>
+        <p:nvSpPr>
+          <p:cNvPr id="114" name=""/>
+          <p:cNvSpPr txBox="1"/>
+          <p:nvPr/>
+        </p:nvSpPr>
+        <p:spPr>
+          <a:xfrm rot="20100000">
+            <a:off x="3336480" y="2997360"/>
+            <a:ext cx="781200" cy="102600"/>
+          </a:xfrm>
+          <a:prstGeom prst="rect">
+            <a:avLst/>
+          </a:prstGeom>
+          <a:noFill/>
+          <a:ln w="0">
+            <a:noFill/>
+          </a:ln>
+        </p:spPr>
+        <p:txBody>
+          <a:bodyPr wrap="none" lIns="0" tIns="0" rIns="0" bIns="0" anchor="t">
+            <a:spAutoFit/>
+          </a:bodyPr>
+          <a:p>
+            <a:pPr/>
+            <a:r>
+              <a:rPr lang="en-US" sz="800" b="0" u="none" strike="noStrike">
+                <a:solidFill>
+                  <a:srgbClr val="262626"/>
+                </a:solidFill>
+                <a:effectLst/>
+                <a:uFillTx/>
+                <a:latin typeface="Arial"/>
+                <a:ea typeface="Arial"/>
+              </a:rPr>
+              <a:t>+ province x year</a:t>
+            </a:r>
+            <a:endParaRPr lang="en-US" sz="800" b="0" u="none" strike="noStrike">
+              <a:solidFill>
+                <a:srgbClr val="000000"/>
+              </a:solidFill>
+              <a:effectLst/>
+              <a:uFillTx/>
+              <a:latin typeface="Times New Roman"/>
+            </a:endParaRPr>
+          </a:p>
+        </p:txBody>
+      </p:sp>
+      <p:sp>
+        <p:nvSpPr>
+          <p:cNvPr id="115" name=""/>
+          <p:cNvSpPr txBox="1"/>
+          <p:nvPr/>
+        </p:nvSpPr>
+        <p:spPr>
+          <a:xfrm rot="20100000">
+            <a:off x="3784320" y="3016080"/>
+            <a:ext cx="324000" cy="102600"/>
+          </a:xfrm>
+          <a:prstGeom prst="rect">
+            <a:avLst/>
+          </a:prstGeom>
+          <a:noFill/>
+          <a:ln w="0">
+            <a:noFill/>
+          </a:ln>
+        </p:spPr>
+        <p:txBody>
+          <a:bodyPr wrap="none" lIns="0" tIns="0" rIns="0" bIns="0" anchor="t">
+            <a:spAutoFit/>
+          </a:bodyPr>
+          <a:p>
+            <a:pPr/>
+            <a:r>
+              <a:rPr lang="en-US" sz="800" b="0" u="none" strike="noStrike">
+                <a:solidFill>
+                  <a:srgbClr val="262626"/>
+                </a:solidFill>
+                <a:effectLst/>
+                <a:uFillTx/>
+                <a:latin typeface="Arial"/>
+                <a:ea typeface="Arial"/>
+              </a:rPr>
+              <a:t>(MAIN)</a:t>
+            </a:r>
+            <a:endParaRPr lang="en-US" sz="800" b="0" u="none" strike="noStrike">
+              <a:solidFill>
+                <a:srgbClr val="000000"/>
+              </a:solidFill>
+              <a:effectLst/>
+              <a:uFillTx/>
+              <a:latin typeface="Times New Roman"/>
+            </a:endParaRPr>
+          </a:p>
+        </p:txBody>
+      </p:sp>
+      <p:sp>
+        <p:nvSpPr>
+          <p:cNvPr id="116" name=""/>
+          <p:cNvSpPr txBox="1"/>
+          <p:nvPr/>
+        </p:nvSpPr>
+        <p:spPr>
+          <a:xfrm rot="20100000">
+            <a:off x="3320280" y="3065040"/>
+            <a:ext cx="1121760" cy="102600"/>
+          </a:xfrm>
+          <a:prstGeom prst="rect">
+            <a:avLst/>
+          </a:prstGeom>
+          <a:noFill/>
+          <a:ln w="0">
+            <a:noFill/>
+          </a:ln>
+        </p:spPr>
+        <p:txBody>
+          <a:bodyPr wrap="none" lIns="0" tIns="0" rIns="0" bIns="0" anchor="t">
+            <a:spAutoFit/>
+          </a:bodyPr>
+          <a:p>
+            <a:pPr/>
+            <a:r>
+              <a:rPr lang="en-US" sz="800" b="0" u="none" strike="noStrike">
+                <a:solidFill>
+                  <a:srgbClr val="262626"/>
+                </a:solidFill>
+                <a:effectLst/>
+                <a:uFillTx/>
+                <a:latin typeface="Arial"/>
+                <a:ea typeface="Arial"/>
+              </a:rPr>
+              <a:t>+ species warming slope</a:t>
+            </a:r>
+            <a:endParaRPr lang="en-US" sz="800" b="0" u="none" strike="noStrike">
+              <a:solidFill>
+                <a:srgbClr val="000000"/>
+              </a:solidFill>
+              <a:effectLst/>
+              <a:uFillTx/>
+              <a:latin typeface="Times New Roman"/>
+            </a:endParaRPr>
+          </a:p>
+        </p:txBody>
+      </p:sp>
+      <p:sp>
+        <p:nvSpPr>
+          <p:cNvPr id="117" name=""/>
+          <p:cNvSpPr txBox="1"/>
+          <p:nvPr/>
+        </p:nvSpPr>
+        <p:spPr>
+          <a:xfrm rot="20100000">
+            <a:off x="3739320" y="3035160"/>
+            <a:ext cx="1008360" cy="102600"/>
+          </a:xfrm>
+          <a:prstGeom prst="rect">
+            <a:avLst/>
+          </a:prstGeom>
+          <a:noFill/>
+          <a:ln w="0">
+            <a:noFill/>
+          </a:ln>
+        </p:spPr>
+        <p:txBody>
+          <a:bodyPr wrap="none" lIns="0" tIns="0" rIns="0" bIns="0" anchor="t">
+            <a:spAutoFit/>
+          </a:bodyPr>
+          <a:p>
+            <a:pPr/>
+            <a:r>
+              <a:rPr lang="en-US" sz="800" b="0" u="none" strike="noStrike">
+                <a:solidFill>
+                  <a:srgbClr val="262626"/>
+                </a:solidFill>
+                <a:effectLst/>
+                <a:uFillTx/>
+                <a:latin typeface="Arial"/>
+                <a:ea typeface="Arial"/>
+              </a:rPr>
+              <a:t>+ province effort slope</a:t>
+            </a:r>
+            <a:endParaRPr lang="en-US" sz="800" b="0" u="none" strike="noStrike">
+              <a:solidFill>
+                <a:srgbClr val="000000"/>
+              </a:solidFill>
+              <a:effectLst/>
+              <a:uFillTx/>
+              <a:latin typeface="Times New Roman"/>
+            </a:endParaRPr>
+          </a:p>
+        </p:txBody>
+      </p:sp>
+      <p:sp>
+        <p:nvSpPr>
+          <p:cNvPr id="118" name=""/>
+          <p:cNvSpPr/>
+          <p:nvPr/>
+        </p:nvSpPr>
+        <p:spPr>
+          <a:xfrm>
+            <a:off x="2895480" y="1437120"/>
+            <a:ext cx="1167840" cy="469800"/>
+          </a:xfrm>
+          <a:custGeom>
+            <a:avLst/>
+            <a:gdLst/>
+            <a:ahLst/>
+            <a:rect l="0" t="0" r="r" b="b"/>
+            <a:pathLst>
+              <a:path w="3244" h="1305">
+                <a:moveTo>
+                  <a:pt x="0" y="0"/>
+                </a:moveTo>
+                <a:lnTo>
+                  <a:pt x="3244" y="0"/>
+                </a:lnTo>
+                <a:lnTo>
+                  <a:pt x="3244" y="1305"/>
+                </a:lnTo>
+                <a:lnTo>
+                  <a:pt x="0" y="1305"/>
+                </a:lnTo>
+                <a:lnTo>
+                  <a:pt x="0" y="0"/>
+                </a:lnTo>
+                <a:close/>
+              </a:path>
+            </a:pathLst>
+          </a:custGeom>
+          <a:solidFill>
+            <a:srgbClr val="FFFFFF"/>
+          </a:solidFill>
+          <a:ln w="0">
+            <a:noFill/>
+          </a:ln>
+        </p:spPr>
+        <p:txBody>
+          <a:bodyPr lIns="0" tIns="0" rIns="0" bIns="0" anchor="t">
+            <a:noAutofit/>
+          </a:bodyPr>
+          <a:p>
+            <a:endParaRPr lang="en-US" sz="2400" b="0" u="none" strike="noStrike">
+              <a:solidFill>
+                <a:srgbClr val="000000"/>
+              </a:solidFill>
+              <a:effectLst/>
+              <a:uFillTx/>
+              <a:latin typeface="Times New Roman"/>
+            </a:endParaRPr>
+          </a:p>
+        </p:txBody>
+      </p:sp>
+      <p:sp>
+        <p:nvSpPr>
+          <p:cNvPr id="119" name=""/>
+          <p:cNvSpPr/>
+          <p:nvPr/>
+        </p:nvSpPr>
+        <p:spPr>
+          <a:xfrm>
+            <a:off x="2958840" y="1500480"/>
+            <a:ext cx="114120" cy="114480"/>
+          </a:xfrm>
+          <a:custGeom>
+            <a:avLst/>
+            <a:gdLst/>
+            <a:ahLst/>
+            <a:rect l="0" t="0" r="r" b="b"/>
+            <a:pathLst>
+              <a:path w="317" h="318">
+                <a:moveTo>
+                  <a:pt x="0" y="0"/>
+                </a:moveTo>
+                <a:lnTo>
+                  <a:pt x="317" y="0"/>
+                </a:lnTo>
+                <a:lnTo>
+                  <a:pt x="317" y="318"/>
+                </a:lnTo>
+                <a:lnTo>
+                  <a:pt x="0" y="318"/>
+                </a:lnTo>
+                <a:lnTo>
+                  <a:pt x="0" y="0"/>
+                </a:lnTo>
+                <a:close/>
+              </a:path>
+            </a:pathLst>
+          </a:custGeom>
+          <a:solidFill>
+            <a:srgbClr val="FFFFFF"/>
+          </a:solidFill>
+          <a:ln w="0">
+            <a:noFill/>
+          </a:ln>
+        </p:spPr>
+        <p:txBody>
+          <a:bodyPr lIns="0" tIns="0" rIns="0" bIns="0" anchor="t">
+            <a:noAutofit/>
+          </a:bodyPr>
+          <a:p>
+            <a:endParaRPr lang="en-US" sz="2400" b="0" u="none" strike="noStrike">
+              <a:solidFill>
+                <a:srgbClr val="000000"/>
+              </a:solidFill>
+              <a:effectLst/>
+              <a:uFillTx/>
+              <a:latin typeface="Times New Roman"/>
+            </a:endParaRPr>
+          </a:p>
+        </p:txBody>
+      </p:sp>
+      <p:sp>
+        <p:nvSpPr>
+          <p:cNvPr id="120" name=""/>
+          <p:cNvSpPr/>
+          <p:nvPr/>
+        </p:nvSpPr>
+        <p:spPr>
+          <a:xfrm>
+            <a:off x="2970360" y="1557360"/>
+            <a:ext cx="91080" cy="0"/>
+          </a:xfrm>
+          <a:prstGeom prst="line">
+            <a:avLst/>
+          </a:prstGeom>
+          <a:ln w="16200">
+            <a:solidFill>
               <a:srgbClr val="009E73"/>
             </a:solidFill>
             <a:round/>
           </a:ln>
         </p:spPr>
-        <p:txBody>
-          <a:bodyPr lIns="3960" tIns="3960" rIns="3960" bIns="3960" anchor="t">
-            <a:noAutofit/>
-          </a:bodyPr>
-          <a:p>
-            <a:endParaRPr lang="en-US" sz="2400" b="0" u="none" strike="noStrike">
-              <a:solidFill>
-                <a:srgbClr val="000000"/>
-              </a:solidFill>
-              <a:effectLst/>
-              <a:uFillTx/>
-              <a:latin typeface="Times New Roman"/>
-            </a:endParaRPr>
-          </a:p>
-        </p:txBody>
-      </p:sp>
-      <p:sp>
-        <p:nvSpPr>
-          <p:cNvPr id="69" name=""/>
-          <p:cNvSpPr/>
-          <p:nvPr/>
-        </p:nvSpPr>
-        <p:spPr>
-          <a:xfrm>
-            <a:off x="4602240" y="2031120"/>
+        <p:style>
+          <a:lnRef idx="0"/>
+          <a:fillRef idx="0"/>
+          <a:effectRef idx="0"/>
+          <a:fontRef idx="minor"/>
+        </p:style>
+        <p:txBody>
+          <a:bodyPr lIns="7920" tIns="-7920" rIns="7920" bIns="-7920" anchor="t">
+            <a:noAutofit/>
+          </a:bodyPr>
+          <a:p>
+            <a:endParaRPr lang="en-US" sz="2400" b="0" u="none" strike="noStrike">
+              <a:solidFill>
+                <a:srgbClr val="000000"/>
+              </a:solidFill>
+              <a:effectLst/>
+              <a:uFillTx/>
+              <a:latin typeface="Times New Roman"/>
+            </a:endParaRPr>
+          </a:p>
+        </p:txBody>
+      </p:sp>
+      <p:sp>
+        <p:nvSpPr>
+          <p:cNvPr id="121" name=""/>
+          <p:cNvSpPr/>
+          <p:nvPr/>
+        </p:nvSpPr>
+        <p:spPr>
+          <a:xfrm>
+            <a:off x="2984760" y="1526400"/>
             <a:ext cx="62640" cy="63000"/>
           </a:xfrm>
           <a:custGeom>
@@ -3539,13 +6246,13 @@
       </p:sp>
       <p:sp>
         <p:nvSpPr>
-          <p:cNvPr id="70" name=""/>
-          <p:cNvSpPr/>
-          <p:nvPr/>
-        </p:nvSpPr>
-        <p:spPr>
-          <a:xfrm>
-            <a:off x="4602240" y="2031120"/>
+          <p:cNvPr id="122" name=""/>
+          <p:cNvSpPr/>
+          <p:nvPr/>
+        </p:nvSpPr>
+        <p:spPr>
+          <a:xfrm>
+            <a:off x="2984760" y="1526400"/>
             <a:ext cx="62640" cy="63000"/>
           </a:xfrm>
           <a:custGeom>
@@ -3596,2713 +6303,6 @@
       </p:sp>
       <p:sp>
         <p:nvSpPr>
-          <p:cNvPr id="71" name=""/>
-          <p:cNvSpPr/>
-          <p:nvPr/>
-        </p:nvSpPr>
-        <p:spPr>
-          <a:xfrm>
-            <a:off x="3108960" y="1148040"/>
-            <a:ext cx="62640" cy="63000"/>
-          </a:xfrm>
-          <a:custGeom>
-            <a:avLst/>
-            <a:gdLst/>
-            <a:ahLst/>
-            <a:rect l="0" t="0" r="r" b="b"/>
-            <a:pathLst>
-              <a:path w="174" h="175">
-                <a:moveTo>
-                  <a:pt x="0" y="87"/>
-                </a:moveTo>
-                <a:cubicBezTo>
-                  <a:pt x="0" y="-29"/>
-                  <a:pt x="174" y="-29"/>
-                  <a:pt x="174" y="87"/>
-                </a:cubicBezTo>
-                <a:cubicBezTo>
-                  <a:pt x="174" y="204"/>
-                  <a:pt x="0" y="204"/>
-                  <a:pt x="0" y="87"/>
-                </a:cubicBezTo>
-                <a:close/>
-              </a:path>
-            </a:pathLst>
-          </a:custGeom>
-          <a:solidFill>
-            <a:srgbClr val="0072B2"/>
-          </a:solidFill>
-          <a:ln w="0">
-            <a:noFill/>
-          </a:ln>
-        </p:spPr>
-        <p:txBody>
-          <a:bodyPr lIns="0" tIns="0" rIns="0" bIns="0" anchor="t">
-            <a:noAutofit/>
-          </a:bodyPr>
-          <a:p>
-            <a:endParaRPr lang="en-US" sz="2400" b="0" u="none" strike="noStrike">
-              <a:solidFill>
-                <a:srgbClr val="FFFFFF"/>
-              </a:solidFill>
-              <a:effectLst/>
-              <a:uFillTx/>
-              <a:latin typeface="Times New Roman"/>
-            </a:endParaRPr>
-          </a:p>
-        </p:txBody>
-      </p:sp>
-      <p:sp>
-        <p:nvSpPr>
-          <p:cNvPr id="72" name=""/>
-          <p:cNvSpPr/>
-          <p:nvPr/>
-        </p:nvSpPr>
-        <p:spPr>
-          <a:xfrm>
-            <a:off x="3108960" y="1148040"/>
-            <a:ext cx="62640" cy="63000"/>
-          </a:xfrm>
-          <a:custGeom>
-            <a:avLst/>
-            <a:gdLst/>
-            <a:ahLst/>
-            <a:rect l="0" t="0" r="r" b="b"/>
-            <a:pathLst>
-              <a:path fill="none" w="174" h="175">
-                <a:moveTo>
-                  <a:pt x="174" y="87"/>
-                </a:moveTo>
-                <a:cubicBezTo>
-                  <a:pt x="174" y="204"/>
-                  <a:pt x="0" y="204"/>
-                  <a:pt x="0" y="87"/>
-                </a:cubicBezTo>
-                <a:cubicBezTo>
-                  <a:pt x="0" y="-29"/>
-                  <a:pt x="174" y="-29"/>
-                  <a:pt x="174" y="87"/>
-                </a:cubicBezTo>
-              </a:path>
-            </a:pathLst>
-          </a:custGeom>
-          <a:ln cap="rnd" w="7920">
-            <a:solidFill>
-              <a:srgbClr val="0072B2"/>
-            </a:solidFill>
-            <a:round/>
-          </a:ln>
-        </p:spPr>
-        <p:txBody>
-          <a:bodyPr lIns="3960" tIns="3960" rIns="3960" bIns="3960" anchor="t">
-            <a:noAutofit/>
-          </a:bodyPr>
-          <a:p>
-            <a:endParaRPr lang="en-US" sz="2400" b="0" u="none" strike="noStrike">
-              <a:solidFill>
-                <a:srgbClr val="000000"/>
-              </a:solidFill>
-              <a:effectLst/>
-              <a:uFillTx/>
-              <a:latin typeface="Times New Roman"/>
-            </a:endParaRPr>
-          </a:p>
-        </p:txBody>
-      </p:sp>
-      <p:sp>
-        <p:nvSpPr>
-          <p:cNvPr id="73" name=""/>
-          <p:cNvSpPr/>
-          <p:nvPr/>
-        </p:nvSpPr>
-        <p:spPr>
-          <a:xfrm>
-            <a:off x="3407400" y="1046520"/>
-            <a:ext cx="62640" cy="62640"/>
-          </a:xfrm>
-          <a:custGeom>
-            <a:avLst/>
-            <a:gdLst/>
-            <a:ahLst/>
-            <a:rect l="0" t="0" r="r" b="b"/>
-            <a:pathLst>
-              <a:path w="174" h="174">
-                <a:moveTo>
-                  <a:pt x="0" y="86"/>
-                </a:moveTo>
-                <a:cubicBezTo>
-                  <a:pt x="0" y="-29"/>
-                  <a:pt x="174" y="-29"/>
-                  <a:pt x="174" y="86"/>
-                </a:cubicBezTo>
-                <a:cubicBezTo>
-                  <a:pt x="174" y="203"/>
-                  <a:pt x="0" y="203"/>
-                  <a:pt x="0" y="86"/>
-                </a:cubicBezTo>
-                <a:close/>
-              </a:path>
-            </a:pathLst>
-          </a:custGeom>
-          <a:solidFill>
-            <a:srgbClr val="0072B2"/>
-          </a:solidFill>
-          <a:ln w="0">
-            <a:noFill/>
-          </a:ln>
-        </p:spPr>
-        <p:txBody>
-          <a:bodyPr lIns="0" tIns="0" rIns="0" bIns="0" anchor="t">
-            <a:noAutofit/>
-          </a:bodyPr>
-          <a:p>
-            <a:endParaRPr lang="en-US" sz="2400" b="0" u="none" strike="noStrike">
-              <a:solidFill>
-                <a:srgbClr val="FFFFFF"/>
-              </a:solidFill>
-              <a:effectLst/>
-              <a:uFillTx/>
-              <a:latin typeface="Times New Roman"/>
-            </a:endParaRPr>
-          </a:p>
-        </p:txBody>
-      </p:sp>
-      <p:sp>
-        <p:nvSpPr>
-          <p:cNvPr id="74" name=""/>
-          <p:cNvSpPr/>
-          <p:nvPr/>
-        </p:nvSpPr>
-        <p:spPr>
-          <a:xfrm>
-            <a:off x="3407400" y="1046520"/>
-            <a:ext cx="62640" cy="62640"/>
-          </a:xfrm>
-          <a:custGeom>
-            <a:avLst/>
-            <a:gdLst/>
-            <a:ahLst/>
-            <a:rect l="0" t="0" r="r" b="b"/>
-            <a:pathLst>
-              <a:path fill="none" w="174" h="174">
-                <a:moveTo>
-                  <a:pt x="174" y="86"/>
-                </a:moveTo>
-                <a:cubicBezTo>
-                  <a:pt x="174" y="203"/>
-                  <a:pt x="0" y="203"/>
-                  <a:pt x="0" y="86"/>
-                </a:cubicBezTo>
-                <a:cubicBezTo>
-                  <a:pt x="0" y="-29"/>
-                  <a:pt x="174" y="-29"/>
-                  <a:pt x="174" y="86"/>
-                </a:cubicBezTo>
-              </a:path>
-            </a:pathLst>
-          </a:custGeom>
-          <a:ln cap="rnd" w="7920">
-            <a:solidFill>
-              <a:srgbClr val="0072B2"/>
-            </a:solidFill>
-            <a:round/>
-          </a:ln>
-        </p:spPr>
-        <p:txBody>
-          <a:bodyPr lIns="3960" tIns="3960" rIns="3960" bIns="3960" anchor="t">
-            <a:noAutofit/>
-          </a:bodyPr>
-          <a:p>
-            <a:endParaRPr lang="en-US" sz="2400" b="0" u="none" strike="noStrike">
-              <a:solidFill>
-                <a:srgbClr val="000000"/>
-              </a:solidFill>
-              <a:effectLst/>
-              <a:uFillTx/>
-              <a:latin typeface="Times New Roman"/>
-            </a:endParaRPr>
-          </a:p>
-        </p:txBody>
-      </p:sp>
-      <p:sp>
-        <p:nvSpPr>
-          <p:cNvPr id="75" name=""/>
-          <p:cNvSpPr/>
-          <p:nvPr/>
-        </p:nvSpPr>
-        <p:spPr>
-          <a:xfrm>
-            <a:off x="3706200" y="996480"/>
-            <a:ext cx="62640" cy="62640"/>
-          </a:xfrm>
-          <a:custGeom>
-            <a:avLst/>
-            <a:gdLst/>
-            <a:ahLst/>
-            <a:rect l="0" t="0" r="r" b="b"/>
-            <a:pathLst>
-              <a:path w="174" h="174">
-                <a:moveTo>
-                  <a:pt x="0" y="88"/>
-                </a:moveTo>
-                <a:cubicBezTo>
-                  <a:pt x="0" y="-29"/>
-                  <a:pt x="174" y="-29"/>
-                  <a:pt x="174" y="88"/>
-                </a:cubicBezTo>
-                <a:cubicBezTo>
-                  <a:pt x="174" y="203"/>
-                  <a:pt x="0" y="203"/>
-                  <a:pt x="0" y="88"/>
-                </a:cubicBezTo>
-                <a:close/>
-              </a:path>
-            </a:pathLst>
-          </a:custGeom>
-          <a:solidFill>
-            <a:srgbClr val="0072B2"/>
-          </a:solidFill>
-          <a:ln w="0">
-            <a:noFill/>
-          </a:ln>
-        </p:spPr>
-        <p:txBody>
-          <a:bodyPr lIns="0" tIns="0" rIns="0" bIns="0" anchor="t">
-            <a:noAutofit/>
-          </a:bodyPr>
-          <a:p>
-            <a:endParaRPr lang="en-US" sz="2400" b="0" u="none" strike="noStrike">
-              <a:solidFill>
-                <a:srgbClr val="FFFFFF"/>
-              </a:solidFill>
-              <a:effectLst/>
-              <a:uFillTx/>
-              <a:latin typeface="Times New Roman"/>
-            </a:endParaRPr>
-          </a:p>
-        </p:txBody>
-      </p:sp>
-      <p:sp>
-        <p:nvSpPr>
-          <p:cNvPr id="76" name=""/>
-          <p:cNvSpPr/>
-          <p:nvPr/>
-        </p:nvSpPr>
-        <p:spPr>
-          <a:xfrm>
-            <a:off x="3706200" y="996480"/>
-            <a:ext cx="62640" cy="62640"/>
-          </a:xfrm>
-          <a:custGeom>
-            <a:avLst/>
-            <a:gdLst/>
-            <a:ahLst/>
-            <a:rect l="0" t="0" r="r" b="b"/>
-            <a:pathLst>
-              <a:path fill="none" w="174" h="174">
-                <a:moveTo>
-                  <a:pt x="174" y="88"/>
-                </a:moveTo>
-                <a:cubicBezTo>
-                  <a:pt x="174" y="203"/>
-                  <a:pt x="0" y="203"/>
-                  <a:pt x="0" y="88"/>
-                </a:cubicBezTo>
-                <a:cubicBezTo>
-                  <a:pt x="0" y="-29"/>
-                  <a:pt x="174" y="-29"/>
-                  <a:pt x="174" y="88"/>
-                </a:cubicBezTo>
-              </a:path>
-            </a:pathLst>
-          </a:custGeom>
-          <a:ln cap="rnd" w="7920">
-            <a:solidFill>
-              <a:srgbClr val="0072B2"/>
-            </a:solidFill>
-            <a:round/>
-          </a:ln>
-        </p:spPr>
-        <p:txBody>
-          <a:bodyPr lIns="3960" tIns="3960" rIns="3960" bIns="3960" anchor="t">
-            <a:noAutofit/>
-          </a:bodyPr>
-          <a:p>
-            <a:endParaRPr lang="en-US" sz="2400" b="0" u="none" strike="noStrike">
-              <a:solidFill>
-                <a:srgbClr val="000000"/>
-              </a:solidFill>
-              <a:effectLst/>
-              <a:uFillTx/>
-              <a:latin typeface="Times New Roman"/>
-            </a:endParaRPr>
-          </a:p>
-        </p:txBody>
-      </p:sp>
-      <p:sp>
-        <p:nvSpPr>
-          <p:cNvPr id="77" name=""/>
-          <p:cNvSpPr/>
-          <p:nvPr/>
-        </p:nvSpPr>
-        <p:spPr>
-          <a:xfrm>
-            <a:off x="4004640" y="642960"/>
-            <a:ext cx="63000" cy="62640"/>
-          </a:xfrm>
-          <a:custGeom>
-            <a:avLst/>
-            <a:gdLst/>
-            <a:ahLst/>
-            <a:rect l="0" t="0" r="r" b="b"/>
-            <a:pathLst>
-              <a:path w="175" h="174">
-                <a:moveTo>
-                  <a:pt x="0" y="88"/>
-                </a:moveTo>
-                <a:cubicBezTo>
-                  <a:pt x="0" y="-29"/>
-                  <a:pt x="175" y="-29"/>
-                  <a:pt x="175" y="88"/>
-                </a:cubicBezTo>
-                <a:cubicBezTo>
-                  <a:pt x="175" y="203"/>
-                  <a:pt x="0" y="203"/>
-                  <a:pt x="0" y="88"/>
-                </a:cubicBezTo>
-                <a:close/>
-              </a:path>
-            </a:pathLst>
-          </a:custGeom>
-          <a:solidFill>
-            <a:srgbClr val="0072B2"/>
-          </a:solidFill>
-          <a:ln w="0">
-            <a:noFill/>
-          </a:ln>
-        </p:spPr>
-        <p:txBody>
-          <a:bodyPr lIns="0" tIns="0" rIns="0" bIns="0" anchor="t">
-            <a:noAutofit/>
-          </a:bodyPr>
-          <a:p>
-            <a:endParaRPr lang="en-US" sz="2400" b="0" u="none" strike="noStrike">
-              <a:solidFill>
-                <a:srgbClr val="FFFFFF"/>
-              </a:solidFill>
-              <a:effectLst/>
-              <a:uFillTx/>
-              <a:latin typeface="Times New Roman"/>
-            </a:endParaRPr>
-          </a:p>
-        </p:txBody>
-      </p:sp>
-      <p:sp>
-        <p:nvSpPr>
-          <p:cNvPr id="78" name=""/>
-          <p:cNvSpPr/>
-          <p:nvPr/>
-        </p:nvSpPr>
-        <p:spPr>
-          <a:xfrm>
-            <a:off x="4004640" y="642960"/>
-            <a:ext cx="63000" cy="62640"/>
-          </a:xfrm>
-          <a:custGeom>
-            <a:avLst/>
-            <a:gdLst/>
-            <a:ahLst/>
-            <a:rect l="0" t="0" r="r" b="b"/>
-            <a:pathLst>
-              <a:path fill="none" w="175" h="174">
-                <a:moveTo>
-                  <a:pt x="175" y="88"/>
-                </a:moveTo>
-                <a:cubicBezTo>
-                  <a:pt x="175" y="203"/>
-                  <a:pt x="0" y="203"/>
-                  <a:pt x="0" y="88"/>
-                </a:cubicBezTo>
-                <a:cubicBezTo>
-                  <a:pt x="0" y="-29"/>
-                  <a:pt x="175" y="-29"/>
-                  <a:pt x="175" y="88"/>
-                </a:cubicBezTo>
-              </a:path>
-            </a:pathLst>
-          </a:custGeom>
-          <a:ln cap="rnd" w="7920">
-            <a:solidFill>
-              <a:srgbClr val="0072B2"/>
-            </a:solidFill>
-            <a:round/>
-          </a:ln>
-        </p:spPr>
-        <p:txBody>
-          <a:bodyPr lIns="3960" tIns="3960" rIns="3960" bIns="3960" anchor="t">
-            <a:noAutofit/>
-          </a:bodyPr>
-          <a:p>
-            <a:endParaRPr lang="en-US" sz="2400" b="0" u="none" strike="noStrike">
-              <a:solidFill>
-                <a:srgbClr val="000000"/>
-              </a:solidFill>
-              <a:effectLst/>
-              <a:uFillTx/>
-              <a:latin typeface="Times New Roman"/>
-            </a:endParaRPr>
-          </a:p>
-        </p:txBody>
-      </p:sp>
-      <p:sp>
-        <p:nvSpPr>
-          <p:cNvPr id="79" name=""/>
-          <p:cNvSpPr/>
-          <p:nvPr/>
-        </p:nvSpPr>
-        <p:spPr>
-          <a:xfrm>
-            <a:off x="4303440" y="610560"/>
-            <a:ext cx="62640" cy="62640"/>
-          </a:xfrm>
-          <a:custGeom>
-            <a:avLst/>
-            <a:gdLst/>
-            <a:ahLst/>
-            <a:rect l="0" t="0" r="r" b="b"/>
-            <a:pathLst>
-              <a:path w="174" h="174">
-                <a:moveTo>
-                  <a:pt x="0" y="86"/>
-                </a:moveTo>
-                <a:cubicBezTo>
-                  <a:pt x="0" y="-29"/>
-                  <a:pt x="174" y="-29"/>
-                  <a:pt x="174" y="86"/>
-                </a:cubicBezTo>
-                <a:cubicBezTo>
-                  <a:pt x="174" y="203"/>
-                  <a:pt x="0" y="203"/>
-                  <a:pt x="0" y="86"/>
-                </a:cubicBezTo>
-                <a:close/>
-              </a:path>
-            </a:pathLst>
-          </a:custGeom>
-          <a:solidFill>
-            <a:srgbClr val="0072B2"/>
-          </a:solidFill>
-          <a:ln w="0">
-            <a:noFill/>
-          </a:ln>
-        </p:spPr>
-        <p:txBody>
-          <a:bodyPr lIns="0" tIns="0" rIns="0" bIns="0" anchor="t">
-            <a:noAutofit/>
-          </a:bodyPr>
-          <a:p>
-            <a:endParaRPr lang="en-US" sz="2400" b="0" u="none" strike="noStrike">
-              <a:solidFill>
-                <a:srgbClr val="FFFFFF"/>
-              </a:solidFill>
-              <a:effectLst/>
-              <a:uFillTx/>
-              <a:latin typeface="Times New Roman"/>
-            </a:endParaRPr>
-          </a:p>
-        </p:txBody>
-      </p:sp>
-      <p:sp>
-        <p:nvSpPr>
-          <p:cNvPr id="80" name=""/>
-          <p:cNvSpPr/>
-          <p:nvPr/>
-        </p:nvSpPr>
-        <p:spPr>
-          <a:xfrm>
-            <a:off x="4303440" y="610560"/>
-            <a:ext cx="62640" cy="62640"/>
-          </a:xfrm>
-          <a:custGeom>
-            <a:avLst/>
-            <a:gdLst/>
-            <a:ahLst/>
-            <a:rect l="0" t="0" r="r" b="b"/>
-            <a:pathLst>
-              <a:path fill="none" w="174" h="174">
-                <a:moveTo>
-                  <a:pt x="174" y="86"/>
-                </a:moveTo>
-                <a:cubicBezTo>
-                  <a:pt x="174" y="203"/>
-                  <a:pt x="0" y="203"/>
-                  <a:pt x="0" y="86"/>
-                </a:cubicBezTo>
-                <a:cubicBezTo>
-                  <a:pt x="0" y="-29"/>
-                  <a:pt x="174" y="-29"/>
-                  <a:pt x="174" y="86"/>
-                </a:cubicBezTo>
-              </a:path>
-            </a:pathLst>
-          </a:custGeom>
-          <a:ln cap="rnd" w="7920">
-            <a:solidFill>
-              <a:srgbClr val="0072B2"/>
-            </a:solidFill>
-            <a:round/>
-          </a:ln>
-        </p:spPr>
-        <p:txBody>
-          <a:bodyPr lIns="3960" tIns="3960" rIns="3960" bIns="3960" anchor="t">
-            <a:noAutofit/>
-          </a:bodyPr>
-          <a:p>
-            <a:endParaRPr lang="en-US" sz="2400" b="0" u="none" strike="noStrike">
-              <a:solidFill>
-                <a:srgbClr val="000000"/>
-              </a:solidFill>
-              <a:effectLst/>
-              <a:uFillTx/>
-              <a:latin typeface="Times New Roman"/>
-            </a:endParaRPr>
-          </a:p>
-        </p:txBody>
-      </p:sp>
-      <p:sp>
-        <p:nvSpPr>
-          <p:cNvPr id="81" name=""/>
-          <p:cNvSpPr/>
-          <p:nvPr/>
-        </p:nvSpPr>
-        <p:spPr>
-          <a:xfrm>
-            <a:off x="4602240" y="650520"/>
-            <a:ext cx="62640" cy="63000"/>
-          </a:xfrm>
-          <a:custGeom>
-            <a:avLst/>
-            <a:gdLst/>
-            <a:ahLst/>
-            <a:rect l="0" t="0" r="r" b="b"/>
-            <a:pathLst>
-              <a:path w="174" h="175">
-                <a:moveTo>
-                  <a:pt x="0" y="87"/>
-                </a:moveTo>
-                <a:cubicBezTo>
-                  <a:pt x="0" y="-29"/>
-                  <a:pt x="174" y="-29"/>
-                  <a:pt x="174" y="87"/>
-                </a:cubicBezTo>
-                <a:cubicBezTo>
-                  <a:pt x="174" y="204"/>
-                  <a:pt x="0" y="204"/>
-                  <a:pt x="0" y="87"/>
-                </a:cubicBezTo>
-                <a:close/>
-              </a:path>
-            </a:pathLst>
-          </a:custGeom>
-          <a:solidFill>
-            <a:srgbClr val="0072B2"/>
-          </a:solidFill>
-          <a:ln w="0">
-            <a:noFill/>
-          </a:ln>
-        </p:spPr>
-        <p:txBody>
-          <a:bodyPr lIns="0" tIns="0" rIns="0" bIns="0" anchor="t">
-            <a:noAutofit/>
-          </a:bodyPr>
-          <a:p>
-            <a:endParaRPr lang="en-US" sz="2400" b="0" u="none" strike="noStrike">
-              <a:solidFill>
-                <a:srgbClr val="FFFFFF"/>
-              </a:solidFill>
-              <a:effectLst/>
-              <a:uFillTx/>
-              <a:latin typeface="Times New Roman"/>
-            </a:endParaRPr>
-          </a:p>
-        </p:txBody>
-      </p:sp>
-      <p:sp>
-        <p:nvSpPr>
-          <p:cNvPr id="82" name=""/>
-          <p:cNvSpPr/>
-          <p:nvPr/>
-        </p:nvSpPr>
-        <p:spPr>
-          <a:xfrm>
-            <a:off x="4602240" y="650520"/>
-            <a:ext cx="62640" cy="63000"/>
-          </a:xfrm>
-          <a:custGeom>
-            <a:avLst/>
-            <a:gdLst/>
-            <a:ahLst/>
-            <a:rect l="0" t="0" r="r" b="b"/>
-            <a:pathLst>
-              <a:path fill="none" w="174" h="175">
-                <a:moveTo>
-                  <a:pt x="174" y="87"/>
-                </a:moveTo>
-                <a:cubicBezTo>
-                  <a:pt x="174" y="204"/>
-                  <a:pt x="0" y="204"/>
-                  <a:pt x="0" y="87"/>
-                </a:cubicBezTo>
-                <a:cubicBezTo>
-                  <a:pt x="0" y="-29"/>
-                  <a:pt x="174" y="-29"/>
-                  <a:pt x="174" y="87"/>
-                </a:cubicBezTo>
-              </a:path>
-            </a:pathLst>
-          </a:custGeom>
-          <a:ln cap="rnd" w="7920">
-            <a:solidFill>
-              <a:srgbClr val="0072B2"/>
-            </a:solidFill>
-            <a:round/>
-          </a:ln>
-        </p:spPr>
-        <p:txBody>
-          <a:bodyPr lIns="3960" tIns="3960" rIns="3960" bIns="3960" anchor="t">
-            <a:noAutofit/>
-          </a:bodyPr>
-          <a:p>
-            <a:endParaRPr lang="en-US" sz="2400" b="0" u="none" strike="noStrike">
-              <a:solidFill>
-                <a:srgbClr val="000000"/>
-              </a:solidFill>
-              <a:effectLst/>
-              <a:uFillTx/>
-              <a:latin typeface="Times New Roman"/>
-            </a:endParaRPr>
-          </a:p>
-        </p:txBody>
-      </p:sp>
-      <p:sp>
-        <p:nvSpPr>
-          <p:cNvPr id="83" name=""/>
-          <p:cNvSpPr/>
-          <p:nvPr/>
-        </p:nvSpPr>
-        <p:spPr>
-          <a:xfrm>
-            <a:off x="3108960" y="1370880"/>
-            <a:ext cx="62640" cy="62640"/>
-          </a:xfrm>
-          <a:custGeom>
-            <a:avLst/>
-            <a:gdLst/>
-            <a:ahLst/>
-            <a:rect l="0" t="0" r="r" b="b"/>
-            <a:pathLst>
-              <a:path w="174" h="174">
-                <a:moveTo>
-                  <a:pt x="0" y="88"/>
-                </a:moveTo>
-                <a:cubicBezTo>
-                  <a:pt x="0" y="-29"/>
-                  <a:pt x="174" y="-29"/>
-                  <a:pt x="174" y="88"/>
-                </a:cubicBezTo>
-                <a:cubicBezTo>
-                  <a:pt x="174" y="203"/>
-                  <a:pt x="0" y="203"/>
-                  <a:pt x="0" y="88"/>
-                </a:cubicBezTo>
-                <a:close/>
-              </a:path>
-            </a:pathLst>
-          </a:custGeom>
-          <a:solidFill>
-            <a:srgbClr val="E69F00"/>
-          </a:solidFill>
-          <a:ln w="0">
-            <a:noFill/>
-          </a:ln>
-        </p:spPr>
-        <p:txBody>
-          <a:bodyPr lIns="0" tIns="0" rIns="0" bIns="0" anchor="t">
-            <a:noAutofit/>
-          </a:bodyPr>
-          <a:p>
-            <a:endParaRPr lang="en-US" sz="2400" b="0" u="none" strike="noStrike">
-              <a:solidFill>
-                <a:srgbClr val="000000"/>
-              </a:solidFill>
-              <a:effectLst/>
-              <a:uFillTx/>
-              <a:latin typeface="Times New Roman"/>
-            </a:endParaRPr>
-          </a:p>
-        </p:txBody>
-      </p:sp>
-      <p:sp>
-        <p:nvSpPr>
-          <p:cNvPr id="84" name=""/>
-          <p:cNvSpPr/>
-          <p:nvPr/>
-        </p:nvSpPr>
-        <p:spPr>
-          <a:xfrm>
-            <a:off x="3108960" y="1370880"/>
-            <a:ext cx="62640" cy="62640"/>
-          </a:xfrm>
-          <a:custGeom>
-            <a:avLst/>
-            <a:gdLst/>
-            <a:ahLst/>
-            <a:rect l="0" t="0" r="r" b="b"/>
-            <a:pathLst>
-              <a:path fill="none" w="174" h="174">
-                <a:moveTo>
-                  <a:pt x="174" y="88"/>
-                </a:moveTo>
-                <a:cubicBezTo>
-                  <a:pt x="174" y="203"/>
-                  <a:pt x="0" y="203"/>
-                  <a:pt x="0" y="88"/>
-                </a:cubicBezTo>
-                <a:cubicBezTo>
-                  <a:pt x="0" y="-29"/>
-                  <a:pt x="174" y="-29"/>
-                  <a:pt x="174" y="88"/>
-                </a:cubicBezTo>
-              </a:path>
-            </a:pathLst>
-          </a:custGeom>
-          <a:ln cap="rnd" w="7920">
-            <a:solidFill>
-              <a:srgbClr val="E69F00"/>
-            </a:solidFill>
-            <a:round/>
-          </a:ln>
-        </p:spPr>
-        <p:txBody>
-          <a:bodyPr lIns="3960" tIns="3960" rIns="3960" bIns="3960" anchor="t">
-            <a:noAutofit/>
-          </a:bodyPr>
-          <a:p>
-            <a:endParaRPr lang="en-US" sz="2400" b="0" u="none" strike="noStrike">
-              <a:solidFill>
-                <a:srgbClr val="000000"/>
-              </a:solidFill>
-              <a:effectLst/>
-              <a:uFillTx/>
-              <a:latin typeface="Times New Roman"/>
-            </a:endParaRPr>
-          </a:p>
-        </p:txBody>
-      </p:sp>
-      <p:sp>
-        <p:nvSpPr>
-          <p:cNvPr id="85" name=""/>
-          <p:cNvSpPr/>
-          <p:nvPr/>
-        </p:nvSpPr>
-        <p:spPr>
-          <a:xfrm>
-            <a:off x="3407400" y="1375200"/>
-            <a:ext cx="62640" cy="62640"/>
-          </a:xfrm>
-          <a:custGeom>
-            <a:avLst/>
-            <a:gdLst/>
-            <a:ahLst/>
-            <a:rect l="0" t="0" r="r" b="b"/>
-            <a:pathLst>
-              <a:path w="174" h="174">
-                <a:moveTo>
-                  <a:pt x="0" y="88"/>
-                </a:moveTo>
-                <a:cubicBezTo>
-                  <a:pt x="0" y="-29"/>
-                  <a:pt x="174" y="-29"/>
-                  <a:pt x="174" y="88"/>
-                </a:cubicBezTo>
-                <a:cubicBezTo>
-                  <a:pt x="174" y="203"/>
-                  <a:pt x="0" y="203"/>
-                  <a:pt x="0" y="88"/>
-                </a:cubicBezTo>
-                <a:close/>
-              </a:path>
-            </a:pathLst>
-          </a:custGeom>
-          <a:solidFill>
-            <a:srgbClr val="E69F00"/>
-          </a:solidFill>
-          <a:ln w="0">
-            <a:noFill/>
-          </a:ln>
-        </p:spPr>
-        <p:txBody>
-          <a:bodyPr lIns="0" tIns="0" rIns="0" bIns="0" anchor="t">
-            <a:noAutofit/>
-          </a:bodyPr>
-          <a:p>
-            <a:endParaRPr lang="en-US" sz="2400" b="0" u="none" strike="noStrike">
-              <a:solidFill>
-                <a:srgbClr val="000000"/>
-              </a:solidFill>
-              <a:effectLst/>
-              <a:uFillTx/>
-              <a:latin typeface="Times New Roman"/>
-            </a:endParaRPr>
-          </a:p>
-        </p:txBody>
-      </p:sp>
-      <p:sp>
-        <p:nvSpPr>
-          <p:cNvPr id="86" name=""/>
-          <p:cNvSpPr/>
-          <p:nvPr/>
-        </p:nvSpPr>
-        <p:spPr>
-          <a:xfrm>
-            <a:off x="3407400" y="1375200"/>
-            <a:ext cx="62640" cy="62640"/>
-          </a:xfrm>
-          <a:custGeom>
-            <a:avLst/>
-            <a:gdLst/>
-            <a:ahLst/>
-            <a:rect l="0" t="0" r="r" b="b"/>
-            <a:pathLst>
-              <a:path fill="none" w="174" h="174">
-                <a:moveTo>
-                  <a:pt x="174" y="88"/>
-                </a:moveTo>
-                <a:cubicBezTo>
-                  <a:pt x="174" y="203"/>
-                  <a:pt x="0" y="203"/>
-                  <a:pt x="0" y="88"/>
-                </a:cubicBezTo>
-                <a:cubicBezTo>
-                  <a:pt x="0" y="-29"/>
-                  <a:pt x="174" y="-29"/>
-                  <a:pt x="174" y="88"/>
-                </a:cubicBezTo>
-              </a:path>
-            </a:pathLst>
-          </a:custGeom>
-          <a:ln cap="rnd" w="7920">
-            <a:solidFill>
-              <a:srgbClr val="E69F00"/>
-            </a:solidFill>
-            <a:round/>
-          </a:ln>
-        </p:spPr>
-        <p:txBody>
-          <a:bodyPr lIns="3960" tIns="3960" rIns="3960" bIns="3960" anchor="t">
-            <a:noAutofit/>
-          </a:bodyPr>
-          <a:p>
-            <a:endParaRPr lang="en-US" sz="2400" b="0" u="none" strike="noStrike">
-              <a:solidFill>
-                <a:srgbClr val="000000"/>
-              </a:solidFill>
-              <a:effectLst/>
-              <a:uFillTx/>
-              <a:latin typeface="Times New Roman"/>
-            </a:endParaRPr>
-          </a:p>
-        </p:txBody>
-      </p:sp>
-      <p:sp>
-        <p:nvSpPr>
-          <p:cNvPr id="87" name=""/>
-          <p:cNvSpPr/>
-          <p:nvPr/>
-        </p:nvSpPr>
-        <p:spPr>
-          <a:xfrm>
-            <a:off x="3706200" y="1391040"/>
-            <a:ext cx="62640" cy="63000"/>
-          </a:xfrm>
-          <a:custGeom>
-            <a:avLst/>
-            <a:gdLst/>
-            <a:ahLst/>
-            <a:rect l="0" t="0" r="r" b="b"/>
-            <a:pathLst>
-              <a:path w="174" h="175">
-                <a:moveTo>
-                  <a:pt x="0" y="87"/>
-                </a:moveTo>
-                <a:cubicBezTo>
-                  <a:pt x="0" y="-29"/>
-                  <a:pt x="174" y="-29"/>
-                  <a:pt x="174" y="87"/>
-                </a:cubicBezTo>
-                <a:cubicBezTo>
-                  <a:pt x="174" y="204"/>
-                  <a:pt x="0" y="204"/>
-                  <a:pt x="0" y="87"/>
-                </a:cubicBezTo>
-                <a:close/>
-              </a:path>
-            </a:pathLst>
-          </a:custGeom>
-          <a:solidFill>
-            <a:srgbClr val="E69F00"/>
-          </a:solidFill>
-          <a:ln w="0">
-            <a:noFill/>
-          </a:ln>
-        </p:spPr>
-        <p:txBody>
-          <a:bodyPr lIns="0" tIns="0" rIns="0" bIns="0" anchor="t">
-            <a:noAutofit/>
-          </a:bodyPr>
-          <a:p>
-            <a:endParaRPr lang="en-US" sz="2400" b="0" u="none" strike="noStrike">
-              <a:solidFill>
-                <a:srgbClr val="000000"/>
-              </a:solidFill>
-              <a:effectLst/>
-              <a:uFillTx/>
-              <a:latin typeface="Times New Roman"/>
-            </a:endParaRPr>
-          </a:p>
-        </p:txBody>
-      </p:sp>
-      <p:sp>
-        <p:nvSpPr>
-          <p:cNvPr id="88" name=""/>
-          <p:cNvSpPr/>
-          <p:nvPr/>
-        </p:nvSpPr>
-        <p:spPr>
-          <a:xfrm>
-            <a:off x="3706200" y="1391040"/>
-            <a:ext cx="62640" cy="63000"/>
-          </a:xfrm>
-          <a:custGeom>
-            <a:avLst/>
-            <a:gdLst/>
-            <a:ahLst/>
-            <a:rect l="0" t="0" r="r" b="b"/>
-            <a:pathLst>
-              <a:path fill="none" w="174" h="175">
-                <a:moveTo>
-                  <a:pt x="174" y="87"/>
-                </a:moveTo>
-                <a:cubicBezTo>
-                  <a:pt x="174" y="204"/>
-                  <a:pt x="0" y="204"/>
-                  <a:pt x="0" y="87"/>
-                </a:cubicBezTo>
-                <a:cubicBezTo>
-                  <a:pt x="0" y="-29"/>
-                  <a:pt x="174" y="-29"/>
-                  <a:pt x="174" y="87"/>
-                </a:cubicBezTo>
-              </a:path>
-            </a:pathLst>
-          </a:custGeom>
-          <a:ln cap="rnd" w="7920">
-            <a:solidFill>
-              <a:srgbClr val="E69F00"/>
-            </a:solidFill>
-            <a:round/>
-          </a:ln>
-        </p:spPr>
-        <p:txBody>
-          <a:bodyPr lIns="3960" tIns="3960" rIns="3960" bIns="3960" anchor="t">
-            <a:noAutofit/>
-          </a:bodyPr>
-          <a:p>
-            <a:endParaRPr lang="en-US" sz="2400" b="0" u="none" strike="noStrike">
-              <a:solidFill>
-                <a:srgbClr val="000000"/>
-              </a:solidFill>
-              <a:effectLst/>
-              <a:uFillTx/>
-              <a:latin typeface="Times New Roman"/>
-            </a:endParaRPr>
-          </a:p>
-        </p:txBody>
-      </p:sp>
-      <p:sp>
-        <p:nvSpPr>
-          <p:cNvPr id="89" name=""/>
-          <p:cNvSpPr/>
-          <p:nvPr/>
-        </p:nvSpPr>
-        <p:spPr>
-          <a:xfrm>
-            <a:off x="4004640" y="1375920"/>
-            <a:ext cx="63000" cy="62640"/>
-          </a:xfrm>
-          <a:custGeom>
-            <a:avLst/>
-            <a:gdLst/>
-            <a:ahLst/>
-            <a:rect l="0" t="0" r="r" b="b"/>
-            <a:pathLst>
-              <a:path w="175" h="174">
-                <a:moveTo>
-                  <a:pt x="0" y="88"/>
-                </a:moveTo>
-                <a:cubicBezTo>
-                  <a:pt x="0" y="-29"/>
-                  <a:pt x="175" y="-29"/>
-                  <a:pt x="175" y="88"/>
-                </a:cubicBezTo>
-                <a:cubicBezTo>
-                  <a:pt x="175" y="203"/>
-                  <a:pt x="0" y="203"/>
-                  <a:pt x="0" y="88"/>
-                </a:cubicBezTo>
-                <a:close/>
-              </a:path>
-            </a:pathLst>
-          </a:custGeom>
-          <a:solidFill>
-            <a:srgbClr val="E69F00"/>
-          </a:solidFill>
-          <a:ln w="0">
-            <a:noFill/>
-          </a:ln>
-        </p:spPr>
-        <p:txBody>
-          <a:bodyPr lIns="0" tIns="0" rIns="0" bIns="0" anchor="t">
-            <a:noAutofit/>
-          </a:bodyPr>
-          <a:p>
-            <a:endParaRPr lang="en-US" sz="2400" b="0" u="none" strike="noStrike">
-              <a:solidFill>
-                <a:srgbClr val="000000"/>
-              </a:solidFill>
-              <a:effectLst/>
-              <a:uFillTx/>
-              <a:latin typeface="Times New Roman"/>
-            </a:endParaRPr>
-          </a:p>
-        </p:txBody>
-      </p:sp>
-      <p:sp>
-        <p:nvSpPr>
-          <p:cNvPr id="90" name=""/>
-          <p:cNvSpPr/>
-          <p:nvPr/>
-        </p:nvSpPr>
-        <p:spPr>
-          <a:xfrm>
-            <a:off x="4004640" y="1375920"/>
-            <a:ext cx="63000" cy="62640"/>
-          </a:xfrm>
-          <a:custGeom>
-            <a:avLst/>
-            <a:gdLst/>
-            <a:ahLst/>
-            <a:rect l="0" t="0" r="r" b="b"/>
-            <a:pathLst>
-              <a:path fill="none" w="175" h="174">
-                <a:moveTo>
-                  <a:pt x="175" y="88"/>
-                </a:moveTo>
-                <a:cubicBezTo>
-                  <a:pt x="175" y="203"/>
-                  <a:pt x="0" y="203"/>
-                  <a:pt x="0" y="88"/>
-                </a:cubicBezTo>
-                <a:cubicBezTo>
-                  <a:pt x="0" y="-29"/>
-                  <a:pt x="175" y="-29"/>
-                  <a:pt x="175" y="88"/>
-                </a:cubicBezTo>
-              </a:path>
-            </a:pathLst>
-          </a:custGeom>
-          <a:ln cap="rnd" w="7920">
-            <a:solidFill>
-              <a:srgbClr val="E69F00"/>
-            </a:solidFill>
-            <a:round/>
-          </a:ln>
-        </p:spPr>
-        <p:txBody>
-          <a:bodyPr lIns="3960" tIns="3960" rIns="3960" bIns="3960" anchor="t">
-            <a:noAutofit/>
-          </a:bodyPr>
-          <a:p>
-            <a:endParaRPr lang="en-US" sz="2400" b="0" u="none" strike="noStrike">
-              <a:solidFill>
-                <a:srgbClr val="000000"/>
-              </a:solidFill>
-              <a:effectLst/>
-              <a:uFillTx/>
-              <a:latin typeface="Times New Roman"/>
-            </a:endParaRPr>
-          </a:p>
-        </p:txBody>
-      </p:sp>
-      <p:sp>
-        <p:nvSpPr>
-          <p:cNvPr id="91" name=""/>
-          <p:cNvSpPr/>
-          <p:nvPr/>
-        </p:nvSpPr>
-        <p:spPr>
-          <a:xfrm>
-            <a:off x="4303440" y="1375920"/>
-            <a:ext cx="62640" cy="62640"/>
-          </a:xfrm>
-          <a:custGeom>
-            <a:avLst/>
-            <a:gdLst/>
-            <a:ahLst/>
-            <a:rect l="0" t="0" r="r" b="b"/>
-            <a:pathLst>
-              <a:path w="174" h="174">
-                <a:moveTo>
-                  <a:pt x="0" y="88"/>
-                </a:moveTo>
-                <a:cubicBezTo>
-                  <a:pt x="0" y="-29"/>
-                  <a:pt x="174" y="-29"/>
-                  <a:pt x="174" y="88"/>
-                </a:cubicBezTo>
-                <a:cubicBezTo>
-                  <a:pt x="174" y="203"/>
-                  <a:pt x="0" y="203"/>
-                  <a:pt x="0" y="88"/>
-                </a:cubicBezTo>
-                <a:close/>
-              </a:path>
-            </a:pathLst>
-          </a:custGeom>
-          <a:solidFill>
-            <a:srgbClr val="E69F00"/>
-          </a:solidFill>
-          <a:ln w="0">
-            <a:noFill/>
-          </a:ln>
-        </p:spPr>
-        <p:txBody>
-          <a:bodyPr lIns="0" tIns="0" rIns="0" bIns="0" anchor="t">
-            <a:noAutofit/>
-          </a:bodyPr>
-          <a:p>
-            <a:endParaRPr lang="en-US" sz="2400" b="0" u="none" strike="noStrike">
-              <a:solidFill>
-                <a:srgbClr val="000000"/>
-              </a:solidFill>
-              <a:effectLst/>
-              <a:uFillTx/>
-              <a:latin typeface="Times New Roman"/>
-            </a:endParaRPr>
-          </a:p>
-        </p:txBody>
-      </p:sp>
-      <p:sp>
-        <p:nvSpPr>
-          <p:cNvPr id="92" name=""/>
-          <p:cNvSpPr/>
-          <p:nvPr/>
-        </p:nvSpPr>
-        <p:spPr>
-          <a:xfrm>
-            <a:off x="4303440" y="1375920"/>
-            <a:ext cx="62640" cy="62640"/>
-          </a:xfrm>
-          <a:custGeom>
-            <a:avLst/>
-            <a:gdLst/>
-            <a:ahLst/>
-            <a:rect l="0" t="0" r="r" b="b"/>
-            <a:pathLst>
-              <a:path fill="none" w="174" h="174">
-                <a:moveTo>
-                  <a:pt x="174" y="88"/>
-                </a:moveTo>
-                <a:cubicBezTo>
-                  <a:pt x="174" y="203"/>
-                  <a:pt x="0" y="203"/>
-                  <a:pt x="0" y="88"/>
-                </a:cubicBezTo>
-                <a:cubicBezTo>
-                  <a:pt x="0" y="-29"/>
-                  <a:pt x="174" y="-29"/>
-                  <a:pt x="174" y="88"/>
-                </a:cubicBezTo>
-              </a:path>
-            </a:pathLst>
-          </a:custGeom>
-          <a:ln cap="rnd" w="7920">
-            <a:solidFill>
-              <a:srgbClr val="E69F00"/>
-            </a:solidFill>
-            <a:round/>
-          </a:ln>
-        </p:spPr>
-        <p:txBody>
-          <a:bodyPr lIns="3960" tIns="3960" rIns="3960" bIns="3960" anchor="t">
-            <a:noAutofit/>
-          </a:bodyPr>
-          <a:p>
-            <a:endParaRPr lang="en-US" sz="2400" b="0" u="none" strike="noStrike">
-              <a:solidFill>
-                <a:srgbClr val="000000"/>
-              </a:solidFill>
-              <a:effectLst/>
-              <a:uFillTx/>
-              <a:latin typeface="Times New Roman"/>
-            </a:endParaRPr>
-          </a:p>
-        </p:txBody>
-      </p:sp>
-      <p:sp>
-        <p:nvSpPr>
-          <p:cNvPr id="93" name=""/>
-          <p:cNvSpPr/>
-          <p:nvPr/>
-        </p:nvSpPr>
-        <p:spPr>
-          <a:xfrm>
-            <a:off x="4602240" y="1377720"/>
-            <a:ext cx="62640" cy="63000"/>
-          </a:xfrm>
-          <a:custGeom>
-            <a:avLst/>
-            <a:gdLst/>
-            <a:ahLst/>
-            <a:rect l="0" t="0" r="r" b="b"/>
-            <a:pathLst>
-              <a:path w="174" h="175">
-                <a:moveTo>
-                  <a:pt x="0" y="88"/>
-                </a:moveTo>
-                <a:cubicBezTo>
-                  <a:pt x="0" y="-29"/>
-                  <a:pt x="174" y="-29"/>
-                  <a:pt x="174" y="88"/>
-                </a:cubicBezTo>
-                <a:cubicBezTo>
-                  <a:pt x="174" y="204"/>
-                  <a:pt x="0" y="204"/>
-                  <a:pt x="0" y="88"/>
-                </a:cubicBezTo>
-                <a:close/>
-              </a:path>
-            </a:pathLst>
-          </a:custGeom>
-          <a:solidFill>
-            <a:srgbClr val="E69F00"/>
-          </a:solidFill>
-          <a:ln w="0">
-            <a:noFill/>
-          </a:ln>
-        </p:spPr>
-        <p:txBody>
-          <a:bodyPr lIns="0" tIns="0" rIns="0" bIns="0" anchor="t">
-            <a:noAutofit/>
-          </a:bodyPr>
-          <a:p>
-            <a:endParaRPr lang="en-US" sz="2400" b="0" u="none" strike="noStrike">
-              <a:solidFill>
-                <a:srgbClr val="000000"/>
-              </a:solidFill>
-              <a:effectLst/>
-              <a:uFillTx/>
-              <a:latin typeface="Times New Roman"/>
-            </a:endParaRPr>
-          </a:p>
-        </p:txBody>
-      </p:sp>
-      <p:sp>
-        <p:nvSpPr>
-          <p:cNvPr id="94" name=""/>
-          <p:cNvSpPr/>
-          <p:nvPr/>
-        </p:nvSpPr>
-        <p:spPr>
-          <a:xfrm>
-            <a:off x="4602240" y="1377720"/>
-            <a:ext cx="62640" cy="63000"/>
-          </a:xfrm>
-          <a:custGeom>
-            <a:avLst/>
-            <a:gdLst/>
-            <a:ahLst/>
-            <a:rect l="0" t="0" r="r" b="b"/>
-            <a:pathLst>
-              <a:path fill="none" w="174" h="175">
-                <a:moveTo>
-                  <a:pt x="174" y="88"/>
-                </a:moveTo>
-                <a:cubicBezTo>
-                  <a:pt x="174" y="204"/>
-                  <a:pt x="0" y="204"/>
-                  <a:pt x="0" y="88"/>
-                </a:cubicBezTo>
-                <a:cubicBezTo>
-                  <a:pt x="0" y="-29"/>
-                  <a:pt x="174" y="-29"/>
-                  <a:pt x="174" y="88"/>
-                </a:cubicBezTo>
-              </a:path>
-            </a:pathLst>
-          </a:custGeom>
-          <a:ln cap="rnd" w="7920">
-            <a:solidFill>
-              <a:srgbClr val="E69F00"/>
-            </a:solidFill>
-            <a:round/>
-          </a:ln>
-        </p:spPr>
-        <p:txBody>
-          <a:bodyPr lIns="3960" tIns="3960" rIns="3960" bIns="3960" anchor="t">
-            <a:noAutofit/>
-          </a:bodyPr>
-          <a:p>
-            <a:endParaRPr lang="en-US" sz="2400" b="0" u="none" strike="noStrike">
-              <a:solidFill>
-                <a:srgbClr val="000000"/>
-              </a:solidFill>
-              <a:effectLst/>
-              <a:uFillTx/>
-              <a:latin typeface="Times New Roman"/>
-            </a:endParaRPr>
-          </a:p>
-        </p:txBody>
-      </p:sp>
-      <p:sp>
-        <p:nvSpPr>
-          <p:cNvPr id="95" name=""/>
-          <p:cNvSpPr/>
-          <p:nvPr/>
-        </p:nvSpPr>
-        <p:spPr>
-          <a:xfrm flipV="1">
-            <a:off x="2960640" y="538560"/>
-            <a:ext cx="0" cy="2266560"/>
-          </a:xfrm>
-          <a:prstGeom prst="line">
-            <a:avLst/>
-          </a:prstGeom>
-          <a:ln cap="sq" w="9360">
-            <a:solidFill>
-              <a:srgbClr val="333333"/>
-            </a:solidFill>
-            <a:round/>
-          </a:ln>
-        </p:spPr>
-        <p:style>
-          <a:lnRef idx="0"/>
-          <a:fillRef idx="0"/>
-          <a:effectRef idx="0"/>
-          <a:fontRef idx="minor"/>
-        </p:style>
-        <p:txBody>
-          <a:bodyPr lIns="4680" tIns="4680" rIns="4680" bIns="4680" anchor="t">
-            <a:noAutofit/>
-          </a:bodyPr>
-          <a:p>
-            <a:endParaRPr lang="en-US" sz="2400" b="0" u="none" strike="noStrike">
-              <a:solidFill>
-                <a:srgbClr val="000000"/>
-              </a:solidFill>
-              <a:effectLst/>
-              <a:uFillTx/>
-              <a:latin typeface="Times New Roman"/>
-            </a:endParaRPr>
-          </a:p>
-        </p:txBody>
-      </p:sp>
-      <p:sp>
-        <p:nvSpPr>
-          <p:cNvPr id="96" name=""/>
-          <p:cNvSpPr txBox="1"/>
-          <p:nvPr/>
-        </p:nvSpPr>
-        <p:spPr>
-          <a:xfrm>
-            <a:off x="137520" y="118440"/>
-            <a:ext cx="164880" cy="164880"/>
-          </a:xfrm>
-          <a:prstGeom prst="rect">
-            <a:avLst/>
-          </a:prstGeom>
-          <a:noFill/>
-          <a:ln w="0">
-            <a:noFill/>
-          </a:ln>
-        </p:spPr>
-        <p:txBody>
-          <a:bodyPr wrap="none" lIns="0" tIns="0" rIns="0" bIns="0" anchor="t">
-            <a:spAutoFit/>
-          </a:bodyPr>
-          <a:p>
-            <a:pPr/>
-            <a:r>
-              <a:rPr lang="en-US" sz="1300" b="1" u="none" strike="noStrike">
-                <a:solidFill>
-                  <a:srgbClr val="000000"/>
-                </a:solidFill>
-                <a:effectLst/>
-                <a:uFillTx/>
-                <a:latin typeface="Arial"/>
-                <a:ea typeface="Arial"/>
-              </a:rPr>
-              <a:t>a</a:t>
-            </a:r>
-            <a:endParaRPr lang="en-US" sz="1300" b="0" u="none" strike="noStrike">
-              <a:solidFill>
-                <a:srgbClr val="000000"/>
-              </a:solidFill>
-              <a:effectLst/>
-              <a:uFillTx/>
-              <a:latin typeface="Times New Roman"/>
-            </a:endParaRPr>
-          </a:p>
-        </p:txBody>
-      </p:sp>
-      <p:sp>
-        <p:nvSpPr>
-          <p:cNvPr id="97" name=""/>
-          <p:cNvSpPr txBox="1"/>
-          <p:nvPr/>
-        </p:nvSpPr>
-        <p:spPr>
-          <a:xfrm>
-            <a:off x="2777040" y="2298240"/>
-            <a:ext cx="142560" cy="102600"/>
-          </a:xfrm>
-          <a:prstGeom prst="rect">
-            <a:avLst/>
-          </a:prstGeom>
-          <a:noFill/>
-          <a:ln w="0">
-            <a:noFill/>
-          </a:ln>
-        </p:spPr>
-        <p:txBody>
-          <a:bodyPr wrap="none" lIns="0" tIns="0" rIns="0" bIns="0" anchor="t">
-            <a:spAutoFit/>
-          </a:bodyPr>
-          <a:p>
-            <a:pPr/>
-            <a:r>
-              <a:rPr lang="en-US" sz="800" b="0" u="none" strike="noStrike">
-                <a:solidFill>
-                  <a:srgbClr val="262626"/>
-                </a:solidFill>
-                <a:effectLst/>
-                <a:uFillTx/>
-                <a:latin typeface="Arial"/>
-                <a:ea typeface="Arial"/>
-              </a:rPr>
-              <a:t>0.3</a:t>
-            </a:r>
-            <a:endParaRPr lang="en-US" sz="800" b="0" u="none" strike="noStrike">
-              <a:solidFill>
-                <a:srgbClr val="000000"/>
-              </a:solidFill>
-              <a:effectLst/>
-              <a:uFillTx/>
-              <a:latin typeface="Times New Roman"/>
-            </a:endParaRPr>
-          </a:p>
-        </p:txBody>
-      </p:sp>
-      <p:sp>
-        <p:nvSpPr>
-          <p:cNvPr id="98" name=""/>
-          <p:cNvSpPr txBox="1"/>
-          <p:nvPr/>
-        </p:nvSpPr>
-        <p:spPr>
-          <a:xfrm>
-            <a:off x="2777040" y="1694160"/>
-            <a:ext cx="142560" cy="102600"/>
-          </a:xfrm>
-          <a:prstGeom prst="rect">
-            <a:avLst/>
-          </a:prstGeom>
-          <a:noFill/>
-          <a:ln w="0">
-            <a:noFill/>
-          </a:ln>
-        </p:spPr>
-        <p:txBody>
-          <a:bodyPr wrap="none" lIns="0" tIns="0" rIns="0" bIns="0" anchor="t">
-            <a:spAutoFit/>
-          </a:bodyPr>
-          <a:p>
-            <a:pPr/>
-            <a:r>
-              <a:rPr lang="en-US" sz="800" b="0" u="none" strike="noStrike">
-                <a:solidFill>
-                  <a:srgbClr val="262626"/>
-                </a:solidFill>
-                <a:effectLst/>
-                <a:uFillTx/>
-                <a:latin typeface="Arial"/>
-                <a:ea typeface="Arial"/>
-              </a:rPr>
-              <a:t>0.5</a:t>
-            </a:r>
-            <a:endParaRPr lang="en-US" sz="800" b="0" u="none" strike="noStrike">
-              <a:solidFill>
-                <a:srgbClr val="000000"/>
-              </a:solidFill>
-              <a:effectLst/>
-              <a:uFillTx/>
-              <a:latin typeface="Times New Roman"/>
-            </a:endParaRPr>
-          </a:p>
-        </p:txBody>
-      </p:sp>
-      <p:sp>
-        <p:nvSpPr>
-          <p:cNvPr id="99" name=""/>
-          <p:cNvSpPr/>
-          <p:nvPr/>
-        </p:nvSpPr>
-        <p:spPr>
-          <a:xfrm>
-            <a:off x="2929320" y="2349000"/>
-            <a:ext cx="31320" cy="0"/>
-          </a:xfrm>
-          <a:prstGeom prst="line">
-            <a:avLst/>
-          </a:prstGeom>
-          <a:ln w="7920">
-            <a:solidFill>
-              <a:srgbClr val="333333"/>
-            </a:solidFill>
-            <a:round/>
-          </a:ln>
-        </p:spPr>
-        <p:style>
-          <a:lnRef idx="0"/>
-          <a:fillRef idx="0"/>
-          <a:effectRef idx="0"/>
-          <a:fontRef idx="minor"/>
-        </p:style>
-        <p:txBody>
-          <a:bodyPr lIns="3960" tIns="-3960" rIns="3960" bIns="-3960" anchor="t">
-            <a:noAutofit/>
-          </a:bodyPr>
-          <a:p>
-            <a:endParaRPr lang="en-US" sz="2400" b="0" u="none" strike="noStrike">
-              <a:solidFill>
-                <a:srgbClr val="000000"/>
-              </a:solidFill>
-              <a:effectLst/>
-              <a:uFillTx/>
-              <a:latin typeface="Times New Roman"/>
-            </a:endParaRPr>
-          </a:p>
-        </p:txBody>
-      </p:sp>
-      <p:sp>
-        <p:nvSpPr>
-          <p:cNvPr id="100" name=""/>
-          <p:cNvSpPr/>
-          <p:nvPr/>
-        </p:nvSpPr>
-        <p:spPr>
-          <a:xfrm>
-            <a:off x="2929320" y="1744560"/>
-            <a:ext cx="31320" cy="0"/>
-          </a:xfrm>
-          <a:prstGeom prst="line">
-            <a:avLst/>
-          </a:prstGeom>
-          <a:ln w="7920">
-            <a:solidFill>
-              <a:srgbClr val="333333"/>
-            </a:solidFill>
-            <a:round/>
-          </a:ln>
-        </p:spPr>
-        <p:style>
-          <a:lnRef idx="0"/>
-          <a:fillRef idx="0"/>
-          <a:effectRef idx="0"/>
-          <a:fontRef idx="minor"/>
-        </p:style>
-        <p:txBody>
-          <a:bodyPr lIns="3960" tIns="-3960" rIns="3960" bIns="-3960" anchor="t">
-            <a:noAutofit/>
-          </a:bodyPr>
-          <a:p>
-            <a:endParaRPr lang="en-US" sz="2400" b="0" u="none" strike="noStrike">
-              <a:solidFill>
-                <a:srgbClr val="000000"/>
-              </a:solidFill>
-              <a:effectLst/>
-              <a:uFillTx/>
-              <a:latin typeface="Times New Roman"/>
-            </a:endParaRPr>
-          </a:p>
-        </p:txBody>
-      </p:sp>
-      <p:sp>
-        <p:nvSpPr>
-          <p:cNvPr id="101" name=""/>
-          <p:cNvSpPr/>
-          <p:nvPr/>
-        </p:nvSpPr>
-        <p:spPr>
-          <a:xfrm>
-            <a:off x="2929320" y="1140480"/>
-            <a:ext cx="31320" cy="0"/>
-          </a:xfrm>
-          <a:prstGeom prst="line">
-            <a:avLst/>
-          </a:prstGeom>
-          <a:ln w="7920">
-            <a:solidFill>
-              <a:srgbClr val="333333"/>
-            </a:solidFill>
-            <a:round/>
-          </a:ln>
-        </p:spPr>
-        <p:style>
-          <a:lnRef idx="0"/>
-          <a:fillRef idx="0"/>
-          <a:effectRef idx="0"/>
-          <a:fontRef idx="minor"/>
-        </p:style>
-        <p:txBody>
-          <a:bodyPr lIns="3960" tIns="-3960" rIns="3960" bIns="-3960" anchor="t">
-            <a:noAutofit/>
-          </a:bodyPr>
-          <a:p>
-            <a:endParaRPr lang="en-US" sz="2400" b="0" u="none" strike="noStrike">
-              <a:solidFill>
-                <a:srgbClr val="000000"/>
-              </a:solidFill>
-              <a:effectLst/>
-              <a:uFillTx/>
-              <a:latin typeface="Times New Roman"/>
-            </a:endParaRPr>
-          </a:p>
-        </p:txBody>
-      </p:sp>
-      <p:sp>
-        <p:nvSpPr>
-          <p:cNvPr id="102" name=""/>
-          <p:cNvSpPr/>
-          <p:nvPr/>
-        </p:nvSpPr>
-        <p:spPr>
-          <a:xfrm>
-            <a:off x="2960640" y="2805120"/>
-            <a:ext cx="1851840" cy="0"/>
-          </a:xfrm>
-          <a:prstGeom prst="line">
-            <a:avLst/>
-          </a:prstGeom>
-          <a:ln cap="sq" w="9360">
-            <a:solidFill>
-              <a:srgbClr val="333333"/>
-            </a:solidFill>
-            <a:round/>
-          </a:ln>
-        </p:spPr>
-        <p:style>
-          <a:lnRef idx="0"/>
-          <a:fillRef idx="0"/>
-          <a:effectRef idx="0"/>
-          <a:fontRef idx="minor"/>
-        </p:style>
-        <p:txBody>
-          <a:bodyPr lIns="4680" tIns="-4680" rIns="4680" bIns="-4680" anchor="t">
-            <a:noAutofit/>
-          </a:bodyPr>
-          <a:p>
-            <a:endParaRPr lang="en-US" sz="2400" b="0" u="none" strike="noStrike">
-              <a:solidFill>
-                <a:srgbClr val="000000"/>
-              </a:solidFill>
-              <a:effectLst/>
-              <a:uFillTx/>
-              <a:latin typeface="Times New Roman"/>
-            </a:endParaRPr>
-          </a:p>
-        </p:txBody>
-      </p:sp>
-      <p:sp>
-        <p:nvSpPr>
-          <p:cNvPr id="103" name=""/>
-          <p:cNvSpPr/>
-          <p:nvPr/>
-        </p:nvSpPr>
-        <p:spPr>
-          <a:xfrm flipV="1">
-            <a:off x="3139920" y="2805120"/>
-            <a:ext cx="0" cy="31680"/>
-          </a:xfrm>
-          <a:prstGeom prst="line">
-            <a:avLst/>
-          </a:prstGeom>
-          <a:ln w="7920">
-            <a:solidFill>
-              <a:srgbClr val="333333"/>
-            </a:solidFill>
-            <a:round/>
-          </a:ln>
-        </p:spPr>
-        <p:style>
-          <a:lnRef idx="0"/>
-          <a:fillRef idx="0"/>
-          <a:effectRef idx="0"/>
-          <a:fontRef idx="minor"/>
-        </p:style>
-        <p:txBody>
-          <a:bodyPr lIns="3960" tIns="3960" rIns="3960" bIns="3960" anchor="t">
-            <a:noAutofit/>
-          </a:bodyPr>
-          <a:p>
-            <a:endParaRPr lang="en-US" sz="2400" b="0" u="none" strike="noStrike">
-              <a:solidFill>
-                <a:srgbClr val="000000"/>
-              </a:solidFill>
-              <a:effectLst/>
-              <a:uFillTx/>
-              <a:latin typeface="Times New Roman"/>
-            </a:endParaRPr>
-          </a:p>
-        </p:txBody>
-      </p:sp>
-      <p:sp>
-        <p:nvSpPr>
-          <p:cNvPr id="104" name=""/>
-          <p:cNvSpPr/>
-          <p:nvPr/>
-        </p:nvSpPr>
-        <p:spPr>
-          <a:xfrm flipV="1">
-            <a:off x="3438720" y="2805120"/>
-            <a:ext cx="0" cy="31680"/>
-          </a:xfrm>
-          <a:prstGeom prst="line">
-            <a:avLst/>
-          </a:prstGeom>
-          <a:ln w="7920">
-            <a:solidFill>
-              <a:srgbClr val="333333"/>
-            </a:solidFill>
-            <a:round/>
-          </a:ln>
-        </p:spPr>
-        <p:style>
-          <a:lnRef idx="0"/>
-          <a:fillRef idx="0"/>
-          <a:effectRef idx="0"/>
-          <a:fontRef idx="minor"/>
-        </p:style>
-        <p:txBody>
-          <a:bodyPr lIns="3960" tIns="3960" rIns="3960" bIns="3960" anchor="t">
-            <a:noAutofit/>
-          </a:bodyPr>
-          <a:p>
-            <a:endParaRPr lang="en-US" sz="2400" b="0" u="none" strike="noStrike">
-              <a:solidFill>
-                <a:srgbClr val="000000"/>
-              </a:solidFill>
-              <a:effectLst/>
-              <a:uFillTx/>
-              <a:latin typeface="Times New Roman"/>
-            </a:endParaRPr>
-          </a:p>
-        </p:txBody>
-      </p:sp>
-      <p:sp>
-        <p:nvSpPr>
-          <p:cNvPr id="105" name=""/>
-          <p:cNvSpPr/>
-          <p:nvPr/>
-        </p:nvSpPr>
-        <p:spPr>
-          <a:xfrm flipV="1">
-            <a:off x="3737520" y="2805120"/>
-            <a:ext cx="0" cy="31680"/>
-          </a:xfrm>
-          <a:prstGeom prst="line">
-            <a:avLst/>
-          </a:prstGeom>
-          <a:ln w="7920">
-            <a:solidFill>
-              <a:srgbClr val="333333"/>
-            </a:solidFill>
-            <a:round/>
-          </a:ln>
-        </p:spPr>
-        <p:style>
-          <a:lnRef idx="0"/>
-          <a:fillRef idx="0"/>
-          <a:effectRef idx="0"/>
-          <a:fontRef idx="minor"/>
-        </p:style>
-        <p:txBody>
-          <a:bodyPr lIns="3960" tIns="3960" rIns="3960" bIns="3960" anchor="t">
-            <a:noAutofit/>
-          </a:bodyPr>
-          <a:p>
-            <a:endParaRPr lang="en-US" sz="2400" b="0" u="none" strike="noStrike">
-              <a:solidFill>
-                <a:srgbClr val="000000"/>
-              </a:solidFill>
-              <a:effectLst/>
-              <a:uFillTx/>
-              <a:latin typeface="Times New Roman"/>
-            </a:endParaRPr>
-          </a:p>
-        </p:txBody>
-      </p:sp>
-      <p:sp>
-        <p:nvSpPr>
-          <p:cNvPr id="106" name=""/>
-          <p:cNvSpPr/>
-          <p:nvPr/>
-        </p:nvSpPr>
-        <p:spPr>
-          <a:xfrm flipV="1">
-            <a:off x="4035960" y="2805120"/>
-            <a:ext cx="0" cy="31680"/>
-          </a:xfrm>
-          <a:prstGeom prst="line">
-            <a:avLst/>
-          </a:prstGeom>
-          <a:ln w="7920">
-            <a:solidFill>
-              <a:srgbClr val="333333"/>
-            </a:solidFill>
-            <a:round/>
-          </a:ln>
-        </p:spPr>
-        <p:style>
-          <a:lnRef idx="0"/>
-          <a:fillRef idx="0"/>
-          <a:effectRef idx="0"/>
-          <a:fontRef idx="minor"/>
-        </p:style>
-        <p:txBody>
-          <a:bodyPr lIns="3960" tIns="3960" rIns="3960" bIns="3960" anchor="t">
-            <a:noAutofit/>
-          </a:bodyPr>
-          <a:p>
-            <a:endParaRPr lang="en-US" sz="2400" b="0" u="none" strike="noStrike">
-              <a:solidFill>
-                <a:srgbClr val="000000"/>
-              </a:solidFill>
-              <a:effectLst/>
-              <a:uFillTx/>
-              <a:latin typeface="Times New Roman"/>
-            </a:endParaRPr>
-          </a:p>
-        </p:txBody>
-      </p:sp>
-      <p:sp>
-        <p:nvSpPr>
-          <p:cNvPr id="107" name=""/>
-          <p:cNvSpPr/>
-          <p:nvPr/>
-        </p:nvSpPr>
-        <p:spPr>
-          <a:xfrm flipV="1">
-            <a:off x="4334760" y="2805120"/>
-            <a:ext cx="0" cy="31680"/>
-          </a:xfrm>
-          <a:prstGeom prst="line">
-            <a:avLst/>
-          </a:prstGeom>
-          <a:ln w="7920">
-            <a:solidFill>
-              <a:srgbClr val="333333"/>
-            </a:solidFill>
-            <a:round/>
-          </a:ln>
-        </p:spPr>
-        <p:style>
-          <a:lnRef idx="0"/>
-          <a:fillRef idx="0"/>
-          <a:effectRef idx="0"/>
-          <a:fontRef idx="minor"/>
-        </p:style>
-        <p:txBody>
-          <a:bodyPr lIns="3960" tIns="3960" rIns="3960" bIns="3960" anchor="t">
-            <a:noAutofit/>
-          </a:bodyPr>
-          <a:p>
-            <a:endParaRPr lang="en-US" sz="2400" b="0" u="none" strike="noStrike">
-              <a:solidFill>
-                <a:srgbClr val="000000"/>
-              </a:solidFill>
-              <a:effectLst/>
-              <a:uFillTx/>
-              <a:latin typeface="Times New Roman"/>
-            </a:endParaRPr>
-          </a:p>
-        </p:txBody>
-      </p:sp>
-      <p:sp>
-        <p:nvSpPr>
-          <p:cNvPr id="108" name=""/>
-          <p:cNvSpPr/>
-          <p:nvPr/>
-        </p:nvSpPr>
-        <p:spPr>
-          <a:xfrm flipV="1">
-            <a:off x="4633200" y="2805120"/>
-            <a:ext cx="0" cy="31680"/>
-          </a:xfrm>
-          <a:prstGeom prst="line">
-            <a:avLst/>
-          </a:prstGeom>
-          <a:ln w="7920">
-            <a:solidFill>
-              <a:srgbClr val="333333"/>
-            </a:solidFill>
-            <a:round/>
-          </a:ln>
-        </p:spPr>
-        <p:style>
-          <a:lnRef idx="0"/>
-          <a:fillRef idx="0"/>
-          <a:effectRef idx="0"/>
-          <a:fontRef idx="minor"/>
-        </p:style>
-        <p:txBody>
-          <a:bodyPr lIns="3960" tIns="3960" rIns="3960" bIns="3960" anchor="t">
-            <a:noAutofit/>
-          </a:bodyPr>
-          <a:p>
-            <a:endParaRPr lang="en-US" sz="2400" b="0" u="none" strike="noStrike">
-              <a:solidFill>
-                <a:srgbClr val="000000"/>
-              </a:solidFill>
-              <a:effectLst/>
-              <a:uFillTx/>
-              <a:latin typeface="Times New Roman"/>
-            </a:endParaRPr>
-          </a:p>
-        </p:txBody>
-      </p:sp>
-      <p:sp>
-        <p:nvSpPr>
-          <p:cNvPr id="109" name=""/>
-          <p:cNvSpPr txBox="1"/>
-          <p:nvPr/>
-        </p:nvSpPr>
-        <p:spPr>
-          <a:xfrm>
-            <a:off x="2777040" y="1089720"/>
-            <a:ext cx="142560" cy="102600"/>
-          </a:xfrm>
-          <a:prstGeom prst="rect">
-            <a:avLst/>
-          </a:prstGeom>
-          <a:noFill/>
-          <a:ln w="0">
-            <a:noFill/>
-          </a:ln>
-        </p:spPr>
-        <p:txBody>
-          <a:bodyPr wrap="none" lIns="0" tIns="0" rIns="0" bIns="0" anchor="t">
-            <a:spAutoFit/>
-          </a:bodyPr>
-          <a:p>
-            <a:pPr/>
-            <a:r>
-              <a:rPr lang="en-US" sz="800" b="0" u="none" strike="noStrike">
-                <a:solidFill>
-                  <a:srgbClr val="262626"/>
-                </a:solidFill>
-                <a:effectLst/>
-                <a:uFillTx/>
-                <a:latin typeface="Arial"/>
-                <a:ea typeface="Arial"/>
-              </a:rPr>
-              <a:t>0.7</a:t>
-            </a:r>
-            <a:endParaRPr lang="en-US" sz="800" b="0" u="none" strike="noStrike">
-              <a:solidFill>
-                <a:srgbClr val="000000"/>
-              </a:solidFill>
-              <a:effectLst/>
-              <a:uFillTx/>
-              <a:latin typeface="Times New Roman"/>
-            </a:endParaRPr>
-          </a:p>
-        </p:txBody>
-      </p:sp>
-      <p:sp>
-        <p:nvSpPr>
-          <p:cNvPr id="110" name=""/>
-          <p:cNvSpPr txBox="1"/>
-          <p:nvPr/>
-        </p:nvSpPr>
-        <p:spPr>
-          <a:xfrm rot="20100000">
-            <a:off x="2840760" y="2911680"/>
-            <a:ext cx="347040" cy="102600"/>
-          </a:xfrm>
-          <a:prstGeom prst="rect">
-            <a:avLst/>
-          </a:prstGeom>
-          <a:noFill/>
-          <a:ln w="0">
-            <a:noFill/>
-          </a:ln>
-        </p:spPr>
-        <p:txBody>
-          <a:bodyPr wrap="none" lIns="0" tIns="0" rIns="0" bIns="0" anchor="t">
-            <a:spAutoFit/>
-          </a:bodyPr>
-          <a:p>
-            <a:pPr/>
-            <a:r>
-              <a:rPr lang="en-US" sz="800" b="0" u="none" strike="noStrike">
-                <a:solidFill>
-                  <a:srgbClr val="262626"/>
-                </a:solidFill>
-                <a:effectLst/>
-                <a:uFillTx/>
-                <a:latin typeface="Arial"/>
-                <a:ea typeface="Arial"/>
-              </a:rPr>
-              <a:t>species</a:t>
-            </a:r>
-            <a:endParaRPr lang="en-US" sz="800" b="0" u="none" strike="noStrike">
-              <a:solidFill>
-                <a:srgbClr val="000000"/>
-              </a:solidFill>
-              <a:effectLst/>
-              <a:uFillTx/>
-              <a:latin typeface="Times New Roman"/>
-            </a:endParaRPr>
-          </a:p>
-        </p:txBody>
-      </p:sp>
-      <p:sp>
-        <p:nvSpPr>
-          <p:cNvPr id="111" name=""/>
-          <p:cNvSpPr txBox="1"/>
-          <p:nvPr/>
-        </p:nvSpPr>
-        <p:spPr>
-          <a:xfrm rot="20100000">
-            <a:off x="2678400" y="3009960"/>
-            <a:ext cx="849240" cy="102600"/>
-          </a:xfrm>
-          <a:prstGeom prst="rect">
-            <a:avLst/>
-          </a:prstGeom>
-          <a:noFill/>
-          <a:ln w="0">
-            <a:noFill/>
-          </a:ln>
-        </p:spPr>
-        <p:txBody>
-          <a:bodyPr wrap="none" lIns="0" tIns="0" rIns="0" bIns="0" anchor="t">
-            <a:spAutoFit/>
-          </a:bodyPr>
-          <a:p>
-            <a:pPr/>
-            <a:r>
-              <a:rPr lang="en-US" sz="800" b="0" u="none" strike="noStrike">
-                <a:solidFill>
-                  <a:srgbClr val="262626"/>
-                </a:solidFill>
-                <a:effectLst/>
-                <a:uFillTx/>
-                <a:latin typeface="Arial"/>
-                <a:ea typeface="Arial"/>
-              </a:rPr>
-              <a:t>species + province</a:t>
-            </a:r>
-            <a:endParaRPr lang="en-US" sz="800" b="0" u="none" strike="noStrike">
-              <a:solidFill>
-                <a:srgbClr val="000000"/>
-              </a:solidFill>
-              <a:effectLst/>
-              <a:uFillTx/>
-              <a:latin typeface="Times New Roman"/>
-            </a:endParaRPr>
-          </a:p>
-        </p:txBody>
-      </p:sp>
-      <p:sp>
-        <p:nvSpPr>
-          <p:cNvPr id="112" name=""/>
-          <p:cNvSpPr txBox="1"/>
-          <p:nvPr/>
-        </p:nvSpPr>
-        <p:spPr>
-          <a:xfrm rot="20100000">
-            <a:off x="3332160" y="2983320"/>
-            <a:ext cx="176400" cy="102600"/>
-          </a:xfrm>
-          <a:prstGeom prst="rect">
-            <a:avLst/>
-          </a:prstGeom>
-          <a:noFill/>
-          <a:ln w="0">
-            <a:noFill/>
-          </a:ln>
-        </p:spPr>
-        <p:txBody>
-          <a:bodyPr wrap="none" lIns="0" tIns="0" rIns="0" bIns="0" anchor="t">
-            <a:spAutoFit/>
-          </a:bodyPr>
-          <a:p>
-            <a:pPr/>
-            <a:r>
-              <a:rPr lang="en-US" sz="800" b="0" u="none" strike="noStrike">
-                <a:solidFill>
-                  <a:srgbClr val="262626"/>
-                </a:solidFill>
-                <a:effectLst/>
-                <a:uFillTx/>
-                <a:latin typeface="Arial"/>
-                <a:ea typeface="Arial"/>
-              </a:rPr>
-              <a:t>(v1)</a:t>
-            </a:r>
-            <a:endParaRPr lang="en-US" sz="800" b="0" u="none" strike="noStrike">
-              <a:solidFill>
-                <a:srgbClr val="000000"/>
-              </a:solidFill>
-              <a:effectLst/>
-              <a:uFillTx/>
-              <a:latin typeface="Times New Roman"/>
-            </a:endParaRPr>
-          </a:p>
-        </p:txBody>
-      </p:sp>
-      <p:sp>
-        <p:nvSpPr>
-          <p:cNvPr id="113" name=""/>
-          <p:cNvSpPr txBox="1"/>
-          <p:nvPr/>
-        </p:nvSpPr>
-        <p:spPr>
-          <a:xfrm rot="20100000">
-            <a:off x="3486960" y="2903400"/>
-            <a:ext cx="287280" cy="102600"/>
-          </a:xfrm>
-          <a:prstGeom prst="rect">
-            <a:avLst/>
-          </a:prstGeom>
-          <a:noFill/>
-          <a:ln w="0">
-            <a:noFill/>
-          </a:ln>
-        </p:spPr>
-        <p:txBody>
-          <a:bodyPr wrap="none" lIns="0" tIns="0" rIns="0" bIns="0" anchor="t">
-            <a:spAutoFit/>
-          </a:bodyPr>
-          <a:p>
-            <a:pPr/>
-            <a:r>
-              <a:rPr lang="en-US" sz="800" b="0" u="none" strike="noStrike">
-                <a:solidFill>
-                  <a:srgbClr val="262626"/>
-                </a:solidFill>
-                <a:effectLst/>
-                <a:uFillTx/>
-                <a:latin typeface="Arial"/>
-                <a:ea typeface="Arial"/>
-              </a:rPr>
-              <a:t>+ year</a:t>
-            </a:r>
-            <a:endParaRPr lang="en-US" sz="800" b="0" u="none" strike="noStrike">
-              <a:solidFill>
-                <a:srgbClr val="000000"/>
-              </a:solidFill>
-              <a:effectLst/>
-              <a:uFillTx/>
-              <a:latin typeface="Times New Roman"/>
-            </a:endParaRPr>
-          </a:p>
-        </p:txBody>
-      </p:sp>
-      <p:sp>
-        <p:nvSpPr>
-          <p:cNvPr id="114" name=""/>
-          <p:cNvSpPr txBox="1"/>
-          <p:nvPr/>
-        </p:nvSpPr>
-        <p:spPr>
-          <a:xfrm rot="20100000">
-            <a:off x="3336480" y="2997360"/>
-            <a:ext cx="781200" cy="102600"/>
-          </a:xfrm>
-          <a:prstGeom prst="rect">
-            <a:avLst/>
-          </a:prstGeom>
-          <a:noFill/>
-          <a:ln w="0">
-            <a:noFill/>
-          </a:ln>
-        </p:spPr>
-        <p:txBody>
-          <a:bodyPr wrap="none" lIns="0" tIns="0" rIns="0" bIns="0" anchor="t">
-            <a:spAutoFit/>
-          </a:bodyPr>
-          <a:p>
-            <a:pPr/>
-            <a:r>
-              <a:rPr lang="en-US" sz="800" b="0" u="none" strike="noStrike">
-                <a:solidFill>
-                  <a:srgbClr val="262626"/>
-                </a:solidFill>
-                <a:effectLst/>
-                <a:uFillTx/>
-                <a:latin typeface="Arial"/>
-                <a:ea typeface="Arial"/>
-              </a:rPr>
-              <a:t>+ province x year</a:t>
-            </a:r>
-            <a:endParaRPr lang="en-US" sz="800" b="0" u="none" strike="noStrike">
-              <a:solidFill>
-                <a:srgbClr val="000000"/>
-              </a:solidFill>
-              <a:effectLst/>
-              <a:uFillTx/>
-              <a:latin typeface="Times New Roman"/>
-            </a:endParaRPr>
-          </a:p>
-        </p:txBody>
-      </p:sp>
-      <p:sp>
-        <p:nvSpPr>
-          <p:cNvPr id="115" name=""/>
-          <p:cNvSpPr txBox="1"/>
-          <p:nvPr/>
-        </p:nvSpPr>
-        <p:spPr>
-          <a:xfrm rot="20100000">
-            <a:off x="3784320" y="3016080"/>
-            <a:ext cx="324000" cy="102600"/>
-          </a:xfrm>
-          <a:prstGeom prst="rect">
-            <a:avLst/>
-          </a:prstGeom>
-          <a:noFill/>
-          <a:ln w="0">
-            <a:noFill/>
-          </a:ln>
-        </p:spPr>
-        <p:txBody>
-          <a:bodyPr wrap="none" lIns="0" tIns="0" rIns="0" bIns="0" anchor="t">
-            <a:spAutoFit/>
-          </a:bodyPr>
-          <a:p>
-            <a:pPr/>
-            <a:r>
-              <a:rPr lang="en-US" sz="800" b="0" u="none" strike="noStrike">
-                <a:solidFill>
-                  <a:srgbClr val="262626"/>
-                </a:solidFill>
-                <a:effectLst/>
-                <a:uFillTx/>
-                <a:latin typeface="Arial"/>
-                <a:ea typeface="Arial"/>
-              </a:rPr>
-              <a:t>(MAIN)</a:t>
-            </a:r>
-            <a:endParaRPr lang="en-US" sz="800" b="0" u="none" strike="noStrike">
-              <a:solidFill>
-                <a:srgbClr val="000000"/>
-              </a:solidFill>
-              <a:effectLst/>
-              <a:uFillTx/>
-              <a:latin typeface="Times New Roman"/>
-            </a:endParaRPr>
-          </a:p>
-        </p:txBody>
-      </p:sp>
-      <p:sp>
-        <p:nvSpPr>
-          <p:cNvPr id="116" name=""/>
-          <p:cNvSpPr txBox="1"/>
-          <p:nvPr/>
-        </p:nvSpPr>
-        <p:spPr>
-          <a:xfrm rot="20100000">
-            <a:off x="3320280" y="3065040"/>
-            <a:ext cx="1121760" cy="102600"/>
-          </a:xfrm>
-          <a:prstGeom prst="rect">
-            <a:avLst/>
-          </a:prstGeom>
-          <a:noFill/>
-          <a:ln w="0">
-            <a:noFill/>
-          </a:ln>
-        </p:spPr>
-        <p:txBody>
-          <a:bodyPr wrap="none" lIns="0" tIns="0" rIns="0" bIns="0" anchor="t">
-            <a:spAutoFit/>
-          </a:bodyPr>
-          <a:p>
-            <a:pPr/>
-            <a:r>
-              <a:rPr lang="en-US" sz="800" b="0" u="none" strike="noStrike">
-                <a:solidFill>
-                  <a:srgbClr val="262626"/>
-                </a:solidFill>
-                <a:effectLst/>
-                <a:uFillTx/>
-                <a:latin typeface="Arial"/>
-                <a:ea typeface="Arial"/>
-              </a:rPr>
-              <a:t>+ species warming slope</a:t>
-            </a:r>
-            <a:endParaRPr lang="en-US" sz="800" b="0" u="none" strike="noStrike">
-              <a:solidFill>
-                <a:srgbClr val="000000"/>
-              </a:solidFill>
-              <a:effectLst/>
-              <a:uFillTx/>
-              <a:latin typeface="Times New Roman"/>
-            </a:endParaRPr>
-          </a:p>
-        </p:txBody>
-      </p:sp>
-      <p:sp>
-        <p:nvSpPr>
-          <p:cNvPr id="117" name=""/>
-          <p:cNvSpPr txBox="1"/>
-          <p:nvPr/>
-        </p:nvSpPr>
-        <p:spPr>
-          <a:xfrm rot="20100000">
-            <a:off x="3739320" y="3035160"/>
-            <a:ext cx="1008360" cy="102600"/>
-          </a:xfrm>
-          <a:prstGeom prst="rect">
-            <a:avLst/>
-          </a:prstGeom>
-          <a:noFill/>
-          <a:ln w="0">
-            <a:noFill/>
-          </a:ln>
-        </p:spPr>
-        <p:txBody>
-          <a:bodyPr wrap="none" lIns="0" tIns="0" rIns="0" bIns="0" anchor="t">
-            <a:spAutoFit/>
-          </a:bodyPr>
-          <a:p>
-            <a:pPr/>
-            <a:r>
-              <a:rPr lang="en-US" sz="800" b="0" u="none" strike="noStrike">
-                <a:solidFill>
-                  <a:srgbClr val="262626"/>
-                </a:solidFill>
-                <a:effectLst/>
-                <a:uFillTx/>
-                <a:latin typeface="Arial"/>
-                <a:ea typeface="Arial"/>
-              </a:rPr>
-              <a:t>+ province effort slope</a:t>
-            </a:r>
-            <a:endParaRPr lang="en-US" sz="800" b="0" u="none" strike="noStrike">
-              <a:solidFill>
-                <a:srgbClr val="000000"/>
-              </a:solidFill>
-              <a:effectLst/>
-              <a:uFillTx/>
-              <a:latin typeface="Times New Roman"/>
-            </a:endParaRPr>
-          </a:p>
-        </p:txBody>
-      </p:sp>
-      <p:sp>
-        <p:nvSpPr>
-          <p:cNvPr id="118" name=""/>
-          <p:cNvSpPr/>
-          <p:nvPr/>
-        </p:nvSpPr>
-        <p:spPr>
-          <a:xfrm>
-            <a:off x="2895480" y="1437120"/>
-            <a:ext cx="1167840" cy="469800"/>
-          </a:xfrm>
-          <a:custGeom>
-            <a:avLst/>
-            <a:gdLst/>
-            <a:ahLst/>
-            <a:rect l="0" t="0" r="r" b="b"/>
-            <a:pathLst>
-              <a:path w="3244" h="1305">
-                <a:moveTo>
-                  <a:pt x="0" y="0"/>
-                </a:moveTo>
-                <a:lnTo>
-                  <a:pt x="3244" y="0"/>
-                </a:lnTo>
-                <a:lnTo>
-                  <a:pt x="3244" y="1305"/>
-                </a:lnTo>
-                <a:lnTo>
-                  <a:pt x="0" y="1305"/>
-                </a:lnTo>
-                <a:lnTo>
-                  <a:pt x="0" y="0"/>
-                </a:lnTo>
-                <a:close/>
-              </a:path>
-            </a:pathLst>
-          </a:custGeom>
-          <a:solidFill>
-            <a:srgbClr val="FFFFFF"/>
-          </a:solidFill>
-          <a:ln w="0">
-            <a:noFill/>
-          </a:ln>
-        </p:spPr>
-        <p:txBody>
-          <a:bodyPr lIns="0" tIns="0" rIns="0" bIns="0" anchor="t">
-            <a:noAutofit/>
-          </a:bodyPr>
-          <a:p>
-            <a:endParaRPr lang="en-US" sz="2400" b="0" u="none" strike="noStrike">
-              <a:solidFill>
-                <a:srgbClr val="000000"/>
-              </a:solidFill>
-              <a:effectLst/>
-              <a:uFillTx/>
-              <a:latin typeface="Times New Roman"/>
-            </a:endParaRPr>
-          </a:p>
-        </p:txBody>
-      </p:sp>
-      <p:sp>
-        <p:nvSpPr>
-          <p:cNvPr id="119" name=""/>
-          <p:cNvSpPr/>
-          <p:nvPr/>
-        </p:nvSpPr>
-        <p:spPr>
-          <a:xfrm>
-            <a:off x="2958840" y="1500480"/>
-            <a:ext cx="114120" cy="114480"/>
-          </a:xfrm>
-          <a:custGeom>
-            <a:avLst/>
-            <a:gdLst/>
-            <a:ahLst/>
-            <a:rect l="0" t="0" r="r" b="b"/>
-            <a:pathLst>
-              <a:path w="317" h="318">
-                <a:moveTo>
-                  <a:pt x="0" y="0"/>
-                </a:moveTo>
-                <a:lnTo>
-                  <a:pt x="317" y="0"/>
-                </a:lnTo>
-                <a:lnTo>
-                  <a:pt x="317" y="318"/>
-                </a:lnTo>
-                <a:lnTo>
-                  <a:pt x="0" y="318"/>
-                </a:lnTo>
-                <a:lnTo>
-                  <a:pt x="0" y="0"/>
-                </a:lnTo>
-                <a:close/>
-              </a:path>
-            </a:pathLst>
-          </a:custGeom>
-          <a:solidFill>
-            <a:srgbClr val="FFFFFF"/>
-          </a:solidFill>
-          <a:ln w="0">
-            <a:noFill/>
-          </a:ln>
-        </p:spPr>
-        <p:txBody>
-          <a:bodyPr lIns="0" tIns="0" rIns="0" bIns="0" anchor="t">
-            <a:noAutofit/>
-          </a:bodyPr>
-          <a:p>
-            <a:endParaRPr lang="en-US" sz="2400" b="0" u="none" strike="noStrike">
-              <a:solidFill>
-                <a:srgbClr val="000000"/>
-              </a:solidFill>
-              <a:effectLst/>
-              <a:uFillTx/>
-              <a:latin typeface="Times New Roman"/>
-            </a:endParaRPr>
-          </a:p>
-        </p:txBody>
-      </p:sp>
-      <p:sp>
-        <p:nvSpPr>
-          <p:cNvPr id="120" name=""/>
-          <p:cNvSpPr/>
-          <p:nvPr/>
-        </p:nvSpPr>
-        <p:spPr>
-          <a:xfrm>
-            <a:off x="2970360" y="1557360"/>
-            <a:ext cx="91080" cy="0"/>
-          </a:xfrm>
-          <a:prstGeom prst="line">
-            <a:avLst/>
-          </a:prstGeom>
-          <a:ln w="16200">
-            <a:solidFill>
-              <a:srgbClr val="009E73"/>
-            </a:solidFill>
-            <a:round/>
-          </a:ln>
-        </p:spPr>
-        <p:style>
-          <a:lnRef idx="0"/>
-          <a:fillRef idx="0"/>
-          <a:effectRef idx="0"/>
-          <a:fontRef idx="minor"/>
-        </p:style>
-        <p:txBody>
-          <a:bodyPr lIns="7920" tIns="-7920" rIns="7920" bIns="-7920" anchor="t">
-            <a:noAutofit/>
-          </a:bodyPr>
-          <a:p>
-            <a:endParaRPr lang="en-US" sz="2400" b="0" u="none" strike="noStrike">
-              <a:solidFill>
-                <a:srgbClr val="000000"/>
-              </a:solidFill>
-              <a:effectLst/>
-              <a:uFillTx/>
-              <a:latin typeface="Times New Roman"/>
-            </a:endParaRPr>
-          </a:p>
-        </p:txBody>
-      </p:sp>
-      <p:sp>
-        <p:nvSpPr>
-          <p:cNvPr id="121" name=""/>
-          <p:cNvSpPr/>
-          <p:nvPr/>
-        </p:nvSpPr>
-        <p:spPr>
-          <a:xfrm>
-            <a:off x="2984760" y="1526400"/>
-            <a:ext cx="62640" cy="63000"/>
-          </a:xfrm>
-          <a:custGeom>
-            <a:avLst/>
-            <a:gdLst/>
-            <a:ahLst/>
-            <a:rect l="0" t="0" r="r" b="b"/>
-            <a:pathLst>
-              <a:path w="174" h="175">
-                <a:moveTo>
-                  <a:pt x="0" y="87"/>
-                </a:moveTo>
-                <a:cubicBezTo>
-                  <a:pt x="0" y="-29"/>
-                  <a:pt x="174" y="-29"/>
-                  <a:pt x="174" y="87"/>
-                </a:cubicBezTo>
-                <a:cubicBezTo>
-                  <a:pt x="174" y="204"/>
-                  <a:pt x="0" y="204"/>
-                  <a:pt x="0" y="87"/>
-                </a:cubicBezTo>
-                <a:close/>
-              </a:path>
-            </a:pathLst>
-          </a:custGeom>
-          <a:solidFill>
-            <a:srgbClr val="009E73"/>
-          </a:solidFill>
-          <a:ln w="0">
-            <a:noFill/>
-          </a:ln>
-        </p:spPr>
-        <p:txBody>
-          <a:bodyPr lIns="0" tIns="0" rIns="0" bIns="0" anchor="t">
-            <a:noAutofit/>
-          </a:bodyPr>
-          <a:p>
-            <a:endParaRPr lang="en-US" sz="2400" b="0" u="none" strike="noStrike">
-              <a:solidFill>
-                <a:srgbClr val="FFFFFF"/>
-              </a:solidFill>
-              <a:effectLst/>
-              <a:uFillTx/>
-              <a:latin typeface="Times New Roman"/>
-            </a:endParaRPr>
-          </a:p>
-        </p:txBody>
-      </p:sp>
-      <p:sp>
-        <p:nvSpPr>
-          <p:cNvPr id="122" name=""/>
-          <p:cNvSpPr/>
-          <p:nvPr/>
-        </p:nvSpPr>
-        <p:spPr>
-          <a:xfrm>
-            <a:off x="2984760" y="1526400"/>
-            <a:ext cx="62640" cy="63000"/>
-          </a:xfrm>
-          <a:custGeom>
-            <a:avLst/>
-            <a:gdLst/>
-            <a:ahLst/>
-            <a:rect l="0" t="0" r="r" b="b"/>
-            <a:pathLst>
-              <a:path fill="none" w="174" h="175">
-                <a:moveTo>
-                  <a:pt x="174" y="87"/>
-                </a:moveTo>
-                <a:cubicBezTo>
-                  <a:pt x="174" y="204"/>
-                  <a:pt x="0" y="204"/>
-                  <a:pt x="0" y="87"/>
-                </a:cubicBezTo>
-                <a:cubicBezTo>
-                  <a:pt x="0" y="-29"/>
-                  <a:pt x="174" y="-29"/>
-                  <a:pt x="174" y="87"/>
-                </a:cubicBezTo>
-              </a:path>
-            </a:pathLst>
-          </a:custGeom>
-          <a:ln cap="rnd" w="7920">
-            <a:solidFill>
-              <a:srgbClr val="009E73"/>
-            </a:solidFill>
-            <a:round/>
-          </a:ln>
-        </p:spPr>
-        <p:txBody>
-          <a:bodyPr lIns="3960" tIns="3960" rIns="3960" bIns="3960" anchor="t">
-            <a:noAutofit/>
-          </a:bodyPr>
-          <a:p>
-            <a:endParaRPr lang="en-US" sz="2400" b="0" u="none" strike="noStrike">
-              <a:solidFill>
-                <a:srgbClr val="000000"/>
-              </a:solidFill>
-              <a:effectLst/>
-              <a:uFillTx/>
-              <a:latin typeface="Times New Roman"/>
-            </a:endParaRPr>
-          </a:p>
-        </p:txBody>
-      </p:sp>
-      <p:sp>
-        <p:nvSpPr>
           <p:cNvPr id="123" name=""/>
           <p:cNvSpPr/>
           <p:nvPr/>
@@ -7136,7 +7136,7 @@
         </p:nvSpPr>
         <p:spPr>
           <a:xfrm>
-            <a:off x="5370120" y="2127600"/>
+            <a:off x="5370120" y="2120400"/>
             <a:ext cx="1851840" cy="0"/>
           </a:xfrm>
           <a:prstGeom prst="line">
@@ -7179,7 +7179,7 @@
         </p:nvSpPr>
         <p:spPr>
           <a:xfrm>
-            <a:off x="5370120" y="1553040"/>
+            <a:off x="5370120" y="1538640"/>
             <a:ext cx="1851840" cy="0"/>
           </a:xfrm>
           <a:prstGeom prst="line">
@@ -7222,7 +7222,7 @@
         </p:nvSpPr>
         <p:spPr>
           <a:xfrm>
-            <a:off x="5370120" y="978120"/>
+            <a:off x="5370120" y="956880"/>
             <a:ext cx="1851840" cy="0"/>
           </a:xfrm>
           <a:prstGeom prst="line">
@@ -7265,8 +7265,8 @@
         </p:nvSpPr>
         <p:spPr>
           <a:xfrm>
-            <a:off x="5452560" y="2255040"/>
-            <a:ext cx="194400" cy="447480"/>
+            <a:off x="5452560" y="2249280"/>
+            <a:ext cx="194400" cy="453240"/>
           </a:xfrm>
           <a:custGeom>
             <a:avLst/>
@@ -7274,7 +7274,7 @@
             <a:ahLst/>
             <a:rect l="0" t="0" r="r" b="b"/>
             <a:pathLst>
-              <a:path w="540" h="1243">
+              <a:path w="540" h="1259">
                 <a:moveTo>
                   <a:pt x="0" y="0"/>
                 </a:moveTo>
@@ -7282,10 +7282,10 @@
                   <a:pt x="540" y="0"/>
                 </a:lnTo>
                 <a:lnTo>
-                  <a:pt x="540" y="1243"/>
-                </a:lnTo>
-                <a:lnTo>
-                  <a:pt x="0" y="1243"/>
+                  <a:pt x="540" y="1259"/>
+                </a:lnTo>
+                <a:lnTo>
+                  <a:pt x="0" y="1259"/>
                 </a:lnTo>
                 <a:lnTo>
                   <a:pt x="0" y="0"/>
@@ -7325,8 +7325,8 @@
         </p:nvSpPr>
         <p:spPr>
           <a:xfrm>
-            <a:off x="5751000" y="1757520"/>
-            <a:ext cx="194400" cy="428760"/>
+            <a:off x="5751000" y="1744560"/>
+            <a:ext cx="194400" cy="434160"/>
           </a:xfrm>
           <a:custGeom>
             <a:avLst/>
@@ -7334,7 +7334,7 @@
             <a:ahLst/>
             <a:rect l="0" t="0" r="r" b="b"/>
             <a:pathLst>
-              <a:path w="540" h="1191">
+              <a:path w="540" h="1206">
                 <a:moveTo>
                   <a:pt x="0" y="0"/>
                 </a:moveTo>
@@ -7342,10 +7342,10 @@
                   <a:pt x="540" y="0"/>
                 </a:lnTo>
                 <a:lnTo>
-                  <a:pt x="540" y="1191"/>
-                </a:lnTo>
-                <a:lnTo>
-                  <a:pt x="0" y="1191"/>
+                  <a:pt x="540" y="1206"/>
+                </a:lnTo>
+                <a:lnTo>
+                  <a:pt x="0" y="1206"/>
                 </a:lnTo>
                 <a:lnTo>
                   <a:pt x="0" y="0"/>
@@ -7385,8 +7385,8 @@
         </p:nvSpPr>
         <p:spPr>
           <a:xfrm>
-            <a:off x="5751000" y="2185920"/>
-            <a:ext cx="194400" cy="516600"/>
+            <a:off x="5751000" y="2178360"/>
+            <a:ext cx="194400" cy="524160"/>
           </a:xfrm>
           <a:custGeom>
             <a:avLst/>
@@ -7394,7 +7394,7 @@
             <a:ahLst/>
             <a:rect l="0" t="0" r="r" b="b"/>
             <a:pathLst>
-              <a:path w="540" h="1435">
+              <a:path w="540" h="1456">
                 <a:moveTo>
                   <a:pt x="0" y="0"/>
                 </a:moveTo>
@@ -7402,10 +7402,10 @@
                   <a:pt x="540" y="0"/>
                 </a:lnTo>
                 <a:lnTo>
-                  <a:pt x="540" y="1435"/>
-                </a:lnTo>
-                <a:lnTo>
-                  <a:pt x="0" y="1435"/>
+                  <a:pt x="540" y="1456"/>
+                </a:lnTo>
+                <a:lnTo>
+                  <a:pt x="0" y="1456"/>
                 </a:lnTo>
                 <a:lnTo>
                   <a:pt x="0" y="0"/>
@@ -7445,8 +7445,8 @@
         </p:nvSpPr>
         <p:spPr>
           <a:xfrm>
-            <a:off x="6049800" y="1333440"/>
-            <a:ext cx="194400" cy="433440"/>
+            <a:off x="6049800" y="1351440"/>
+            <a:ext cx="194400" cy="438840"/>
           </a:xfrm>
           <a:custGeom>
             <a:avLst/>
@@ -7454,7 +7454,7 @@
             <a:ahLst/>
             <a:rect l="0" t="0" r="r" b="b"/>
             <a:pathLst>
-              <a:path w="540" h="1204">
+              <a:path w="540" h="1219">
                 <a:moveTo>
                   <a:pt x="0" y="0"/>
                 </a:moveTo>
@@ -7462,10 +7462,10 @@
                   <a:pt x="540" y="0"/>
                 </a:lnTo>
                 <a:lnTo>
-                  <a:pt x="540" y="1204"/>
-                </a:lnTo>
-                <a:lnTo>
-                  <a:pt x="0" y="1204"/>
+                  <a:pt x="540" y="1219"/>
+                </a:lnTo>
+                <a:lnTo>
+                  <a:pt x="0" y="1219"/>
                 </a:lnTo>
                 <a:lnTo>
                   <a:pt x="0" y="0"/>
@@ -7505,8 +7505,8 @@
         </p:nvSpPr>
         <p:spPr>
           <a:xfrm>
-            <a:off x="6049800" y="1766520"/>
-            <a:ext cx="194400" cy="482040"/>
+            <a:off x="6049800" y="1789920"/>
+            <a:ext cx="194400" cy="500760"/>
           </a:xfrm>
           <a:custGeom>
             <a:avLst/>
@@ -7514,7 +7514,7 @@
             <a:ahLst/>
             <a:rect l="0" t="0" r="r" b="b"/>
             <a:pathLst>
-              <a:path w="540" h="1339">
+              <a:path w="540" h="1391">
                 <a:moveTo>
                   <a:pt x="0" y="0"/>
                 </a:moveTo>
@@ -7522,10 +7522,10 @@
                   <a:pt x="540" y="0"/>
                 </a:lnTo>
                 <a:lnTo>
-                  <a:pt x="540" y="1339"/>
-                </a:lnTo>
-                <a:lnTo>
-                  <a:pt x="0" y="1339"/>
+                  <a:pt x="540" y="1391"/>
+                </a:lnTo>
+                <a:lnTo>
+                  <a:pt x="0" y="1391"/>
                 </a:lnTo>
                 <a:lnTo>
                   <a:pt x="0" y="0"/>
@@ -7565,8 +7565,8 @@
         </p:nvSpPr>
         <p:spPr>
           <a:xfrm>
-            <a:off x="6049800" y="2248200"/>
-            <a:ext cx="194400" cy="454320"/>
+            <a:off x="6049800" y="2290320"/>
+            <a:ext cx="194400" cy="412200"/>
           </a:xfrm>
           <a:custGeom>
             <a:avLst/>
@@ -7574,7 +7574,7 @@
             <a:ahLst/>
             <a:rect l="0" t="0" r="r" b="b"/>
             <a:pathLst>
-              <a:path w="540" h="1262">
+              <a:path w="540" h="1145">
                 <a:moveTo>
                   <a:pt x="0" y="0"/>
                 </a:moveTo>
@@ -7582,10 +7582,10 @@
                   <a:pt x="540" y="0"/>
                 </a:lnTo>
                 <a:lnTo>
-                  <a:pt x="540" y="1262"/>
-                </a:lnTo>
-                <a:lnTo>
-                  <a:pt x="0" y="1262"/>
+                  <a:pt x="540" y="1145"/>
+                </a:lnTo>
+                <a:lnTo>
+                  <a:pt x="0" y="1145"/>
                 </a:lnTo>
                 <a:lnTo>
                   <a:pt x="0" y="0"/>
@@ -7625,8 +7625,8 @@
         </p:nvSpPr>
         <p:spPr>
           <a:xfrm>
-            <a:off x="6348600" y="938160"/>
-            <a:ext cx="194400" cy="465840"/>
+            <a:off x="6348600" y="917280"/>
+            <a:ext cx="194400" cy="470520"/>
           </a:xfrm>
           <a:custGeom>
             <a:avLst/>
@@ -7634,7 +7634,7 @@
             <a:ahLst/>
             <a:rect l="0" t="0" r="r" b="b"/>
             <a:pathLst>
-              <a:path w="540" h="1294">
+              <a:path w="540" h="1307">
                 <a:moveTo>
                   <a:pt x="0" y="0"/>
                 </a:moveTo>
@@ -7642,10 +7642,10 @@
                   <a:pt x="540" y="0"/>
                 </a:lnTo>
                 <a:lnTo>
-                  <a:pt x="540" y="1294"/>
-                </a:lnTo>
-                <a:lnTo>
-                  <a:pt x="0" y="1294"/>
+                  <a:pt x="540" y="1307"/>
+                </a:lnTo>
+                <a:lnTo>
+                  <a:pt x="0" y="1307"/>
                 </a:lnTo>
                 <a:lnTo>
                   <a:pt x="0" y="0"/>
@@ -7685,8 +7685,8 @@
         </p:nvSpPr>
         <p:spPr>
           <a:xfrm>
-            <a:off x="6348600" y="1403640"/>
-            <a:ext cx="194400" cy="374760"/>
+            <a:off x="6348600" y="1387440"/>
+            <a:ext cx="194400" cy="386640"/>
           </a:xfrm>
           <a:custGeom>
             <a:avLst/>
@@ -7694,7 +7694,7 @@
             <a:ahLst/>
             <a:rect l="0" t="0" r="r" b="b"/>
             <a:pathLst>
-              <a:path w="540" h="1041">
+              <a:path w="540" h="1074">
                 <a:moveTo>
                   <a:pt x="0" y="0"/>
                 </a:moveTo>
@@ -7702,10 +7702,10 @@
                   <a:pt x="540" y="0"/>
                 </a:lnTo>
                 <a:lnTo>
-                  <a:pt x="540" y="1041"/>
-                </a:lnTo>
-                <a:lnTo>
-                  <a:pt x="0" y="1041"/>
+                  <a:pt x="540" y="1074"/>
+                </a:lnTo>
+                <a:lnTo>
+                  <a:pt x="0" y="1074"/>
                 </a:lnTo>
                 <a:lnTo>
                   <a:pt x="0" y="0"/>
@@ -7745,8 +7745,8 @@
         </p:nvSpPr>
         <p:spPr>
           <a:xfrm>
-            <a:off x="6348600" y="1778040"/>
-            <a:ext cx="194400" cy="924480"/>
+            <a:off x="6348600" y="1773720"/>
+            <a:ext cx="194400" cy="928800"/>
           </a:xfrm>
           <a:custGeom>
             <a:avLst/>
@@ -7754,7 +7754,7 @@
             <a:ahLst/>
             <a:rect l="0" t="0" r="r" b="b"/>
             <a:pathLst>
-              <a:path w="540" h="2568">
+              <a:path w="540" h="2580">
                 <a:moveTo>
                   <a:pt x="0" y="0"/>
                 </a:moveTo>
@@ -7762,10 +7762,10 @@
                   <a:pt x="540" y="0"/>
                 </a:lnTo>
                 <a:lnTo>
-                  <a:pt x="540" y="2568"/>
-                </a:lnTo>
-                <a:lnTo>
-                  <a:pt x="0" y="2568"/>
+                  <a:pt x="540" y="2580"/>
+                </a:lnTo>
+                <a:lnTo>
+                  <a:pt x="0" y="2580"/>
                 </a:lnTo>
                 <a:lnTo>
                   <a:pt x="0" y="0"/>
@@ -7805,8 +7805,8 @@
         </p:nvSpPr>
         <p:spPr>
           <a:xfrm>
-            <a:off x="6647040" y="673920"/>
-            <a:ext cx="194400" cy="432360"/>
+            <a:off x="6647040" y="651960"/>
+            <a:ext cx="194400" cy="436680"/>
           </a:xfrm>
           <a:custGeom>
             <a:avLst/>
@@ -7814,7 +7814,7 @@
             <a:ahLst/>
             <a:rect l="0" t="0" r="r" b="b"/>
             <a:pathLst>
-              <a:path w="540" h="1201">
+              <a:path w="540" h="1213">
                 <a:moveTo>
                   <a:pt x="0" y="0"/>
                 </a:moveTo>
@@ -7822,10 +7822,10 @@
                   <a:pt x="540" y="0"/>
                 </a:lnTo>
                 <a:lnTo>
-                  <a:pt x="540" y="1201"/>
-                </a:lnTo>
-                <a:lnTo>
-                  <a:pt x="0" y="1201"/>
+                  <a:pt x="540" y="1213"/>
+                </a:lnTo>
+                <a:lnTo>
+                  <a:pt x="0" y="1213"/>
                 </a:lnTo>
                 <a:lnTo>
                   <a:pt x="0" y="0"/>
@@ -7865,8 +7865,8 @@
         </p:nvSpPr>
         <p:spPr>
           <a:xfrm>
-            <a:off x="6647040" y="1105920"/>
-            <a:ext cx="194400" cy="350640"/>
+            <a:off x="6647040" y="1088280"/>
+            <a:ext cx="194400" cy="362160"/>
           </a:xfrm>
           <a:custGeom>
             <a:avLst/>
@@ -7874,7 +7874,7 @@
             <a:ahLst/>
             <a:rect l="0" t="0" r="r" b="b"/>
             <a:pathLst>
-              <a:path w="540" h="974">
+              <a:path w="540" h="1006">
                 <a:moveTo>
                   <a:pt x="0" y="0"/>
                 </a:moveTo>
@@ -7882,10 +7882,10 @@
                   <a:pt x="540" y="0"/>
                 </a:lnTo>
                 <a:lnTo>
-                  <a:pt x="540" y="974"/>
-                </a:lnTo>
-                <a:lnTo>
-                  <a:pt x="0" y="974"/>
+                  <a:pt x="540" y="1006"/>
+                </a:lnTo>
+                <a:lnTo>
+                  <a:pt x="0" y="1006"/>
                 </a:lnTo>
                 <a:lnTo>
                   <a:pt x="0" y="0"/>
@@ -7925,8 +7925,8 @@
         </p:nvSpPr>
         <p:spPr>
           <a:xfrm>
-            <a:off x="6647040" y="1456200"/>
-            <a:ext cx="194400" cy="931320"/>
+            <a:off x="6647040" y="1450080"/>
+            <a:ext cx="194400" cy="936000"/>
           </a:xfrm>
           <a:custGeom>
             <a:avLst/>
@@ -7934,7 +7934,7 @@
             <a:ahLst/>
             <a:rect l="0" t="0" r="r" b="b"/>
             <a:pathLst>
-              <a:path w="540" h="2587">
+              <a:path w="540" h="2600">
                 <a:moveTo>
                   <a:pt x="0" y="0"/>
                 </a:moveTo>
@@ -7942,10 +7942,10 @@
                   <a:pt x="540" y="0"/>
                 </a:lnTo>
                 <a:lnTo>
-                  <a:pt x="540" y="2587"/>
-                </a:lnTo>
-                <a:lnTo>
-                  <a:pt x="0" y="2587"/>
+                  <a:pt x="540" y="2600"/>
+                </a:lnTo>
+                <a:lnTo>
+                  <a:pt x="0" y="2600"/>
                 </a:lnTo>
                 <a:lnTo>
                   <a:pt x="0" y="0"/>
@@ -7985,8 +7985,8 @@
         </p:nvSpPr>
         <p:spPr>
           <a:xfrm>
-            <a:off x="6647040" y="2387160"/>
-            <a:ext cx="194400" cy="315360"/>
+            <a:off x="6647040" y="2385720"/>
+            <a:ext cx="194400" cy="316800"/>
           </a:xfrm>
           <a:custGeom>
             <a:avLst/>
@@ -7994,7 +7994,7 @@
             <a:ahLst/>
             <a:rect l="0" t="0" r="r" b="b"/>
             <a:pathLst>
-              <a:path w="540" h="876">
+              <a:path w="540" h="880">
                 <a:moveTo>
                   <a:pt x="0" y="0"/>
                 </a:moveTo>
@@ -8002,10 +8002,10 @@
                   <a:pt x="540" y="0"/>
                 </a:lnTo>
                 <a:lnTo>
-                  <a:pt x="540" y="876"/>
-                </a:lnTo>
-                <a:lnTo>
-                  <a:pt x="0" y="876"/>
+                  <a:pt x="540" y="880"/>
+                </a:lnTo>
+                <a:lnTo>
+                  <a:pt x="0" y="880"/>
                 </a:lnTo>
                 <a:lnTo>
                   <a:pt x="0" y="0"/>
@@ -8046,7 +8046,7 @@
         <p:spPr>
           <a:xfrm>
             <a:off x="6945840" y="641520"/>
-            <a:ext cx="194400" cy="462240"/>
+            <a:ext cx="194400" cy="466920"/>
           </a:xfrm>
           <a:custGeom>
             <a:avLst/>
@@ -8054,7 +8054,7 @@
             <a:ahLst/>
             <a:rect l="0" t="0" r="r" b="b"/>
             <a:pathLst>
-              <a:path w="540" h="1284">
+              <a:path w="540" h="1297">
                 <a:moveTo>
                   <a:pt x="0" y="0"/>
                 </a:moveTo>
@@ -8062,10 +8062,10 @@
                   <a:pt x="540" y="0"/>
                 </a:lnTo>
                 <a:lnTo>
-                  <a:pt x="540" y="1284"/>
-                </a:lnTo>
-                <a:lnTo>
-                  <a:pt x="0" y="1284"/>
+                  <a:pt x="540" y="1297"/>
+                </a:lnTo>
+                <a:lnTo>
+                  <a:pt x="0" y="1297"/>
                 </a:lnTo>
                 <a:lnTo>
                   <a:pt x="0" y="0"/>
@@ -8105,8 +8105,8 @@
         </p:nvSpPr>
         <p:spPr>
           <a:xfrm>
-            <a:off x="6945840" y="1103400"/>
-            <a:ext cx="194400" cy="376200"/>
+            <a:off x="6945840" y="1108080"/>
+            <a:ext cx="194400" cy="387720"/>
           </a:xfrm>
           <a:custGeom>
             <a:avLst/>
@@ -8114,7 +8114,7 @@
             <a:ahLst/>
             <a:rect l="0" t="0" r="r" b="b"/>
             <a:pathLst>
-              <a:path w="540" h="1045">
+              <a:path w="540" h="1077">
                 <a:moveTo>
                   <a:pt x="0" y="0"/>
                 </a:moveTo>
@@ -8122,10 +8122,10 @@
                   <a:pt x="540" y="0"/>
                 </a:lnTo>
                 <a:lnTo>
-                  <a:pt x="540" y="1045"/>
-                </a:lnTo>
-                <a:lnTo>
-                  <a:pt x="0" y="1045"/>
+                  <a:pt x="540" y="1077"/>
+                </a:lnTo>
+                <a:lnTo>
+                  <a:pt x="0" y="1077"/>
                 </a:lnTo>
                 <a:lnTo>
                   <a:pt x="0" y="0"/>
@@ -8165,8 +8165,8 @@
         </p:nvSpPr>
         <p:spPr>
           <a:xfrm>
-            <a:off x="6945840" y="1479240"/>
-            <a:ext cx="194400" cy="876240"/>
+            <a:off x="6945840" y="1495440"/>
+            <a:ext cx="194400" cy="890640"/>
           </a:xfrm>
           <a:custGeom>
             <a:avLst/>
@@ -8174,7 +8174,7 @@
             <a:ahLst/>
             <a:rect l="0" t="0" r="r" b="b"/>
             <a:pathLst>
-              <a:path w="540" h="2434">
+              <a:path w="540" h="2474">
                 <a:moveTo>
                   <a:pt x="0" y="0"/>
                 </a:moveTo>
@@ -8182,10 +8182,10 @@
                   <a:pt x="540" y="0"/>
                 </a:lnTo>
                 <a:lnTo>
-                  <a:pt x="540" y="2434"/>
-                </a:lnTo>
-                <a:lnTo>
-                  <a:pt x="0" y="2434"/>
+                  <a:pt x="540" y="2474"/>
+                </a:lnTo>
+                <a:lnTo>
+                  <a:pt x="0" y="2474"/>
                 </a:lnTo>
                 <a:lnTo>
                   <a:pt x="0" y="0"/>
@@ -8225,8 +8225,8 @@
         </p:nvSpPr>
         <p:spPr>
           <a:xfrm>
-            <a:off x="6945840" y="2355120"/>
-            <a:ext cx="194400" cy="347400"/>
+            <a:off x="6945840" y="2385720"/>
+            <a:ext cx="194400" cy="316800"/>
           </a:xfrm>
           <a:custGeom>
             <a:avLst/>
@@ -8234,7 +8234,7 @@
             <a:ahLst/>
             <a:rect l="0" t="0" r="r" b="b"/>
             <a:pathLst>
-              <a:path w="540" h="965">
+              <a:path w="540" h="880">
                 <a:moveTo>
                   <a:pt x="0" y="0"/>
                 </a:moveTo>
@@ -8242,10 +8242,10 @@
                   <a:pt x="540" y="0"/>
                 </a:lnTo>
                 <a:lnTo>
-                  <a:pt x="540" y="965"/>
-                </a:lnTo>
-                <a:lnTo>
-                  <a:pt x="0" y="965"/>
+                  <a:pt x="540" y="880"/>
+                </a:lnTo>
+                <a:lnTo>
+                  <a:pt x="0" y="880"/>
                 </a:lnTo>
                 <a:lnTo>
                   <a:pt x="0" y="0"/>
@@ -8424,7 +8424,7 @@
         </p:nvSpPr>
         <p:spPr>
           <a:xfrm>
-            <a:off x="5186520" y="2076840"/>
+            <a:off x="5186520" y="2069640"/>
             <a:ext cx="142560" cy="102600"/>
           </a:xfrm>
           <a:prstGeom prst="rect">
@@ -8472,7 +8472,7 @@
         </p:nvSpPr>
         <p:spPr>
           <a:xfrm>
-            <a:off x="5186520" y="1502280"/>
+            <a:off x="5186520" y="1487880"/>
             <a:ext cx="142560" cy="102600"/>
           </a:xfrm>
           <a:prstGeom prst="rect">
@@ -8563,7 +8563,7 @@
         </p:nvSpPr>
         <p:spPr>
           <a:xfrm>
-            <a:off x="5338800" y="2127600"/>
+            <a:off x="5338800" y="2120400"/>
             <a:ext cx="31320" cy="0"/>
           </a:xfrm>
           <a:prstGeom prst="line">
@@ -8606,7 +8606,7 @@
         </p:nvSpPr>
         <p:spPr>
           <a:xfrm>
-            <a:off x="5338800" y="1553040"/>
+            <a:off x="5338800" y="1538640"/>
             <a:ext cx="31320" cy="0"/>
           </a:xfrm>
           <a:prstGeom prst="line">
@@ -8649,7 +8649,7 @@
         </p:nvSpPr>
         <p:spPr>
           <a:xfrm>
-            <a:off x="5338800" y="978120"/>
+            <a:off x="5338800" y="956880"/>
             <a:ext cx="31320" cy="0"/>
           </a:xfrm>
           <a:prstGeom prst="line">
@@ -8993,7 +8993,7 @@
         </p:nvSpPr>
         <p:spPr>
           <a:xfrm>
-            <a:off x="5186520" y="927720"/>
+            <a:off x="5186520" y="906120"/>
             <a:ext cx="142560" cy="102600"/>
           </a:xfrm>
           <a:prstGeom prst="rect">
